--- a/Week_4/Advanced_Java_Design_Patterns_&_JDBC.pptx
+++ b/Week_4/Advanced_Java_Design_Patterns_&_JDBC.pptx
@@ -36,7 +36,9 @@
     <p:sldId id="286" r:id="rId30"/>
     <p:sldId id="287" r:id="rId31"/>
     <p:sldId id="288" r:id="rId32"/>
-    <p:sldId id="262" r:id="rId33"/>
+    <p:sldId id="293" r:id="rId33"/>
+    <p:sldId id="294" r:id="rId34"/>
+    <p:sldId id="262" r:id="rId35"/>
   </p:sldIdLst>
   <p:sldSz cx="12192000" cy="6858000"/>
   <p:notesSz cx="6858000" cy="9144000"/>
@@ -403,7 +405,7 @@
             <a:fld id="{B61BEF0D-F0BB-DE4B-95CE-6DB70DBA9567}" type="datetimeFigureOut">
               <a:rPr lang="en-US" dirty="0"/>
               <a:pPr/>
-              <a:t>9/13/2026</a:t>
+              <a:t>9/14/2026</a:t>
             </a:fld>
             <a:endParaRPr lang="en-US" dirty="0"/>
           </a:p>
@@ -665,7 +667,7 @@
             <a:fld id="{B61BEF0D-F0BB-DE4B-95CE-6DB70DBA9567}" type="datetimeFigureOut">
               <a:rPr lang="en-US" dirty="0"/>
               <a:pPr/>
-              <a:t>9/13/2026</a:t>
+              <a:t>9/14/2026</a:t>
             </a:fld>
             <a:endParaRPr lang="en-US" dirty="0"/>
           </a:p>
@@ -900,7 +902,7 @@
             <a:fld id="{B61BEF0D-F0BB-DE4B-95CE-6DB70DBA9567}" type="datetimeFigureOut">
               <a:rPr lang="en-US" dirty="0"/>
               <a:pPr/>
-              <a:t>9/13/2026</a:t>
+              <a:t>9/14/2026</a:t>
             </a:fld>
             <a:endParaRPr lang="en-US" dirty="0"/>
           </a:p>
@@ -1147,7 +1149,7 @@
             <a:fld id="{B61BEF0D-F0BB-DE4B-95CE-6DB70DBA9567}" type="datetimeFigureOut">
               <a:rPr lang="en-US" dirty="0"/>
               <a:pPr/>
-              <a:t>9/13/2026</a:t>
+              <a:t>9/14/2026</a:t>
             </a:fld>
             <a:endParaRPr lang="en-US" dirty="0"/>
           </a:p>
@@ -1455,7 +1457,7 @@
             <a:fld id="{B61BEF0D-F0BB-DE4B-95CE-6DB70DBA9567}" type="datetimeFigureOut">
               <a:rPr lang="en-US" dirty="0"/>
               <a:pPr/>
-              <a:t>9/13/2026</a:t>
+              <a:t>9/14/2026</a:t>
             </a:fld>
             <a:endParaRPr lang="en-US" dirty="0"/>
           </a:p>
@@ -1756,7 +1758,7 @@
             <a:fld id="{B61BEF0D-F0BB-DE4B-95CE-6DB70DBA9567}" type="datetimeFigureOut">
               <a:rPr lang="en-US" dirty="0"/>
               <a:pPr/>
-              <a:t>9/13/2026</a:t>
+              <a:t>9/14/2026</a:t>
             </a:fld>
             <a:endParaRPr lang="en-US" dirty="0"/>
           </a:p>
@@ -2177,7 +2179,7 @@
             <a:fld id="{B61BEF0D-F0BB-DE4B-95CE-6DB70DBA9567}" type="datetimeFigureOut">
               <a:rPr lang="en-US" dirty="0"/>
               <a:pPr/>
-              <a:t>9/13/2026</a:t>
+              <a:t>9/14/2026</a:t>
             </a:fld>
             <a:endParaRPr lang="en-US" dirty="0"/>
           </a:p>
@@ -2340,7 +2342,7 @@
             <a:fld id="{B61BEF0D-F0BB-DE4B-95CE-6DB70DBA9567}" type="datetimeFigureOut">
               <a:rPr lang="en-US" dirty="0"/>
               <a:pPr/>
-              <a:t>9/13/2026</a:t>
+              <a:t>9/14/2026</a:t>
             </a:fld>
             <a:endParaRPr lang="en-US" dirty="0"/>
           </a:p>
@@ -2437,7 +2439,7 @@
             <a:fld id="{B61BEF0D-F0BB-DE4B-95CE-6DB70DBA9567}" type="datetimeFigureOut">
               <a:rPr lang="en-US" dirty="0"/>
               <a:pPr/>
-              <a:t>9/13/2026</a:t>
+              <a:t>9/14/2026</a:t>
             </a:fld>
             <a:endParaRPr lang="en-US" dirty="0"/>
           </a:p>
@@ -2815,7 +2817,7 @@
             <a:fld id="{B61BEF0D-F0BB-DE4B-95CE-6DB70DBA9567}" type="datetimeFigureOut">
               <a:rPr lang="en-US" dirty="0"/>
               <a:pPr/>
-              <a:t>9/13/2026</a:t>
+              <a:t>9/14/2026</a:t>
             </a:fld>
             <a:endParaRPr lang="en-US" dirty="0"/>
           </a:p>
@@ -3101,7 +3103,7 @@
             <a:fld id="{B61BEF0D-F0BB-DE4B-95CE-6DB70DBA9567}" type="datetimeFigureOut">
               <a:rPr lang="en-US" dirty="0"/>
               <a:pPr/>
-              <a:t>9/13/2026</a:t>
+              <a:t>9/14/2026</a:t>
             </a:fld>
             <a:endParaRPr lang="en-US" dirty="0"/>
           </a:p>
@@ -3340,7 +3342,7 @@
             <a:fld id="{B61BEF0D-F0BB-DE4B-95CE-6DB70DBA9567}" type="datetimeFigureOut">
               <a:rPr lang="en-US" dirty="0"/>
               <a:pPr/>
-              <a:t>9/13/2026</a:t>
+              <a:t>9/14/2026</a:t>
             </a:fld>
             <a:endParaRPr lang="en-US" dirty="0"/>
           </a:p>
@@ -10877,6 +10879,212 @@
 </file>
 
 <file path=ppt/slides/slide32.xml><?xml version="1.0" encoding="utf-8"?>
+<p:sld xmlns:a="http://schemas.openxmlformats.org/drawingml/2006/main" xmlns:r="http://schemas.openxmlformats.org/officeDocument/2006/relationships" xmlns:p="http://schemas.openxmlformats.org/presentationml/2006/main">
+  <p:cSld>
+    <p:spTree>
+      <p:nvGrpSpPr>
+        <p:cNvPr id="1" name=""/>
+        <p:cNvGrpSpPr/>
+        <p:nvPr/>
+      </p:nvGrpSpPr>
+      <p:grpSpPr>
+        <a:xfrm>
+          <a:off x="0" y="0"/>
+          <a:ext cx="0" cy="0"/>
+          <a:chOff x="0" y="0"/>
+          <a:chExt cx="0" cy="0"/>
+        </a:xfrm>
+      </p:grpSpPr>
+      <p:sp>
+        <p:nvSpPr>
+          <p:cNvPr id="2" name="Title 1">
+            <a:extLst>
+              <a:ext uri="{FF2B5EF4-FFF2-40B4-BE49-F238E27FC236}">
+                <a16:creationId xmlns:a16="http://schemas.microsoft.com/office/drawing/2014/main" id="{4E939D47-47E8-2F2E-DDEC-430634066D24}"/>
+              </a:ext>
+            </a:extLst>
+          </p:cNvPr>
+          <p:cNvSpPr>
+            <a:spLocks noGrp="1"/>
+          </p:cNvSpPr>
+          <p:nvPr>
+            <p:ph type="title"/>
+          </p:nvPr>
+        </p:nvSpPr>
+        <p:spPr/>
+        <p:txBody>
+          <a:bodyPr/>
+          <a:lstStyle/>
+          <a:p>
+            <a:r>
+              <a:rPr lang="en-US" dirty="0"/>
+              <a:t>CLEAN Code</a:t>
+            </a:r>
+          </a:p>
+        </p:txBody>
+      </p:sp>
+      <p:pic>
+        <p:nvPicPr>
+          <p:cNvPr id="5" name="Content Placeholder 4">
+            <a:extLst>
+              <a:ext uri="{FF2B5EF4-FFF2-40B4-BE49-F238E27FC236}">
+                <a16:creationId xmlns:a16="http://schemas.microsoft.com/office/drawing/2014/main" id="{44821DE6-2FF4-B7AC-0158-81FDABDB1E6C}"/>
+              </a:ext>
+            </a:extLst>
+          </p:cNvPr>
+          <p:cNvPicPr>
+            <a:picLocks noGrp="1" noChangeAspect="1"/>
+          </p:cNvPicPr>
+          <p:nvPr>
+            <p:ph idx="1"/>
+          </p:nvPr>
+        </p:nvPicPr>
+        <p:blipFill>
+          <a:blip r:embed="rId2"/>
+          <a:stretch>
+            <a:fillRect/>
+          </a:stretch>
+        </p:blipFill>
+        <p:spPr>
+          <a:xfrm>
+            <a:off x="581192" y="2339338"/>
+            <a:ext cx="5565680" cy="4075852"/>
+          </a:xfrm>
+          <a:prstGeom prst="rect">
+            <a:avLst/>
+          </a:prstGeom>
+        </p:spPr>
+      </p:pic>
+      <p:pic>
+        <p:nvPicPr>
+          <p:cNvPr id="7" name="Picture 6">
+            <a:extLst>
+              <a:ext uri="{FF2B5EF4-FFF2-40B4-BE49-F238E27FC236}">
+                <a16:creationId xmlns:a16="http://schemas.microsoft.com/office/drawing/2014/main" id="{5893B1BC-E740-F04B-9316-9D4712CA482D}"/>
+              </a:ext>
+            </a:extLst>
+          </p:cNvPr>
+          <p:cNvPicPr>
+            <a:picLocks noChangeAspect="1"/>
+          </p:cNvPicPr>
+          <p:nvPr/>
+        </p:nvPicPr>
+        <p:blipFill>
+          <a:blip r:embed="rId3">
+            <a:extLst>
+              <a:ext uri="{28A0092B-C50C-407E-A947-70E740481C1C}">
+                <a14:useLocalDpi xmlns:a14="http://schemas.microsoft.com/office/drawing/2010/main" val="0"/>
+              </a:ext>
+            </a:extLst>
+          </a:blip>
+          <a:stretch>
+            <a:fillRect/>
+          </a:stretch>
+        </p:blipFill>
+        <p:spPr>
+          <a:xfrm>
+            <a:off x="6410295" y="2396084"/>
+            <a:ext cx="4896165" cy="3962360"/>
+          </a:xfrm>
+          <a:prstGeom prst="rect">
+            <a:avLst/>
+          </a:prstGeom>
+        </p:spPr>
+      </p:pic>
+    </p:spTree>
+    <p:extLst>
+      <p:ext uri="{BB962C8B-B14F-4D97-AF65-F5344CB8AC3E}">
+        <p14:creationId xmlns:p14="http://schemas.microsoft.com/office/powerpoint/2010/main" val="2423167164"/>
+      </p:ext>
+    </p:extLst>
+  </p:cSld>
+  <p:clrMapOvr>
+    <a:masterClrMapping/>
+  </p:clrMapOvr>
+</p:sld>
+</file>
+
+<file path=ppt/slides/slide33.xml><?xml version="1.0" encoding="utf-8"?>
+<p:sld xmlns:a="http://schemas.openxmlformats.org/drawingml/2006/main" xmlns:r="http://schemas.openxmlformats.org/officeDocument/2006/relationships" xmlns:p="http://schemas.openxmlformats.org/presentationml/2006/main">
+  <p:cSld>
+    <p:spTree>
+      <p:nvGrpSpPr>
+        <p:cNvPr id="1" name=""/>
+        <p:cNvGrpSpPr/>
+        <p:nvPr/>
+      </p:nvGrpSpPr>
+      <p:grpSpPr>
+        <a:xfrm>
+          <a:off x="0" y="0"/>
+          <a:ext cx="0" cy="0"/>
+          <a:chOff x="0" y="0"/>
+          <a:chExt cx="0" cy="0"/>
+        </a:xfrm>
+      </p:grpSpPr>
+      <p:sp>
+        <p:nvSpPr>
+          <p:cNvPr id="2" name="Title 1">
+            <a:extLst>
+              <a:ext uri="{FF2B5EF4-FFF2-40B4-BE49-F238E27FC236}">
+                <a16:creationId xmlns:a16="http://schemas.microsoft.com/office/drawing/2014/main" id="{9CFE7F20-A33D-7EEB-6111-DE30354377D9}"/>
+              </a:ext>
+            </a:extLst>
+          </p:cNvPr>
+          <p:cNvSpPr>
+            <a:spLocks noGrp="1"/>
+          </p:cNvSpPr>
+          <p:nvPr>
+            <p:ph type="title"/>
+          </p:nvPr>
+        </p:nvSpPr>
+        <p:spPr/>
+        <p:txBody>
+          <a:bodyPr/>
+          <a:lstStyle/>
+          <a:p>
+            <a:endParaRPr lang="en-US"/>
+          </a:p>
+        </p:txBody>
+      </p:sp>
+      <p:sp>
+        <p:nvSpPr>
+          <p:cNvPr id="3" name="Content Placeholder 2">
+            <a:extLst>
+              <a:ext uri="{FF2B5EF4-FFF2-40B4-BE49-F238E27FC236}">
+                <a16:creationId xmlns:a16="http://schemas.microsoft.com/office/drawing/2014/main" id="{84050423-479E-2736-8E50-F6B7D6DC4D22}"/>
+              </a:ext>
+            </a:extLst>
+          </p:cNvPr>
+          <p:cNvSpPr>
+            <a:spLocks noGrp="1"/>
+          </p:cNvSpPr>
+          <p:nvPr>
+            <p:ph idx="1"/>
+          </p:nvPr>
+        </p:nvSpPr>
+        <p:spPr/>
+        <p:txBody>
+          <a:bodyPr/>
+          <a:lstStyle/>
+          <a:p>
+            <a:endParaRPr lang="en-US"/>
+          </a:p>
+        </p:txBody>
+      </p:sp>
+    </p:spTree>
+    <p:extLst>
+      <p:ext uri="{BB962C8B-B14F-4D97-AF65-F5344CB8AC3E}">
+        <p14:creationId xmlns:p14="http://schemas.microsoft.com/office/powerpoint/2010/main" val="2803152689"/>
+      </p:ext>
+    </p:extLst>
+  </p:cSld>
+  <p:clrMapOvr>
+    <a:masterClrMapping/>
+  </p:clrMapOvr>
+</p:sld>
+</file>
+
+<file path=ppt/slides/slide34.xml><?xml version="1.0" encoding="utf-8"?>
 <p:sld xmlns:a="http://schemas.openxmlformats.org/drawingml/2006/main" xmlns:r="http://schemas.openxmlformats.org/officeDocument/2006/relationships" xmlns:p="http://schemas.openxmlformats.org/presentationml/2006/main" show="0">
   <p:cSld>
     <p:spTree>

--- a/Week_4/Advanced_Java_Design_Patterns_&_JDBC.pptx
+++ b/Week_4/Advanced_Java_Design_Patterns_&_JDBC.pptx
@@ -38,7 +38,16 @@
     <p:sldId id="288" r:id="rId32"/>
     <p:sldId id="293" r:id="rId33"/>
     <p:sldId id="294" r:id="rId34"/>
-    <p:sldId id="262" r:id="rId35"/>
+    <p:sldId id="295" r:id="rId35"/>
+    <p:sldId id="296" r:id="rId36"/>
+    <p:sldId id="300" r:id="rId37"/>
+    <p:sldId id="297" r:id="rId38"/>
+    <p:sldId id="301" r:id="rId39"/>
+    <p:sldId id="298" r:id="rId40"/>
+    <p:sldId id="299" r:id="rId41"/>
+    <p:sldId id="303" r:id="rId42"/>
+    <p:sldId id="302" r:id="rId43"/>
+    <p:sldId id="262" r:id="rId44"/>
   </p:sldIdLst>
   <p:sldSz cx="12192000" cy="6858000"/>
   <p:notesSz cx="6858000" cy="9144000"/>
@@ -11042,7 +11051,10 @@
           <a:bodyPr/>
           <a:lstStyle/>
           <a:p>
-            <a:endParaRPr lang="en-US"/>
+            <a:r>
+              <a:rPr lang="en-US" dirty="0"/>
+              <a:t>STOP</a:t>
+            </a:r>
           </a:p>
         </p:txBody>
       </p:sp>
@@ -11067,7 +11079,30 @@
           <a:bodyPr/>
           <a:lstStyle/>
           <a:p>
-            <a:endParaRPr lang="en-US"/>
+            <a:r>
+              <a:rPr lang="en-US" dirty="0"/>
+              <a:t>This is a checkpoint</a:t>
+            </a:r>
+          </a:p>
+          <a:p>
+            <a:r>
+              <a:rPr lang="en-US" dirty="0"/>
+              <a:t>Create a CLEAN code app that reads/writes to files here</a:t>
+            </a:r>
+          </a:p>
+          <a:p>
+            <a:r>
+              <a:rPr lang="en-US" dirty="0"/>
+              <a:t>See the ‘</a:t>
+            </a:r>
+            <a:r>
+              <a:rPr lang="en-US" dirty="0" err="1"/>
+              <a:t>cleancode</a:t>
+            </a:r>
+            <a:r>
+              <a:rPr lang="en-US" dirty="0"/>
+              <a:t>’ project in your course materials as reference</a:t>
+            </a:r>
           </a:p>
         </p:txBody>
       </p:sp>
@@ -11085,17 +11120,11 @@
 </file>
 
 <file path=ppt/slides/slide34.xml><?xml version="1.0" encoding="utf-8"?>
-<p:sld xmlns:a="http://schemas.openxmlformats.org/drawingml/2006/main" xmlns:r="http://schemas.openxmlformats.org/officeDocument/2006/relationships" xmlns:p="http://schemas.openxmlformats.org/presentationml/2006/main" show="0">
+<p:sld xmlns:a="http://schemas.openxmlformats.org/drawingml/2006/main" xmlns:r="http://schemas.openxmlformats.org/officeDocument/2006/relationships" xmlns:p="http://schemas.openxmlformats.org/presentationml/2006/main">
   <p:cSld>
     <p:spTree>
       <p:nvGrpSpPr>
-        <p:cNvPr id="1" name="">
-          <a:extLst>
-            <a:ext uri="{FF2B5EF4-FFF2-40B4-BE49-F238E27FC236}">
-              <a16:creationId xmlns:a16="http://schemas.microsoft.com/office/drawing/2014/main" id="{E83D92F2-BD3F-5502-960E-3CFF3577844B}"/>
-            </a:ext>
-          </a:extLst>
-        </p:cNvPr>
+        <p:cNvPr id="1" name=""/>
         <p:cNvGrpSpPr/>
         <p:nvPr/>
       </p:nvGrpSpPr>
@@ -11112,7 +11141,7 @@
           <p:cNvPr id="2" name="Title 1">
             <a:extLst>
               <a:ext uri="{FF2B5EF4-FFF2-40B4-BE49-F238E27FC236}">
-                <a16:creationId xmlns:a16="http://schemas.microsoft.com/office/drawing/2014/main" id="{475D234C-D59D-E997-1AA0-D508BFFD3CB6}"/>
+                <a16:creationId xmlns:a16="http://schemas.microsoft.com/office/drawing/2014/main" id="{1AA3B464-4EC1-9BB9-389C-90DF1D701D41}"/>
               </a:ext>
             </a:extLst>
           </p:cNvPr>
@@ -11130,7 +11159,7 @@
           <a:p>
             <a:r>
               <a:rPr lang="en-US" dirty="0"/>
-              <a:t>Challenge Demo – How to Excel in this course</a:t>
+              <a:t>JDBC</a:t>
             </a:r>
           </a:p>
         </p:txBody>
@@ -11140,7 +11169,7 @@
           <p:cNvPr id="3" name="Content Placeholder 2">
             <a:extLst>
               <a:ext uri="{FF2B5EF4-FFF2-40B4-BE49-F238E27FC236}">
-                <a16:creationId xmlns:a16="http://schemas.microsoft.com/office/drawing/2014/main" id="{23F8E57B-9E41-4816-C2F2-1105A90F87A9}"/>
+                <a16:creationId xmlns:a16="http://schemas.microsoft.com/office/drawing/2014/main" id="{211E7895-F540-E89F-1950-ABECA8C1A3B6}"/>
               </a:ext>
             </a:extLst>
           </p:cNvPr>
@@ -11153,27 +11182,1051 @@
         </p:nvSpPr>
         <p:spPr>
           <a:xfrm>
-            <a:off x="581192" y="2475925"/>
-            <a:ext cx="5317584" cy="1681246"/>
+            <a:off x="581192" y="2180496"/>
+            <a:ext cx="11029615" cy="4019888"/>
           </a:xfrm>
         </p:spPr>
         <p:txBody>
+          <a:bodyPr>
+            <a:normAutofit fontScale="92500" lnSpcReduction="20000"/>
+          </a:bodyPr>
+          <a:lstStyle/>
+          <a:p>
+            <a:r>
+              <a:rPr lang="en-US" dirty="0"/>
+              <a:t>Java Database Connectivity, or JDBC, is a Java API that allows our applications to connect and interact with different databases, such as PostgreSQL, MySQL, Microsoft SQL, etc.</a:t>
+            </a:r>
+          </a:p>
+          <a:p>
+            <a:r>
+              <a:rPr lang="en-US" dirty="0"/>
+              <a:t>It consists of classes and interfaces that enable the application to access and send requests to the database made by users.</a:t>
+            </a:r>
+          </a:p>
+          <a:p>
+            <a:r>
+              <a:rPr lang="en-US" dirty="0"/>
+              <a:t>JDBC has four main components used to connect to the database.</a:t>
+            </a:r>
+          </a:p>
+          <a:p>
+            <a:pPr lvl="1"/>
+            <a:r>
+              <a:rPr lang="en-US" dirty="0"/>
+              <a:t>JDBC API</a:t>
+            </a:r>
+          </a:p>
+          <a:p>
+            <a:pPr lvl="2"/>
+            <a:r>
+              <a:rPr lang="en-US" dirty="0"/>
+              <a:t>A collection of various classes, methods, and interfaces to communicate with a database, packaged in the </a:t>
+            </a:r>
+            <a:r>
+              <a:rPr lang="en-US" sz="1000" dirty="0" err="1"/>
+              <a:t>java.sql</a:t>
+            </a:r>
+            <a:r>
+              <a:rPr lang="en-US" dirty="0"/>
+              <a:t> and </a:t>
+            </a:r>
+            <a:r>
+              <a:rPr lang="en-US" sz="1000" dirty="0" err="1"/>
+              <a:t>javax.sql</a:t>
+            </a:r>
+            <a:r>
+              <a:rPr lang="en-US" dirty="0"/>
+              <a:t> packages.</a:t>
+            </a:r>
+          </a:p>
+          <a:p>
+            <a:pPr lvl="1"/>
+            <a:r>
+              <a:rPr lang="en-US" dirty="0"/>
+              <a:t>JDBC Driver Manager</a:t>
+            </a:r>
+          </a:p>
+          <a:p>
+            <a:pPr lvl="2"/>
+            <a:r>
+              <a:rPr lang="en-US" dirty="0"/>
+              <a:t>A class within the JDBC API that loads database-specific drivers in the Java application to establish a connection with the database by making a call to a specific database to process a user's request.</a:t>
+            </a:r>
+          </a:p>
+          <a:p>
+            <a:pPr lvl="1"/>
+            <a:r>
+              <a:rPr lang="en-US" dirty="0"/>
+              <a:t>JDBC Test Suite</a:t>
+            </a:r>
+          </a:p>
+          <a:p>
+            <a:pPr lvl="2"/>
+            <a:r>
+              <a:rPr lang="en-US" dirty="0"/>
+              <a:t>Used to test operations performed on the database using the JDBC drivers.</a:t>
+            </a:r>
+          </a:p>
+          <a:p>
+            <a:pPr lvl="1"/>
+            <a:r>
+              <a:rPr lang="en-US" dirty="0"/>
+              <a:t>Database Server</a:t>
+            </a:r>
+          </a:p>
+          <a:p>
+            <a:pPr lvl="2"/>
+            <a:r>
+              <a:rPr lang="en-US" dirty="0"/>
+              <a:t>The database server that the JDBC client will communicate with.</a:t>
+            </a:r>
+          </a:p>
+        </p:txBody>
+      </p:sp>
+    </p:spTree>
+    <p:extLst>
+      <p:ext uri="{BB962C8B-B14F-4D97-AF65-F5344CB8AC3E}">
+        <p14:creationId xmlns:p14="http://schemas.microsoft.com/office/powerpoint/2010/main" val="3542974019"/>
+      </p:ext>
+    </p:extLst>
+  </p:cSld>
+  <p:clrMapOvr>
+    <a:masterClrMapping/>
+  </p:clrMapOvr>
+</p:sld>
+</file>
+
+<file path=ppt/slides/slide35.xml><?xml version="1.0" encoding="utf-8"?>
+<p:sld xmlns:a="http://schemas.openxmlformats.org/drawingml/2006/main" xmlns:r="http://schemas.openxmlformats.org/officeDocument/2006/relationships" xmlns:p="http://schemas.openxmlformats.org/presentationml/2006/main">
+  <p:cSld>
+    <p:spTree>
+      <p:nvGrpSpPr>
+        <p:cNvPr id="1" name=""/>
+        <p:cNvGrpSpPr/>
+        <p:nvPr/>
+      </p:nvGrpSpPr>
+      <p:grpSpPr>
+        <a:xfrm>
+          <a:off x="0" y="0"/>
+          <a:ext cx="0" cy="0"/>
+          <a:chOff x="0" y="0"/>
+          <a:chExt cx="0" cy="0"/>
+        </a:xfrm>
+      </p:grpSpPr>
+      <p:sp>
+        <p:nvSpPr>
+          <p:cNvPr id="2" name="Title 1">
+            <a:extLst>
+              <a:ext uri="{FF2B5EF4-FFF2-40B4-BE49-F238E27FC236}">
+                <a16:creationId xmlns:a16="http://schemas.microsoft.com/office/drawing/2014/main" id="{4A942253-8012-218E-B580-503D3B39A579}"/>
+              </a:ext>
+            </a:extLst>
+          </p:cNvPr>
+          <p:cNvSpPr>
+            <a:spLocks noGrp="1"/>
+          </p:cNvSpPr>
+          <p:nvPr>
+            <p:ph type="title"/>
+          </p:nvPr>
+        </p:nvSpPr>
+        <p:spPr/>
+        <p:txBody>
           <a:bodyPr/>
           <a:lstStyle/>
           <a:p>
             <a:r>
               <a:rPr lang="en-US" dirty="0"/>
-              <a:t>Complete a hands-on challenge</a:t>
-            </a:r>
-          </a:p>
-        </p:txBody>
-      </p:sp>
-      <p:sp>
-        <p:nvSpPr>
-          <p:cNvPr id="6" name="TextBox 5">
+              <a:t>JDBC interfaces</a:t>
+            </a:r>
+          </a:p>
+        </p:txBody>
+      </p:sp>
+      <p:sp>
+        <p:nvSpPr>
+          <p:cNvPr id="3" name="Content Placeholder 2">
             <a:extLst>
               <a:ext uri="{FF2B5EF4-FFF2-40B4-BE49-F238E27FC236}">
-                <a16:creationId xmlns:a16="http://schemas.microsoft.com/office/drawing/2014/main" id="{2DE50FF0-C783-F3C0-044D-2F094F317804}"/>
+                <a16:creationId xmlns:a16="http://schemas.microsoft.com/office/drawing/2014/main" id="{8264E938-B644-B4CA-396D-FD4D6015CD36}"/>
+              </a:ext>
+            </a:extLst>
+          </p:cNvPr>
+          <p:cNvSpPr>
+            <a:spLocks noGrp="1"/>
+          </p:cNvSpPr>
+          <p:nvPr>
+            <p:ph idx="1"/>
+          </p:nvPr>
+        </p:nvSpPr>
+        <p:spPr>
+          <a:xfrm>
+            <a:off x="581192" y="2004164"/>
+            <a:ext cx="11029615" cy="4534422"/>
+          </a:xfrm>
+        </p:spPr>
+        <p:txBody>
+          <a:bodyPr>
+            <a:normAutofit fontScale="70000" lnSpcReduction="20000"/>
+          </a:bodyPr>
+          <a:lstStyle/>
+          <a:p>
+            <a:r>
+              <a:rPr lang="en-US" dirty="0"/>
+              <a:t>Driver</a:t>
+            </a:r>
+          </a:p>
+          <a:p>
+            <a:pPr lvl="1"/>
+            <a:r>
+              <a:rPr lang="en-US" dirty="0"/>
+              <a:t>An interface that is the base interface for every driver class. If you want to create your own driver class, you would implement this interface. Loading a driver class will create an instance of itself and register it with the </a:t>
+            </a:r>
+            <a:r>
+              <a:rPr lang="en-US" dirty="0" err="1"/>
+              <a:t>DriverManager</a:t>
+            </a:r>
+            <a:r>
+              <a:rPr lang="en-US" dirty="0"/>
+              <a:t>.</a:t>
+            </a:r>
+          </a:p>
+          <a:p>
+            <a:r>
+              <a:rPr lang="en-US" dirty="0"/>
+              <a:t>Statement</a:t>
+            </a:r>
+          </a:p>
+          <a:p>
+            <a:pPr lvl="1"/>
+            <a:r>
+              <a:rPr lang="en-US" dirty="0"/>
+              <a:t>An interface that represents a static SQL statement, allowing you to execute that statement and obtain the results.</a:t>
+            </a:r>
+          </a:p>
+          <a:p>
+            <a:r>
+              <a:rPr lang="en-US" dirty="0" err="1"/>
+              <a:t>PreparedStatement</a:t>
+            </a:r>
+            <a:endParaRPr lang="en-US" dirty="0"/>
+          </a:p>
+          <a:p>
+            <a:pPr lvl="1"/>
+            <a:r>
+              <a:rPr lang="en-US" dirty="0"/>
+              <a:t>Represents a pre-compiled statement that you can execute multiple times. You can get an object from this interface using the method of the connection interface </a:t>
+            </a:r>
+            <a:r>
+              <a:rPr lang="en-US" dirty="0" err="1"/>
+              <a:t>prepareStatement</a:t>
+            </a:r>
+            <a:r>
+              <a:rPr lang="en-US" dirty="0"/>
+              <a:t>(). It allows you to get and set values for the variables of the prepared statement.</a:t>
+            </a:r>
+          </a:p>
+          <a:p>
+            <a:r>
+              <a:rPr lang="en-US" dirty="0" err="1"/>
+              <a:t>CallableStatement</a:t>
+            </a:r>
+            <a:endParaRPr lang="en-US" dirty="0"/>
+          </a:p>
+          <a:p>
+            <a:pPr lvl="1"/>
+            <a:r>
+              <a:rPr lang="en-US" dirty="0"/>
+              <a:t>This object allows for the execution of stored procedures. It returns a single or multiple results and will accept input parameters as well. It is created using the </a:t>
+            </a:r>
+            <a:r>
+              <a:rPr lang="en-US" dirty="0" err="1"/>
+              <a:t>prepareCall</a:t>
+            </a:r>
+            <a:r>
+              <a:rPr lang="en-US" dirty="0"/>
+              <a:t>() method of the Connection interface. Like the </a:t>
+            </a:r>
+            <a:r>
+              <a:rPr lang="en-US" dirty="0" err="1"/>
+              <a:t>PreparedStatement</a:t>
+            </a:r>
+            <a:r>
+              <a:rPr lang="en-US" dirty="0"/>
+              <a:t> interface, it provides get and set methods for those variable values to pass input parameters.</a:t>
+            </a:r>
+          </a:p>
+          <a:p>
+            <a:r>
+              <a:rPr lang="en-US" dirty="0"/>
+              <a:t>Connection</a:t>
+            </a:r>
+          </a:p>
+          <a:p>
+            <a:pPr lvl="1"/>
+            <a:r>
+              <a:rPr lang="en-US" dirty="0"/>
+              <a:t>An interface that represents the connection with a specific database, through which SQL statements are executed. It includes additional transactional methods to handle commits and rollbacks.</a:t>
+            </a:r>
+          </a:p>
+          <a:p>
+            <a:r>
+              <a:rPr lang="en-US" dirty="0" err="1"/>
+              <a:t>ResultSet</a:t>
+            </a:r>
+            <a:endParaRPr lang="en-US" dirty="0"/>
+          </a:p>
+          <a:p>
+            <a:pPr lvl="1"/>
+            <a:r>
+              <a:rPr lang="en-US" dirty="0"/>
+              <a:t>Represents the database result set, a table generated by executing the SQL statements, and provides getter and update methods to retrieve and update its content, respectively.</a:t>
+            </a:r>
+          </a:p>
+          <a:p>
+            <a:r>
+              <a:rPr lang="en-US" dirty="0" err="1"/>
+              <a:t>ResultSetMetaData</a:t>
+            </a:r>
+            <a:endParaRPr lang="en-US" dirty="0"/>
+          </a:p>
+          <a:p>
+            <a:pPr lvl="1"/>
+            <a:r>
+              <a:rPr lang="en-US" dirty="0"/>
+              <a:t>An interface used to get information about the result set, such as the number of columns, the names of the columns, data types of the columns, etc.</a:t>
+            </a:r>
+          </a:p>
+          <a:p>
+            <a:endParaRPr lang="en-US" dirty="0"/>
+          </a:p>
+        </p:txBody>
+      </p:sp>
+    </p:spTree>
+    <p:extLst>
+      <p:ext uri="{BB962C8B-B14F-4D97-AF65-F5344CB8AC3E}">
+        <p14:creationId xmlns:p14="http://schemas.microsoft.com/office/powerpoint/2010/main" val="2468476695"/>
+      </p:ext>
+    </p:extLst>
+  </p:cSld>
+  <p:clrMapOvr>
+    <a:masterClrMapping/>
+  </p:clrMapOvr>
+</p:sld>
+</file>
+
+<file path=ppt/slides/slide36.xml><?xml version="1.0" encoding="utf-8"?>
+<p:sld xmlns:a="http://schemas.openxmlformats.org/drawingml/2006/main" xmlns:r="http://schemas.openxmlformats.org/officeDocument/2006/relationships" xmlns:p="http://schemas.openxmlformats.org/presentationml/2006/main">
+  <p:cSld>
+    <p:spTree>
+      <p:nvGrpSpPr>
+        <p:cNvPr id="1" name=""/>
+        <p:cNvGrpSpPr/>
+        <p:nvPr/>
+      </p:nvGrpSpPr>
+      <p:grpSpPr>
+        <a:xfrm>
+          <a:off x="0" y="0"/>
+          <a:ext cx="0" cy="0"/>
+          <a:chOff x="0" y="0"/>
+          <a:chExt cx="0" cy="0"/>
+        </a:xfrm>
+      </p:grpSpPr>
+      <p:sp>
+        <p:nvSpPr>
+          <p:cNvPr id="2" name="Title 1">
+            <a:extLst>
+              <a:ext uri="{FF2B5EF4-FFF2-40B4-BE49-F238E27FC236}">
+                <a16:creationId xmlns:a16="http://schemas.microsoft.com/office/drawing/2014/main" id="{D559C209-FBBB-F231-35B3-E1A449259A60}"/>
+              </a:ext>
+            </a:extLst>
+          </p:cNvPr>
+          <p:cNvSpPr>
+            <a:spLocks noGrp="1"/>
+          </p:cNvSpPr>
+          <p:nvPr>
+            <p:ph type="title"/>
+          </p:nvPr>
+        </p:nvSpPr>
+        <p:spPr/>
+        <p:txBody>
+          <a:bodyPr/>
+          <a:lstStyle/>
+          <a:p>
+            <a:r>
+              <a:rPr lang="en-US" dirty="0"/>
+              <a:t>Execute, </a:t>
+            </a:r>
+            <a:r>
+              <a:rPr lang="en-US" dirty="0" err="1"/>
+              <a:t>excetuteQUery</a:t>
+            </a:r>
+            <a:r>
+              <a:rPr lang="en-US" dirty="0"/>
+              <a:t>, &amp; </a:t>
+            </a:r>
+            <a:r>
+              <a:rPr lang="en-US" dirty="0" err="1"/>
+              <a:t>executeupdate</a:t>
+            </a:r>
+            <a:endParaRPr lang="en-US" dirty="0"/>
+          </a:p>
+        </p:txBody>
+      </p:sp>
+      <p:graphicFrame>
+        <p:nvGraphicFramePr>
+          <p:cNvPr id="4" name="Content Placeholder 3">
+            <a:extLst>
+              <a:ext uri="{FF2B5EF4-FFF2-40B4-BE49-F238E27FC236}">
+                <a16:creationId xmlns:a16="http://schemas.microsoft.com/office/drawing/2014/main" id="{A40C60F4-AFF7-220A-6CC9-8B18C341586B}"/>
+              </a:ext>
+            </a:extLst>
+          </p:cNvPr>
+          <p:cNvGraphicFramePr>
+            <a:graphicFrameLocks noGrp="1"/>
+          </p:cNvGraphicFramePr>
+          <p:nvPr>
+            <p:ph idx="1"/>
+            <p:extLst>
+              <p:ext uri="{D42A27DB-BD31-4B8C-83A1-F6EECF244321}">
+                <p14:modId xmlns:p14="http://schemas.microsoft.com/office/powerpoint/2010/main" val="849680216"/>
+              </p:ext>
+            </p:extLst>
+          </p:nvPr>
+        </p:nvGraphicFramePr>
+        <p:xfrm>
+          <a:off x="581192" y="2837887"/>
+          <a:ext cx="11029950" cy="1463040"/>
+        </p:xfrm>
+        <a:graphic>
+          <a:graphicData uri="http://schemas.openxmlformats.org/drawingml/2006/table">
+            <a:tbl>
+              <a:tblPr>
+                <a:tableStyleId>{5C22544A-7EE6-4342-B048-85BDC9FD1C3A}</a:tableStyleId>
+              </a:tblPr>
+              <a:tblGrid>
+                <a:gridCol w="3676650">
+                  <a:extLst>
+                    <a:ext uri="{9D8B030D-6E8A-4147-A177-3AD203B41FA5}">
+                      <a16:colId xmlns:a16="http://schemas.microsoft.com/office/drawing/2014/main" val="2148184435"/>
+                    </a:ext>
+                  </a:extLst>
+                </a:gridCol>
+                <a:gridCol w="3676650">
+                  <a:extLst>
+                    <a:ext uri="{9D8B030D-6E8A-4147-A177-3AD203B41FA5}">
+                      <a16:colId xmlns:a16="http://schemas.microsoft.com/office/drawing/2014/main" val="2108687923"/>
+                    </a:ext>
+                  </a:extLst>
+                </a:gridCol>
+                <a:gridCol w="3676650">
+                  <a:extLst>
+                    <a:ext uri="{9D8B030D-6E8A-4147-A177-3AD203B41FA5}">
+                      <a16:colId xmlns:a16="http://schemas.microsoft.com/office/drawing/2014/main" val="3379740888"/>
+                    </a:ext>
+                  </a:extLst>
+                </a:gridCol>
+              </a:tblGrid>
+              <a:tr h="0">
+                <a:tc>
+                  <a:txBody>
+                    <a:bodyPr/>
+                    <a:lstStyle/>
+                    <a:p>
+                      <a:pPr marL="0" marR="0" algn="l">
+                        <a:buNone/>
+                      </a:pPr>
+                      <a:r>
+                        <a:rPr lang="en-US" b="1" dirty="0">
+                          <a:effectLst/>
+                        </a:rPr>
+                        <a:t>Method</a:t>
+                      </a:r>
+                      <a:endParaRPr lang="en-US" b="1" i="0" dirty="0">
+                        <a:solidFill>
+                          <a:srgbClr val="FFFFFF"/>
+                        </a:solidFill>
+                        <a:effectLst/>
+                        <a:latin typeface="-apple-system-body"/>
+                      </a:endParaRPr>
+                    </a:p>
+                  </a:txBody>
+                  <a:tcPr anchor="ctr"/>
+                </a:tc>
+                <a:tc>
+                  <a:txBody>
+                    <a:bodyPr/>
+                    <a:lstStyle/>
+                    <a:p>
+                      <a:pPr marL="0" marR="0" algn="l">
+                        <a:buNone/>
+                      </a:pPr>
+                      <a:r>
+                        <a:rPr lang="en-US" b="1" dirty="0">
+                          <a:effectLst/>
+                        </a:rPr>
+                        <a:t>SQL</a:t>
+                      </a:r>
+                      <a:endParaRPr lang="en-US" b="1" i="0" dirty="0">
+                        <a:solidFill>
+                          <a:srgbClr val="FFFFFF"/>
+                        </a:solidFill>
+                        <a:effectLst/>
+                        <a:latin typeface="-apple-system-body"/>
+                      </a:endParaRPr>
+                    </a:p>
+                  </a:txBody>
+                  <a:tcPr anchor="ctr"/>
+                </a:tc>
+                <a:tc>
+                  <a:txBody>
+                    <a:bodyPr/>
+                    <a:lstStyle/>
+                    <a:p>
+                      <a:pPr marL="0" marR="0" algn="l">
+                        <a:buNone/>
+                      </a:pPr>
+                      <a:r>
+                        <a:rPr lang="en-US" b="1" dirty="0">
+                          <a:effectLst/>
+                        </a:rPr>
+                        <a:t>Returns</a:t>
+                      </a:r>
+                      <a:endParaRPr lang="en-US" b="1" i="0" dirty="0">
+                        <a:solidFill>
+                          <a:srgbClr val="FFFFFF"/>
+                        </a:solidFill>
+                        <a:effectLst/>
+                        <a:latin typeface="-apple-system-body"/>
+                      </a:endParaRPr>
+                    </a:p>
+                  </a:txBody>
+                  <a:tcPr anchor="ctr"/>
+                </a:tc>
+                <a:extLst>
+                  <a:ext uri="{0D108BD9-81ED-4DB2-BD59-A6C34878D82A}">
+                    <a16:rowId xmlns:a16="http://schemas.microsoft.com/office/drawing/2014/main" val="528965818"/>
+                  </a:ext>
+                </a:extLst>
+              </a:tr>
+              <a:tr h="0">
+                <a:tc>
+                  <a:txBody>
+                    <a:bodyPr/>
+                    <a:lstStyle/>
+                    <a:p>
+                      <a:pPr marL="0" marR="0" algn="l">
+                        <a:buNone/>
+                      </a:pPr>
+                      <a:r>
+                        <a:rPr lang="en-US">
+                          <a:effectLst/>
+                        </a:rPr>
+                        <a:t>executeQuery()</a:t>
+                      </a:r>
+                      <a:endParaRPr lang="en-US" b="0" i="0">
+                        <a:solidFill>
+                          <a:srgbClr val="FFFFFF"/>
+                        </a:solidFill>
+                        <a:effectLst/>
+                        <a:latin typeface="-apple-system-body"/>
+                      </a:endParaRPr>
+                    </a:p>
+                  </a:txBody>
+                  <a:tcPr anchor="ctr"/>
+                </a:tc>
+                <a:tc>
+                  <a:txBody>
+                    <a:bodyPr/>
+                    <a:lstStyle/>
+                    <a:p>
+                      <a:pPr marL="0" marR="0" algn="l">
+                        <a:buNone/>
+                      </a:pPr>
+                      <a:r>
+                        <a:rPr lang="en-US">
+                          <a:effectLst/>
+                        </a:rPr>
+                        <a:t>SELECT</a:t>
+                      </a:r>
+                      <a:endParaRPr lang="en-US" b="0" i="0">
+                        <a:solidFill>
+                          <a:srgbClr val="FFFFFF"/>
+                        </a:solidFill>
+                        <a:effectLst/>
+                        <a:latin typeface="-apple-system-body"/>
+                      </a:endParaRPr>
+                    </a:p>
+                  </a:txBody>
+                  <a:tcPr anchor="ctr"/>
+                </a:tc>
+                <a:tc>
+                  <a:txBody>
+                    <a:bodyPr/>
+                    <a:lstStyle/>
+                    <a:p>
+                      <a:pPr marL="0" marR="0" algn="l">
+                        <a:buNone/>
+                      </a:pPr>
+                      <a:r>
+                        <a:rPr lang="en-US">
+                          <a:effectLst/>
+                        </a:rPr>
+                        <a:t>ResultSet</a:t>
+                      </a:r>
+                      <a:endParaRPr lang="en-US" b="0" i="0">
+                        <a:solidFill>
+                          <a:srgbClr val="FFFFFF"/>
+                        </a:solidFill>
+                        <a:effectLst/>
+                        <a:latin typeface="-apple-system-body"/>
+                      </a:endParaRPr>
+                    </a:p>
+                  </a:txBody>
+                  <a:tcPr anchor="ctr"/>
+                </a:tc>
+                <a:extLst>
+                  <a:ext uri="{0D108BD9-81ED-4DB2-BD59-A6C34878D82A}">
+                    <a16:rowId xmlns:a16="http://schemas.microsoft.com/office/drawing/2014/main" val="225359413"/>
+                  </a:ext>
+                </a:extLst>
+              </a:tr>
+              <a:tr h="0">
+                <a:tc>
+                  <a:txBody>
+                    <a:bodyPr/>
+                    <a:lstStyle/>
+                    <a:p>
+                      <a:pPr marL="0" marR="0" algn="l">
+                        <a:buNone/>
+                      </a:pPr>
+                      <a:r>
+                        <a:rPr lang="en-US">
+                          <a:effectLst/>
+                        </a:rPr>
+                        <a:t>executeUpdate()</a:t>
+                      </a:r>
+                      <a:endParaRPr lang="en-US" b="0" i="0">
+                        <a:solidFill>
+                          <a:srgbClr val="FFFFFF"/>
+                        </a:solidFill>
+                        <a:effectLst/>
+                        <a:latin typeface="-apple-system-body"/>
+                      </a:endParaRPr>
+                    </a:p>
+                  </a:txBody>
+                  <a:tcPr anchor="ctr"/>
+                </a:tc>
+                <a:tc>
+                  <a:txBody>
+                    <a:bodyPr/>
+                    <a:lstStyle/>
+                    <a:p>
+                      <a:pPr marL="0" marR="0" algn="l">
+                        <a:buNone/>
+                      </a:pPr>
+                      <a:r>
+                        <a:rPr lang="en-US">
+                          <a:effectLst/>
+                        </a:rPr>
+                        <a:t>INSERT, UPDATE, DELETE</a:t>
+                      </a:r>
+                      <a:endParaRPr lang="en-US" b="0" i="0">
+                        <a:solidFill>
+                          <a:srgbClr val="FFFFFF"/>
+                        </a:solidFill>
+                        <a:effectLst/>
+                        <a:latin typeface="-apple-system-body"/>
+                      </a:endParaRPr>
+                    </a:p>
+                  </a:txBody>
+                  <a:tcPr anchor="ctr"/>
+                </a:tc>
+                <a:tc>
+                  <a:txBody>
+                    <a:bodyPr/>
+                    <a:lstStyle/>
+                    <a:p>
+                      <a:pPr marL="0" marR="0" algn="l">
+                        <a:buNone/>
+                      </a:pPr>
+                      <a:r>
+                        <a:rPr lang="en-US">
+                          <a:effectLst/>
+                        </a:rPr>
+                        <a:t>int (rows affected)</a:t>
+                      </a:r>
+                      <a:endParaRPr lang="en-US" b="0" i="0">
+                        <a:solidFill>
+                          <a:srgbClr val="FFFFFF"/>
+                        </a:solidFill>
+                        <a:effectLst/>
+                        <a:latin typeface="-apple-system-body"/>
+                      </a:endParaRPr>
+                    </a:p>
+                  </a:txBody>
+                  <a:tcPr anchor="ctr"/>
+                </a:tc>
+                <a:extLst>
+                  <a:ext uri="{0D108BD9-81ED-4DB2-BD59-A6C34878D82A}">
+                    <a16:rowId xmlns:a16="http://schemas.microsoft.com/office/drawing/2014/main" val="2457519673"/>
+                  </a:ext>
+                </a:extLst>
+              </a:tr>
+              <a:tr h="0">
+                <a:tc>
+                  <a:txBody>
+                    <a:bodyPr/>
+                    <a:lstStyle/>
+                    <a:p>
+                      <a:pPr marL="0" marR="0" algn="l">
+                        <a:buNone/>
+                      </a:pPr>
+                      <a:r>
+                        <a:rPr lang="en-US">
+                          <a:effectLst/>
+                        </a:rPr>
+                        <a:t>execute()</a:t>
+                      </a:r>
+                      <a:endParaRPr lang="en-US" b="0" i="0">
+                        <a:solidFill>
+                          <a:srgbClr val="FFFFFF"/>
+                        </a:solidFill>
+                        <a:effectLst/>
+                        <a:latin typeface="-apple-system-body"/>
+                      </a:endParaRPr>
+                    </a:p>
+                  </a:txBody>
+                  <a:tcPr anchor="ctr"/>
+                </a:tc>
+                <a:tc>
+                  <a:txBody>
+                    <a:bodyPr/>
+                    <a:lstStyle/>
+                    <a:p>
+                      <a:pPr marL="0" marR="0" algn="l">
+                        <a:buNone/>
+                      </a:pPr>
+                      <a:r>
+                        <a:rPr lang="en-US">
+                          <a:effectLst/>
+                        </a:rPr>
+                        <a:t>SQL where result type may vary</a:t>
+                      </a:r>
+                      <a:endParaRPr lang="en-US" b="0" i="0">
+                        <a:solidFill>
+                          <a:srgbClr val="FFFFFF"/>
+                        </a:solidFill>
+                        <a:effectLst/>
+                        <a:latin typeface="-apple-system-body"/>
+                      </a:endParaRPr>
+                    </a:p>
+                  </a:txBody>
+                  <a:tcPr anchor="ctr"/>
+                </a:tc>
+                <a:tc>
+                  <a:txBody>
+                    <a:bodyPr/>
+                    <a:lstStyle/>
+                    <a:p>
+                      <a:pPr marL="0" marR="0" algn="l">
+                        <a:buNone/>
+                      </a:pPr>
+                      <a:r>
+                        <a:rPr lang="en-US" dirty="0" err="1">
+                          <a:effectLst/>
+                        </a:rPr>
+                        <a:t>boolean</a:t>
+                      </a:r>
+                      <a:endParaRPr lang="en-US" b="0" i="0" dirty="0">
+                        <a:solidFill>
+                          <a:srgbClr val="FFFFFF"/>
+                        </a:solidFill>
+                        <a:effectLst/>
+                        <a:latin typeface="-apple-system-body"/>
+                      </a:endParaRPr>
+                    </a:p>
+                  </a:txBody>
+                  <a:tcPr anchor="ctr"/>
+                </a:tc>
+                <a:extLst>
+                  <a:ext uri="{0D108BD9-81ED-4DB2-BD59-A6C34878D82A}">
+                    <a16:rowId xmlns:a16="http://schemas.microsoft.com/office/drawing/2014/main" val="2191369430"/>
+                  </a:ext>
+                </a:extLst>
+              </a:tr>
+            </a:tbl>
+          </a:graphicData>
+        </a:graphic>
+      </p:graphicFrame>
+    </p:spTree>
+    <p:extLst>
+      <p:ext uri="{BB962C8B-B14F-4D97-AF65-F5344CB8AC3E}">
+        <p14:creationId xmlns:p14="http://schemas.microsoft.com/office/powerpoint/2010/main" val="1901555277"/>
+      </p:ext>
+    </p:extLst>
+  </p:cSld>
+  <p:clrMapOvr>
+    <a:masterClrMapping/>
+  </p:clrMapOvr>
+</p:sld>
+</file>
+
+<file path=ppt/slides/slide37.xml><?xml version="1.0" encoding="utf-8"?>
+<p:sld xmlns:a="http://schemas.openxmlformats.org/drawingml/2006/main" xmlns:r="http://schemas.openxmlformats.org/officeDocument/2006/relationships" xmlns:p="http://schemas.openxmlformats.org/presentationml/2006/main">
+  <p:cSld>
+    <p:spTree>
+      <p:nvGrpSpPr>
+        <p:cNvPr id="1" name=""/>
+        <p:cNvGrpSpPr/>
+        <p:nvPr/>
+      </p:nvGrpSpPr>
+      <p:grpSpPr>
+        <a:xfrm>
+          <a:off x="0" y="0"/>
+          <a:ext cx="0" cy="0"/>
+          <a:chOff x="0" y="0"/>
+          <a:chExt cx="0" cy="0"/>
+        </a:xfrm>
+      </p:grpSpPr>
+      <p:sp>
+        <p:nvSpPr>
+          <p:cNvPr id="2" name="Title 1">
+            <a:extLst>
+              <a:ext uri="{FF2B5EF4-FFF2-40B4-BE49-F238E27FC236}">
+                <a16:creationId xmlns:a16="http://schemas.microsoft.com/office/drawing/2014/main" id="{F6C69135-6FF1-FC10-8C8D-959FE14D8CDC}"/>
+              </a:ext>
+            </a:extLst>
+          </p:cNvPr>
+          <p:cNvSpPr>
+            <a:spLocks noGrp="1"/>
+          </p:cNvSpPr>
+          <p:nvPr>
+            <p:ph type="title"/>
+          </p:nvPr>
+        </p:nvSpPr>
+        <p:spPr/>
+        <p:txBody>
+          <a:bodyPr/>
+          <a:lstStyle/>
+          <a:p>
+            <a:r>
+              <a:rPr lang="en-US" dirty="0" err="1"/>
+              <a:t>Resultlset</a:t>
+            </a:r>
+            <a:r>
+              <a:rPr lang="en-US" dirty="0"/>
+              <a:t> methods</a:t>
+            </a:r>
+          </a:p>
+        </p:txBody>
+      </p:sp>
+      <p:sp>
+        <p:nvSpPr>
+          <p:cNvPr id="3" name="Content Placeholder 2">
+            <a:extLst>
+              <a:ext uri="{FF2B5EF4-FFF2-40B4-BE49-F238E27FC236}">
+                <a16:creationId xmlns:a16="http://schemas.microsoft.com/office/drawing/2014/main" id="{F2103841-528E-CF1A-F652-72C68E5515AE}"/>
+              </a:ext>
+            </a:extLst>
+          </p:cNvPr>
+          <p:cNvSpPr>
+            <a:spLocks noGrp="1"/>
+          </p:cNvSpPr>
+          <p:nvPr>
+            <p:ph idx="1"/>
+          </p:nvPr>
+        </p:nvSpPr>
+        <p:spPr>
+          <a:xfrm>
+            <a:off x="581192" y="2066796"/>
+            <a:ext cx="11029615" cy="4709786"/>
+          </a:xfrm>
+        </p:spPr>
+        <p:txBody>
+          <a:bodyPr>
+            <a:normAutofit fontScale="77500" lnSpcReduction="20000"/>
+          </a:bodyPr>
+          <a:lstStyle/>
+          <a:p>
+            <a:r>
+              <a:rPr lang="en-US" dirty="0"/>
+              <a:t>next()</a:t>
+            </a:r>
+          </a:p>
+          <a:p>
+            <a:pPr lvl="1"/>
+            <a:r>
+              <a:rPr lang="en-US" dirty="0"/>
+              <a:t>Moves the cursor to the next row in the result set and returns true if a valid row exists. This method is typically used in a loop to iterate through all rows.</a:t>
+            </a:r>
+          </a:p>
+          <a:p>
+            <a:r>
+              <a:rPr lang="en-US" dirty="0"/>
+              <a:t>previous()</a:t>
+            </a:r>
+          </a:p>
+          <a:p>
+            <a:pPr lvl="1"/>
+            <a:r>
+              <a:rPr lang="en-US" dirty="0"/>
+              <a:t>Moves the cursor to the previous row in the result set and returns true if a valid row exists.</a:t>
+            </a:r>
+          </a:p>
+          <a:p>
+            <a:r>
+              <a:rPr lang="en-US" dirty="0"/>
+              <a:t>first()</a:t>
+            </a:r>
+          </a:p>
+          <a:p>
+            <a:pPr lvl="1"/>
+            <a:r>
+              <a:rPr lang="en-US" dirty="0"/>
+              <a:t>Moves the cursor to the first row in the result set and returns true if a valid row exists.</a:t>
+            </a:r>
+          </a:p>
+          <a:p>
+            <a:r>
+              <a:rPr lang="en-US" dirty="0"/>
+              <a:t>last()</a:t>
+            </a:r>
+          </a:p>
+          <a:p>
+            <a:pPr lvl="1"/>
+            <a:r>
+              <a:rPr lang="en-US" dirty="0"/>
+              <a:t>Moves the cursor to the last row in the result set and returns true if a valid row exists.</a:t>
+            </a:r>
+          </a:p>
+          <a:p>
+            <a:r>
+              <a:rPr lang="en-US" dirty="0"/>
+              <a:t>absolute(int row)</a:t>
+            </a:r>
+          </a:p>
+          <a:p>
+            <a:pPr lvl="1"/>
+            <a:r>
+              <a:rPr lang="en-US" dirty="0"/>
+              <a:t>Moves the cursor to the specified row number, where the first row is 1. Returns true if the specified row is valid.</a:t>
+            </a:r>
+          </a:p>
+          <a:p>
+            <a:r>
+              <a:rPr lang="en-US" dirty="0"/>
+              <a:t>relative(int rows)</a:t>
+            </a:r>
+          </a:p>
+          <a:p>
+            <a:pPr lvl="1"/>
+            <a:r>
+              <a:rPr lang="en-US" dirty="0"/>
+              <a:t>Moves the cursor forward or backward by the specified number of rows. The argument can be positive or negative, indicating the direction and magnitude of movement.</a:t>
+            </a:r>
+          </a:p>
+          <a:p>
+            <a:r>
+              <a:rPr lang="en-US" dirty="0" err="1"/>
+              <a:t>isFirst</a:t>
+            </a:r>
+            <a:r>
+              <a:rPr lang="en-US" dirty="0"/>
+              <a:t>()</a:t>
+            </a:r>
+          </a:p>
+          <a:p>
+            <a:pPr lvl="1"/>
+            <a:r>
+              <a:rPr lang="en-US" dirty="0"/>
+              <a:t>Returns true if the cursor is currently positioned at the first row in the result set.</a:t>
+            </a:r>
+          </a:p>
+          <a:p>
+            <a:r>
+              <a:rPr lang="en-US" dirty="0" err="1"/>
+              <a:t>isLast</a:t>
+            </a:r>
+            <a:r>
+              <a:rPr lang="en-US" dirty="0"/>
+              <a:t>()</a:t>
+            </a:r>
+          </a:p>
+          <a:p>
+            <a:pPr lvl="1"/>
+            <a:r>
+              <a:rPr lang="en-US" dirty="0"/>
+              <a:t>Returns true if the cursor is currently positioned at the last row in the result set.</a:t>
+            </a:r>
+          </a:p>
+          <a:p>
+            <a:endParaRPr lang="en-US" dirty="0"/>
+          </a:p>
+        </p:txBody>
+      </p:sp>
+    </p:spTree>
+    <p:extLst>
+      <p:ext uri="{BB962C8B-B14F-4D97-AF65-F5344CB8AC3E}">
+        <p14:creationId xmlns:p14="http://schemas.microsoft.com/office/powerpoint/2010/main" val="3453384709"/>
+      </p:ext>
+    </p:extLst>
+  </p:cSld>
+  <p:clrMapOvr>
+    <a:masterClrMapping/>
+  </p:clrMapOvr>
+</p:sld>
+</file>
+
+<file path=ppt/slides/slide38.xml><?xml version="1.0" encoding="utf-8"?>
+<p:sld xmlns:a="http://schemas.openxmlformats.org/drawingml/2006/main" xmlns:r="http://schemas.openxmlformats.org/officeDocument/2006/relationships" xmlns:p="http://schemas.openxmlformats.org/presentationml/2006/main">
+  <p:cSld>
+    <p:spTree>
+      <p:nvGrpSpPr>
+        <p:cNvPr id="1" name=""/>
+        <p:cNvGrpSpPr/>
+        <p:nvPr/>
+      </p:nvGrpSpPr>
+      <p:grpSpPr>
+        <a:xfrm>
+          <a:off x="0" y="0"/>
+          <a:ext cx="0" cy="0"/>
+          <a:chOff x="0" y="0"/>
+          <a:chExt cx="0" cy="0"/>
+        </a:xfrm>
+      </p:grpSpPr>
+      <p:sp>
+        <p:nvSpPr>
+          <p:cNvPr id="2" name="Title 1">
+            <a:extLst>
+              <a:ext uri="{FF2B5EF4-FFF2-40B4-BE49-F238E27FC236}">
+                <a16:creationId xmlns:a16="http://schemas.microsoft.com/office/drawing/2014/main" id="{394154ED-13F7-7C62-E9BF-F4BAA098B4D5}"/>
+              </a:ext>
+            </a:extLst>
+          </p:cNvPr>
+          <p:cNvSpPr>
+            <a:spLocks noGrp="1"/>
+          </p:cNvSpPr>
+          <p:nvPr>
+            <p:ph type="title"/>
+          </p:nvPr>
+        </p:nvSpPr>
+        <p:spPr/>
+        <p:txBody>
+          <a:bodyPr/>
+          <a:lstStyle/>
+          <a:p>
+            <a:r>
+              <a:rPr lang="en-US" dirty="0"/>
+              <a:t>Callable statement example – in &amp; out param</a:t>
+            </a:r>
+          </a:p>
+        </p:txBody>
+      </p:sp>
+      <p:sp>
+        <p:nvSpPr>
+          <p:cNvPr id="5" name="TextBox 4">
+            <a:extLst>
+              <a:ext uri="{FF2B5EF4-FFF2-40B4-BE49-F238E27FC236}">
+                <a16:creationId xmlns:a16="http://schemas.microsoft.com/office/drawing/2014/main" id="{7A6532B1-11CA-E156-CF29-10285234C8D6}"/>
               </a:ext>
             </a:extLst>
           </p:cNvPr>
@@ -11182,8 +12235,8 @@
         </p:nvSpPr>
         <p:spPr>
           <a:xfrm>
-            <a:off x="1228165" y="2402747"/>
-            <a:ext cx="756938" cy="369332"/>
+            <a:off x="3047478" y="2556722"/>
+            <a:ext cx="5983788" cy="2585323"/>
           </a:xfrm>
           <a:prstGeom prst="rect">
             <a:avLst/>
@@ -11191,24 +12244,217 @@
           <a:noFill/>
         </p:spPr>
         <p:txBody>
-          <a:bodyPr wrap="none" rtlCol="0">
+          <a:bodyPr wrap="square">
             <a:spAutoFit/>
           </a:bodyPr>
           <a:lstStyle/>
           <a:p>
             <a:r>
-              <a:rPr lang="en-US" b="1" dirty="0"/>
-              <a:t>Goal:</a:t>
-            </a:r>
-          </a:p>
-        </p:txBody>
-      </p:sp>
-      <p:sp>
-        <p:nvSpPr>
-          <p:cNvPr id="7" name="TextBox 6">
+              <a:rPr lang="en-US" dirty="0" err="1"/>
+              <a:t>CallableStatement</a:t>
+            </a:r>
+            <a:r>
+              <a:rPr lang="en-US" dirty="0"/>
+              <a:t> statement =</a:t>
+            </a:r>
+          </a:p>
+          <a:p>
+            <a:r>
+              <a:rPr lang="en-US" dirty="0"/>
+              <a:t>    </a:t>
+            </a:r>
+            <a:r>
+              <a:rPr lang="en-US" dirty="0" err="1"/>
+              <a:t>connection.prepareCall</a:t>
+            </a:r>
+            <a:r>
+              <a:rPr lang="en-US" dirty="0"/>
+              <a:t>("{call </a:t>
+            </a:r>
+            <a:r>
+              <a:rPr lang="en-US" dirty="0" err="1"/>
+              <a:t>calculate_gpa</a:t>
+            </a:r>
+            <a:r>
+              <a:rPr lang="en-US" dirty="0"/>
+              <a:t>(?, ?)}");</a:t>
+            </a:r>
+          </a:p>
+          <a:p>
+            <a:endParaRPr lang="en-US" dirty="0"/>
+          </a:p>
+          <a:p>
+            <a:r>
+              <a:rPr lang="en-US" dirty="0" err="1"/>
+              <a:t>statement.setInt</a:t>
+            </a:r>
+            <a:r>
+              <a:rPr lang="en-US" dirty="0"/>
+              <a:t>(1, 42);</a:t>
+            </a:r>
+          </a:p>
+          <a:p>
+            <a:r>
+              <a:rPr lang="en-US" dirty="0" err="1"/>
+              <a:t>statement.registerOutParameter</a:t>
+            </a:r>
+            <a:r>
+              <a:rPr lang="en-US" dirty="0"/>
+              <a:t>(2, </a:t>
+            </a:r>
+            <a:r>
+              <a:rPr lang="en-US" dirty="0" err="1"/>
+              <a:t>Types.DOUBLE</a:t>
+            </a:r>
+            <a:r>
+              <a:rPr lang="en-US" dirty="0"/>
+              <a:t>);</a:t>
+            </a:r>
+          </a:p>
+          <a:p>
+            <a:endParaRPr lang="en-US" dirty="0"/>
+          </a:p>
+          <a:p>
+            <a:r>
+              <a:rPr lang="en-US" dirty="0" err="1"/>
+              <a:t>statement.execute</a:t>
+            </a:r>
+            <a:r>
+              <a:rPr lang="en-US" dirty="0"/>
+              <a:t>();</a:t>
+            </a:r>
+          </a:p>
+          <a:p>
+            <a:endParaRPr lang="en-US" dirty="0"/>
+          </a:p>
+          <a:p>
+            <a:r>
+              <a:rPr lang="en-US" dirty="0"/>
+              <a:t>double </a:t>
+            </a:r>
+            <a:r>
+              <a:rPr lang="en-US" dirty="0" err="1"/>
+              <a:t>gpa</a:t>
+            </a:r>
+            <a:r>
+              <a:rPr lang="en-US" dirty="0"/>
+              <a:t> = </a:t>
+            </a:r>
+            <a:r>
+              <a:rPr lang="en-US" dirty="0" err="1"/>
+              <a:t>statement.getDouble</a:t>
+            </a:r>
+            <a:r>
+              <a:rPr lang="en-US" dirty="0"/>
+              <a:t>(2);</a:t>
+            </a:r>
+          </a:p>
+        </p:txBody>
+      </p:sp>
+    </p:spTree>
+    <p:extLst>
+      <p:ext uri="{BB962C8B-B14F-4D97-AF65-F5344CB8AC3E}">
+        <p14:creationId xmlns:p14="http://schemas.microsoft.com/office/powerpoint/2010/main" val="4094025243"/>
+      </p:ext>
+    </p:extLst>
+  </p:cSld>
+  <p:clrMapOvr>
+    <a:masterClrMapping/>
+  </p:clrMapOvr>
+</p:sld>
+</file>
+
+<file path=ppt/slides/slide39.xml><?xml version="1.0" encoding="utf-8"?>
+<p:sld xmlns:a="http://schemas.openxmlformats.org/drawingml/2006/main" xmlns:r="http://schemas.openxmlformats.org/officeDocument/2006/relationships" xmlns:p="http://schemas.openxmlformats.org/presentationml/2006/main">
+  <p:cSld>
+    <p:spTree>
+      <p:nvGrpSpPr>
+        <p:cNvPr id="1" name=""/>
+        <p:cNvGrpSpPr/>
+        <p:nvPr/>
+      </p:nvGrpSpPr>
+      <p:grpSpPr>
+        <a:xfrm>
+          <a:off x="0" y="0"/>
+          <a:ext cx="0" cy="0"/>
+          <a:chOff x="0" y="0"/>
+          <a:chExt cx="0" cy="0"/>
+        </a:xfrm>
+      </p:grpSpPr>
+      <p:sp>
+        <p:nvSpPr>
+          <p:cNvPr id="2" name="Title 1">
             <a:extLst>
               <a:ext uri="{FF2B5EF4-FFF2-40B4-BE49-F238E27FC236}">
-                <a16:creationId xmlns:a16="http://schemas.microsoft.com/office/drawing/2014/main" id="{405306AE-2095-D0AE-E069-321DBC55370F}"/>
+                <a16:creationId xmlns:a16="http://schemas.microsoft.com/office/drawing/2014/main" id="{7EB0C4E4-3750-2EAB-3F03-BD99418777D3}"/>
+              </a:ext>
+            </a:extLst>
+          </p:cNvPr>
+          <p:cNvSpPr>
+            <a:spLocks noGrp="1"/>
+          </p:cNvSpPr>
+          <p:nvPr>
+            <p:ph type="title"/>
+          </p:nvPr>
+        </p:nvSpPr>
+        <p:spPr/>
+        <p:txBody>
+          <a:bodyPr/>
+          <a:lstStyle/>
+          <a:p>
+            <a:r>
+              <a:rPr lang="en-US" dirty="0"/>
+              <a:t>Creating a </a:t>
+            </a:r>
+            <a:r>
+              <a:rPr lang="en-US" dirty="0" err="1"/>
+              <a:t>connectionfactory</a:t>
+            </a:r>
+            <a:r>
+              <a:rPr lang="en-US" dirty="0"/>
+              <a:t> utility class</a:t>
+            </a:r>
+          </a:p>
+        </p:txBody>
+      </p:sp>
+      <p:pic>
+        <p:nvPicPr>
+          <p:cNvPr id="5" name="Content Placeholder 4">
+            <a:extLst>
+              <a:ext uri="{FF2B5EF4-FFF2-40B4-BE49-F238E27FC236}">
+                <a16:creationId xmlns:a16="http://schemas.microsoft.com/office/drawing/2014/main" id="{B727215C-EA41-AC98-0477-5226A68BA128}"/>
+              </a:ext>
+            </a:extLst>
+          </p:cNvPr>
+          <p:cNvPicPr>
+            <a:picLocks noGrp="1" noChangeAspect="1"/>
+          </p:cNvPicPr>
+          <p:nvPr>
+            <p:ph idx="1"/>
+          </p:nvPr>
+        </p:nvPicPr>
+        <p:blipFill>
+          <a:blip r:embed="rId2"/>
+          <a:stretch>
+            <a:fillRect/>
+          </a:stretch>
+        </p:blipFill>
+        <p:spPr>
+          <a:xfrm>
+            <a:off x="6422744" y="1860480"/>
+            <a:ext cx="4366673" cy="4295364"/>
+          </a:xfrm>
+          <a:prstGeom prst="rect">
+            <a:avLst/>
+          </a:prstGeom>
+        </p:spPr>
+      </p:pic>
+      <p:sp>
+        <p:nvSpPr>
+          <p:cNvPr id="6" name="TextBox 5">
+            <a:extLst>
+              <a:ext uri="{FF2B5EF4-FFF2-40B4-BE49-F238E27FC236}">
+                <a16:creationId xmlns:a16="http://schemas.microsoft.com/office/drawing/2014/main" id="{4F586557-E5F7-111B-0588-D51ACE800C94}"/>
               </a:ext>
             </a:extLst>
           </p:cNvPr>
@@ -11217,8 +12463,8 @@
         </p:nvSpPr>
         <p:spPr>
           <a:xfrm>
-            <a:off x="6949165" y="2402747"/>
-            <a:ext cx="4661643" cy="369332"/>
+            <a:off x="792447" y="2851099"/>
+            <a:ext cx="4628367" cy="2585323"/>
           </a:xfrm>
           <a:prstGeom prst="rect">
             <a:avLst/>
@@ -11231,252 +12477,118 @@
           </a:bodyPr>
           <a:lstStyle/>
           <a:p>
-            <a:r>
-              <a:rPr lang="en-US" b="1" dirty="0"/>
-              <a:t>Scenario:  			   5 min</a:t>
-            </a:r>
-          </a:p>
-        </p:txBody>
-      </p:sp>
-      <p:sp>
-        <p:nvSpPr>
-          <p:cNvPr id="8" name="Content Placeholder 2">
+            <a:pPr marL="285750" indent="-285750">
+              <a:buClr>
+                <a:schemeClr val="accent2"/>
+              </a:buClr>
+              <a:buFont typeface="Wingdings" panose="05000000000000000000" pitchFamily="2" charset="2"/>
+              <a:buChar char="§"/>
+            </a:pPr>
+            <a:r>
+              <a:rPr lang="en-US" dirty="0" err="1"/>
+              <a:t>java.util.Properties</a:t>
+            </a:r>
+            <a:r>
+              <a:rPr lang="en-US" dirty="0"/>
+              <a:t> – allows us to keep secrets safe in a </a:t>
+            </a:r>
+            <a:r>
+              <a:rPr lang="en-US" dirty="0" err="1"/>
+              <a:t>db.properties</a:t>
+            </a:r>
+            <a:r>
+              <a:rPr lang="en-US" dirty="0"/>
+              <a:t> file</a:t>
+            </a:r>
+          </a:p>
+          <a:p>
+            <a:pPr marL="285750" indent="-285750">
+              <a:buClr>
+                <a:schemeClr val="accent2"/>
+              </a:buClr>
+              <a:buFont typeface="Wingdings" panose="05000000000000000000" pitchFamily="2" charset="2"/>
+              <a:buChar char="§"/>
+            </a:pPr>
+            <a:r>
+              <a:rPr lang="en-US" dirty="0"/>
+              <a:t>We can use this utility class to generate a connection whenever we need to execute commands against our database</a:t>
+            </a:r>
+          </a:p>
+          <a:p>
+            <a:pPr marL="285750" indent="-285750">
+              <a:buClr>
+                <a:schemeClr val="accent2"/>
+              </a:buClr>
+              <a:buFont typeface="Wingdings" panose="05000000000000000000" pitchFamily="2" charset="2"/>
+              <a:buChar char="§"/>
+            </a:pPr>
+            <a:r>
+              <a:rPr lang="en-US" dirty="0"/>
+              <a:t>If using AWS RDS:</a:t>
+            </a:r>
+          </a:p>
+          <a:p>
+            <a:pPr marL="742950" lvl="1" indent="-285750">
+              <a:buClr>
+                <a:schemeClr val="accent2"/>
+              </a:buClr>
+              <a:buFont typeface="Wingdings" panose="05000000000000000000" pitchFamily="2" charset="2"/>
+              <a:buChar char="§"/>
+            </a:pPr>
+            <a:r>
+              <a:rPr lang="en-US" dirty="0"/>
+              <a:t>The user/password is your RDS master user + master password</a:t>
+            </a:r>
+          </a:p>
+          <a:p>
+            <a:pPr marL="742950" lvl="1" indent="-285750">
+              <a:buClr>
+                <a:schemeClr val="accent2"/>
+              </a:buClr>
+              <a:buFont typeface="Wingdings" panose="05000000000000000000" pitchFamily="2" charset="2"/>
+              <a:buChar char="§"/>
+            </a:pPr>
+            <a:r>
+              <a:rPr lang="en-US" dirty="0"/>
+              <a:t>We will see how to find the URL later</a:t>
+            </a:r>
+          </a:p>
+        </p:txBody>
+      </p:sp>
+      <p:pic>
+        <p:nvPicPr>
+          <p:cNvPr id="8" name="Picture 7">
             <a:extLst>
               <a:ext uri="{FF2B5EF4-FFF2-40B4-BE49-F238E27FC236}">
-                <a16:creationId xmlns:a16="http://schemas.microsoft.com/office/drawing/2014/main" id="{61B443B1-E14C-64AB-9E9D-75FFCF923C2B}"/>
+                <a16:creationId xmlns:a16="http://schemas.microsoft.com/office/drawing/2014/main" id="{17BE40EA-C454-05B7-4CDC-697F71D05136}"/>
               </a:ext>
             </a:extLst>
           </p:cNvPr>
-          <p:cNvSpPr txBox="1">
-            <a:spLocks/>
-          </p:cNvSpPr>
+          <p:cNvPicPr>
+            <a:picLocks noChangeAspect="1"/>
+          </p:cNvPicPr>
           <p:nvPr/>
-        </p:nvSpPr>
+        </p:nvPicPr>
+        <p:blipFill>
+          <a:blip r:embed="rId3"/>
+          <a:stretch>
+            <a:fillRect/>
+          </a:stretch>
+        </p:blipFill>
         <p:spPr>
           <a:xfrm>
-            <a:off x="6545749" y="2772079"/>
-            <a:ext cx="4661642" cy="1681246"/>
+            <a:off x="2547624" y="6214365"/>
+            <a:ext cx="8241793" cy="568912"/>
           </a:xfrm>
           <a:prstGeom prst="rect">
             <a:avLst/>
           </a:prstGeom>
         </p:spPr>
-        <p:txBody>
-          <a:bodyPr vert="horz" lIns="91440" tIns="45720" rIns="91440" bIns="45720" rtlCol="0" anchor="ctr">
-            <a:normAutofit/>
-          </a:bodyPr>
-          <a:lstStyle>
-            <a:lvl1pPr marL="306000" indent="-306000" algn="l" defTabSz="457200" rtl="0" eaLnBrk="1" latinLnBrk="0" hangingPunct="1">
-              <a:spcBef>
-                <a:spcPct val="20000"/>
-              </a:spcBef>
-              <a:spcAft>
-                <a:spcPts val="600"/>
-              </a:spcAft>
-              <a:buClr>
-                <a:schemeClr val="accent2"/>
-              </a:buClr>
-              <a:buSzPct val="92000"/>
-              <a:buFont typeface="Wingdings 2" panose="05020102010507070707" pitchFamily="18" charset="2"/>
-              <a:buChar char=""/>
-              <a:defRPr sz="1800" kern="1200">
-                <a:solidFill>
-                  <a:schemeClr val="tx2"/>
-                </a:solidFill>
-                <a:latin typeface="+mn-lt"/>
-                <a:ea typeface="+mn-ea"/>
-                <a:cs typeface="+mn-cs"/>
-              </a:defRPr>
-            </a:lvl1pPr>
-            <a:lvl2pPr marL="630000" indent="-306000" algn="l" defTabSz="457200" rtl="0" eaLnBrk="1" latinLnBrk="0" hangingPunct="1">
-              <a:spcBef>
-                <a:spcPct val="20000"/>
-              </a:spcBef>
-              <a:spcAft>
-                <a:spcPts val="600"/>
-              </a:spcAft>
-              <a:buClr>
-                <a:schemeClr val="accent2"/>
-              </a:buClr>
-              <a:buSzPct val="92000"/>
-              <a:buFont typeface="Wingdings 2" panose="05020102010507070707" pitchFamily="18" charset="2"/>
-              <a:buChar char=""/>
-              <a:defRPr sz="1600" kern="1200">
-                <a:solidFill>
-                  <a:schemeClr val="tx2"/>
-                </a:solidFill>
-                <a:latin typeface="+mn-lt"/>
-                <a:ea typeface="+mn-ea"/>
-                <a:cs typeface="+mn-cs"/>
-              </a:defRPr>
-            </a:lvl2pPr>
-            <a:lvl3pPr marL="900000" indent="-270000" algn="l" defTabSz="457200" rtl="0" eaLnBrk="1" latinLnBrk="0" hangingPunct="1">
-              <a:spcBef>
-                <a:spcPct val="20000"/>
-              </a:spcBef>
-              <a:spcAft>
-                <a:spcPts val="600"/>
-              </a:spcAft>
-              <a:buClr>
-                <a:schemeClr val="accent2"/>
-              </a:buClr>
-              <a:buSzPct val="92000"/>
-              <a:buFont typeface="Wingdings 2" panose="05020102010507070707" pitchFamily="18" charset="2"/>
-              <a:buChar char=""/>
-              <a:defRPr sz="1400" kern="1200">
-                <a:solidFill>
-                  <a:schemeClr val="tx2"/>
-                </a:solidFill>
-                <a:latin typeface="+mn-lt"/>
-                <a:ea typeface="+mn-ea"/>
-                <a:cs typeface="+mn-cs"/>
-              </a:defRPr>
-            </a:lvl3pPr>
-            <a:lvl4pPr marL="1242000" indent="-234000" algn="l" defTabSz="457200" rtl="0" eaLnBrk="1" latinLnBrk="0" hangingPunct="1">
-              <a:spcBef>
-                <a:spcPct val="20000"/>
-              </a:spcBef>
-              <a:spcAft>
-                <a:spcPts val="600"/>
-              </a:spcAft>
-              <a:buClr>
-                <a:schemeClr val="accent2"/>
-              </a:buClr>
-              <a:buSzPct val="92000"/>
-              <a:buFont typeface="Wingdings 2" panose="05020102010507070707" pitchFamily="18" charset="2"/>
-              <a:buChar char=""/>
-              <a:defRPr sz="1200" kern="1200">
-                <a:solidFill>
-                  <a:schemeClr val="tx2"/>
-                </a:solidFill>
-                <a:latin typeface="+mn-lt"/>
-                <a:ea typeface="+mn-ea"/>
-                <a:cs typeface="+mn-cs"/>
-              </a:defRPr>
-            </a:lvl4pPr>
-            <a:lvl5pPr marL="1602000" indent="-234000" algn="l" defTabSz="457200" rtl="0" eaLnBrk="1" latinLnBrk="0" hangingPunct="1">
-              <a:spcBef>
-                <a:spcPct val="20000"/>
-              </a:spcBef>
-              <a:spcAft>
-                <a:spcPts val="600"/>
-              </a:spcAft>
-              <a:buClr>
-                <a:schemeClr val="accent2"/>
-              </a:buClr>
-              <a:buSzPct val="92000"/>
-              <a:buFont typeface="Wingdings 2" panose="05020102010507070707" pitchFamily="18" charset="2"/>
-              <a:buChar char=""/>
-              <a:defRPr sz="1200" kern="1200">
-                <a:solidFill>
-                  <a:schemeClr val="tx2"/>
-                </a:solidFill>
-                <a:latin typeface="+mn-lt"/>
-                <a:ea typeface="+mn-ea"/>
-                <a:cs typeface="+mn-cs"/>
-              </a:defRPr>
-            </a:lvl5pPr>
-            <a:lvl6pPr marL="1900000" indent="-228600" algn="l" defTabSz="457200" rtl="0" eaLnBrk="1" latinLnBrk="0" hangingPunct="1">
-              <a:spcBef>
-                <a:spcPct val="20000"/>
-              </a:spcBef>
-              <a:spcAft>
-                <a:spcPts val="600"/>
-              </a:spcAft>
-              <a:buClr>
-                <a:schemeClr val="accent2"/>
-              </a:buClr>
-              <a:buSzPct val="92000"/>
-              <a:buFont typeface="Wingdings 2" panose="05020102010507070707" pitchFamily="18" charset="2"/>
-              <a:buChar char=""/>
-              <a:defRPr sz="1200" kern="1200">
-                <a:solidFill>
-                  <a:schemeClr val="tx2"/>
-                </a:solidFill>
-                <a:latin typeface="+mn-lt"/>
-                <a:ea typeface="+mn-ea"/>
-                <a:cs typeface="+mn-cs"/>
-              </a:defRPr>
-            </a:lvl6pPr>
-            <a:lvl7pPr marL="2200000" indent="-228600" algn="l" defTabSz="457200" rtl="0" eaLnBrk="1" latinLnBrk="0" hangingPunct="1">
-              <a:spcBef>
-                <a:spcPct val="20000"/>
-              </a:spcBef>
-              <a:spcAft>
-                <a:spcPts val="600"/>
-              </a:spcAft>
-              <a:buClr>
-                <a:schemeClr val="accent2"/>
-              </a:buClr>
-              <a:buSzPct val="92000"/>
-              <a:buFont typeface="Wingdings 2" panose="05020102010507070707" pitchFamily="18" charset="2"/>
-              <a:buChar char=""/>
-              <a:defRPr sz="1200" kern="1200">
-                <a:solidFill>
-                  <a:schemeClr val="tx2"/>
-                </a:solidFill>
-                <a:latin typeface="+mn-lt"/>
-                <a:ea typeface="+mn-ea"/>
-                <a:cs typeface="+mn-cs"/>
-              </a:defRPr>
-            </a:lvl7pPr>
-            <a:lvl8pPr marL="2500000" indent="-228600" algn="l" defTabSz="457200" rtl="0" eaLnBrk="1" latinLnBrk="0" hangingPunct="1">
-              <a:spcBef>
-                <a:spcPct val="20000"/>
-              </a:spcBef>
-              <a:spcAft>
-                <a:spcPts val="600"/>
-              </a:spcAft>
-              <a:buClr>
-                <a:schemeClr val="accent2"/>
-              </a:buClr>
-              <a:buSzPct val="92000"/>
-              <a:buFont typeface="Wingdings 2" panose="05020102010507070707" pitchFamily="18" charset="2"/>
-              <a:buChar char=""/>
-              <a:defRPr sz="1200" kern="1200">
-                <a:solidFill>
-                  <a:schemeClr val="tx2"/>
-                </a:solidFill>
-                <a:latin typeface="+mn-lt"/>
-                <a:ea typeface="+mn-ea"/>
-                <a:cs typeface="+mn-cs"/>
-              </a:defRPr>
-            </a:lvl8pPr>
-            <a:lvl9pPr marL="2800000" indent="-228600" algn="l" defTabSz="457200" rtl="0" eaLnBrk="1" latinLnBrk="0" hangingPunct="1">
-              <a:spcBef>
-                <a:spcPct val="20000"/>
-              </a:spcBef>
-              <a:spcAft>
-                <a:spcPts val="600"/>
-              </a:spcAft>
-              <a:buClr>
-                <a:schemeClr val="accent2"/>
-              </a:buClr>
-              <a:buSzPct val="92000"/>
-              <a:buFont typeface="Wingdings 2" panose="05020102010507070707" pitchFamily="18" charset="2"/>
-              <a:buChar char=""/>
-              <a:defRPr sz="1200" kern="1200">
-                <a:solidFill>
-                  <a:schemeClr val="tx2"/>
-                </a:solidFill>
-                <a:latin typeface="+mn-lt"/>
-                <a:ea typeface="+mn-ea"/>
-                <a:cs typeface="+mn-cs"/>
-              </a:defRPr>
-            </a:lvl9pPr>
-          </a:lstStyle>
-          <a:p>
-            <a:r>
-              <a:rPr lang="en-US" dirty="0"/>
-              <a:t>Your organization needs to relay technical concepts to you. Clients often need to do the same. Take a few moments to get some pen and paper ready to take notes. </a:t>
-            </a:r>
-          </a:p>
-        </p:txBody>
-      </p:sp>
+      </p:pic>
     </p:spTree>
     <p:extLst>
       <p:ext uri="{BB962C8B-B14F-4D97-AF65-F5344CB8AC3E}">
-        <p14:creationId xmlns:p14="http://schemas.microsoft.com/office/powerpoint/2010/main" val="3587871389"/>
+        <p14:creationId xmlns:p14="http://schemas.microsoft.com/office/powerpoint/2010/main" val="3893804983"/>
       </p:ext>
     </p:extLst>
   </p:cSld>
@@ -12164,6 +13276,873 @@
     <p:extLst>
       <p:ext uri="{BB962C8B-B14F-4D97-AF65-F5344CB8AC3E}">
         <p14:creationId xmlns:p14="http://schemas.microsoft.com/office/powerpoint/2010/main" val="1118345055"/>
+      </p:ext>
+    </p:extLst>
+  </p:cSld>
+  <p:clrMapOvr>
+    <a:masterClrMapping/>
+  </p:clrMapOvr>
+</p:sld>
+</file>
+
+<file path=ppt/slides/slide40.xml><?xml version="1.0" encoding="utf-8"?>
+<p:sld xmlns:a="http://schemas.openxmlformats.org/drawingml/2006/main" xmlns:r="http://schemas.openxmlformats.org/officeDocument/2006/relationships" xmlns:p="http://schemas.openxmlformats.org/presentationml/2006/main">
+  <p:cSld>
+    <p:spTree>
+      <p:nvGrpSpPr>
+        <p:cNvPr id="1" name=""/>
+        <p:cNvGrpSpPr/>
+        <p:nvPr/>
+      </p:nvGrpSpPr>
+      <p:grpSpPr>
+        <a:xfrm>
+          <a:off x="0" y="0"/>
+          <a:ext cx="0" cy="0"/>
+          <a:chOff x="0" y="0"/>
+          <a:chExt cx="0" cy="0"/>
+        </a:xfrm>
+      </p:grpSpPr>
+      <p:sp>
+        <p:nvSpPr>
+          <p:cNvPr id="2" name="Title 1">
+            <a:extLst>
+              <a:ext uri="{FF2B5EF4-FFF2-40B4-BE49-F238E27FC236}">
+                <a16:creationId xmlns:a16="http://schemas.microsoft.com/office/drawing/2014/main" id="{60DEE475-84B6-3B5B-F38E-FC2EA34D123B}"/>
+              </a:ext>
+            </a:extLst>
+          </p:cNvPr>
+          <p:cNvSpPr>
+            <a:spLocks noGrp="1"/>
+          </p:cNvSpPr>
+          <p:nvPr>
+            <p:ph type="title"/>
+          </p:nvPr>
+        </p:nvSpPr>
+        <p:spPr/>
+        <p:txBody>
+          <a:bodyPr>
+            <a:normAutofit/>
+          </a:bodyPr>
+          <a:lstStyle/>
+          <a:p>
+            <a:r>
+              <a:rPr lang="en-US" sz="2400" dirty="0"/>
+              <a:t>Using our utility class, </a:t>
+            </a:r>
+            <a:r>
+              <a:rPr lang="en-US" sz="2400" dirty="0" err="1"/>
+              <a:t>preparedstatements</a:t>
+            </a:r>
+            <a:r>
+              <a:rPr lang="en-US" sz="2400" dirty="0"/>
+              <a:t>, &amp; SQL Injection</a:t>
+            </a:r>
+          </a:p>
+        </p:txBody>
+      </p:sp>
+      <p:sp>
+        <p:nvSpPr>
+          <p:cNvPr id="3" name="Content Placeholder 2">
+            <a:extLst>
+              <a:ext uri="{FF2B5EF4-FFF2-40B4-BE49-F238E27FC236}">
+                <a16:creationId xmlns:a16="http://schemas.microsoft.com/office/drawing/2014/main" id="{BD3B6D36-4FDA-9090-64C7-A315151CED79}"/>
+              </a:ext>
+            </a:extLst>
+          </p:cNvPr>
+          <p:cNvSpPr>
+            <a:spLocks noGrp="1"/>
+          </p:cNvSpPr>
+          <p:nvPr>
+            <p:ph idx="1"/>
+          </p:nvPr>
+        </p:nvSpPr>
+        <p:spPr>
+          <a:xfrm>
+            <a:off x="793333" y="2641228"/>
+            <a:ext cx="3749406" cy="3986343"/>
+          </a:xfrm>
+        </p:spPr>
+        <p:txBody>
+          <a:bodyPr>
+            <a:normAutofit fontScale="92500" lnSpcReduction="20000"/>
+          </a:bodyPr>
+          <a:lstStyle/>
+          <a:p>
+            <a:r>
+              <a:rPr lang="en-US" dirty="0"/>
+              <a:t>In our DAO concretion, we can get a connection from our factory</a:t>
+            </a:r>
+          </a:p>
+          <a:p>
+            <a:r>
+              <a:rPr lang="en-US" dirty="0"/>
+              <a:t>Prepared statements let us dynamically inject values into SQL queries while treating the injected data as data, and not more SQL code</a:t>
+            </a:r>
+          </a:p>
+          <a:p>
+            <a:pPr lvl="1"/>
+            <a:r>
+              <a:rPr lang="en-US" dirty="0"/>
+              <a:t>THIS HELPS PREVENTS SQL INJECTION</a:t>
+            </a:r>
+          </a:p>
+          <a:p>
+            <a:pPr lvl="1"/>
+            <a:r>
+              <a:rPr lang="en-US" dirty="0"/>
+              <a:t>Statement is more prone to SQL injection attacks because SQL is constructed as a complete string before execution, allowing user input to become part of the SQL syntax</a:t>
+            </a:r>
+          </a:p>
+          <a:p>
+            <a:pPr lvl="1"/>
+            <a:r>
+              <a:rPr lang="en-US" dirty="0" err="1"/>
+              <a:t>PreparedStatement</a:t>
+            </a:r>
+            <a:r>
+              <a:rPr lang="en-US" dirty="0"/>
+              <a:t> separates SQL from user-supplied data, preventing this</a:t>
+            </a:r>
+          </a:p>
+        </p:txBody>
+      </p:sp>
+      <p:pic>
+        <p:nvPicPr>
+          <p:cNvPr id="5" name="Picture 4">
+            <a:extLst>
+              <a:ext uri="{FF2B5EF4-FFF2-40B4-BE49-F238E27FC236}">
+                <a16:creationId xmlns:a16="http://schemas.microsoft.com/office/drawing/2014/main" id="{673E325F-358C-016F-CD61-FBFD5720D09B}"/>
+              </a:ext>
+            </a:extLst>
+          </p:cNvPr>
+          <p:cNvPicPr>
+            <a:picLocks noChangeAspect="1"/>
+          </p:cNvPicPr>
+          <p:nvPr/>
+        </p:nvPicPr>
+        <p:blipFill>
+          <a:blip r:embed="rId2"/>
+          <a:stretch>
+            <a:fillRect/>
+          </a:stretch>
+        </p:blipFill>
+        <p:spPr>
+          <a:xfrm>
+            <a:off x="4881779" y="3099016"/>
+            <a:ext cx="6683033" cy="2418810"/>
+          </a:xfrm>
+          <a:prstGeom prst="rect">
+            <a:avLst/>
+          </a:prstGeom>
+        </p:spPr>
+      </p:pic>
+      <p:pic>
+        <p:nvPicPr>
+          <p:cNvPr id="7" name="Picture 6">
+            <a:extLst>
+              <a:ext uri="{FF2B5EF4-FFF2-40B4-BE49-F238E27FC236}">
+                <a16:creationId xmlns:a16="http://schemas.microsoft.com/office/drawing/2014/main" id="{24DB4A2B-10FF-BD7B-1C76-DE5B9AB4ECEF}"/>
+              </a:ext>
+            </a:extLst>
+          </p:cNvPr>
+          <p:cNvPicPr>
+            <a:picLocks noChangeAspect="1"/>
+          </p:cNvPicPr>
+          <p:nvPr/>
+        </p:nvPicPr>
+        <p:blipFill>
+          <a:blip r:embed="rId3"/>
+          <a:stretch>
+            <a:fillRect/>
+          </a:stretch>
+        </p:blipFill>
+        <p:spPr>
+          <a:xfrm>
+            <a:off x="1762755" y="2025975"/>
+            <a:ext cx="8666490" cy="209790"/>
+          </a:xfrm>
+          <a:prstGeom prst="rect">
+            <a:avLst/>
+          </a:prstGeom>
+        </p:spPr>
+      </p:pic>
+    </p:spTree>
+    <p:extLst>
+      <p:ext uri="{BB962C8B-B14F-4D97-AF65-F5344CB8AC3E}">
+        <p14:creationId xmlns:p14="http://schemas.microsoft.com/office/powerpoint/2010/main" val="2365124634"/>
+      </p:ext>
+    </p:extLst>
+  </p:cSld>
+  <p:clrMapOvr>
+    <a:masterClrMapping/>
+  </p:clrMapOvr>
+</p:sld>
+</file>
+
+<file path=ppt/slides/slide41.xml><?xml version="1.0" encoding="utf-8"?>
+<p:sld xmlns:a="http://schemas.openxmlformats.org/drawingml/2006/main" xmlns:r="http://schemas.openxmlformats.org/officeDocument/2006/relationships" xmlns:p="http://schemas.openxmlformats.org/presentationml/2006/main">
+  <p:cSld>
+    <p:spTree>
+      <p:nvGrpSpPr>
+        <p:cNvPr id="1" name=""/>
+        <p:cNvGrpSpPr/>
+        <p:nvPr/>
+      </p:nvGrpSpPr>
+      <p:grpSpPr>
+        <a:xfrm>
+          <a:off x="0" y="0"/>
+          <a:ext cx="0" cy="0"/>
+          <a:chOff x="0" y="0"/>
+          <a:chExt cx="0" cy="0"/>
+        </a:xfrm>
+      </p:grpSpPr>
+      <p:sp>
+        <p:nvSpPr>
+          <p:cNvPr id="2" name="Title 1">
+            <a:extLst>
+              <a:ext uri="{FF2B5EF4-FFF2-40B4-BE49-F238E27FC236}">
+                <a16:creationId xmlns:a16="http://schemas.microsoft.com/office/drawing/2014/main" id="{B5AAB6C9-49D4-D877-0036-396DA4FAA564}"/>
+              </a:ext>
+            </a:extLst>
+          </p:cNvPr>
+          <p:cNvSpPr>
+            <a:spLocks noGrp="1"/>
+          </p:cNvSpPr>
+          <p:nvPr>
+            <p:ph type="title"/>
+          </p:nvPr>
+        </p:nvSpPr>
+        <p:spPr/>
+        <p:txBody>
+          <a:bodyPr/>
+          <a:lstStyle/>
+          <a:p>
+            <a:r>
+              <a:rPr lang="en-US" dirty="0"/>
+              <a:t>Connecting JDBC with RDS - Postgres</a:t>
+            </a:r>
+          </a:p>
+        </p:txBody>
+      </p:sp>
+      <p:sp>
+        <p:nvSpPr>
+          <p:cNvPr id="3" name="Content Placeholder 2">
+            <a:extLst>
+              <a:ext uri="{FF2B5EF4-FFF2-40B4-BE49-F238E27FC236}">
+                <a16:creationId xmlns:a16="http://schemas.microsoft.com/office/drawing/2014/main" id="{1F2A6A38-6402-C103-E535-F61B351627CF}"/>
+              </a:ext>
+            </a:extLst>
+          </p:cNvPr>
+          <p:cNvSpPr>
+            <a:spLocks noGrp="1"/>
+          </p:cNvSpPr>
+          <p:nvPr>
+            <p:ph idx="1"/>
+          </p:nvPr>
+        </p:nvSpPr>
+        <p:spPr>
+          <a:xfrm>
+            <a:off x="581192" y="2180497"/>
+            <a:ext cx="11029615" cy="2493916"/>
+          </a:xfrm>
+        </p:spPr>
+        <p:txBody>
+          <a:bodyPr>
+            <a:normAutofit/>
+          </a:bodyPr>
+          <a:lstStyle/>
+          <a:p>
+            <a:r>
+              <a:rPr lang="en-US" dirty="0"/>
+              <a:t>Get PEM public key so we can enable encrypted traffic (place in project root)</a:t>
+            </a:r>
+          </a:p>
+          <a:p>
+            <a:pPr lvl="1"/>
+            <a:r>
+              <a:rPr lang="en-US" dirty="0">
+                <a:hlinkClick r:id="rId2"/>
+              </a:rPr>
+              <a:t>https://truststore.pki.rds.amazonaws.com/global/global-bundle.pem</a:t>
+            </a:r>
+            <a:endParaRPr lang="en-US" dirty="0"/>
+          </a:p>
+          <a:p>
+            <a:pPr lvl="1"/>
+            <a:r>
+              <a:rPr lang="en-US" dirty="0"/>
+              <a:t>We can see when AWS will rotate these at ‘Aurora and RDS </a:t>
+            </a:r>
+            <a:r>
+              <a:rPr lang="en-US" dirty="0">
+                <a:sym typeface="Wingdings" panose="05000000000000000000" pitchFamily="2" charset="2"/>
+              </a:rPr>
+              <a:t> Certificate update’</a:t>
+            </a:r>
+            <a:endParaRPr lang="en-US" dirty="0"/>
+          </a:p>
+          <a:p>
+            <a:r>
+              <a:rPr lang="en-US" dirty="0"/>
+              <a:t>On the ‘Connectivity &amp; Security’ tab within RDS, they provide code snippets</a:t>
+            </a:r>
+          </a:p>
+          <a:p>
+            <a:r>
+              <a:rPr lang="en-US" dirty="0"/>
+              <a:t>You can find the link for the above on some of those snippets</a:t>
+            </a:r>
+          </a:p>
+          <a:p>
+            <a:r>
+              <a:rPr lang="en-US" dirty="0"/>
+              <a:t>Check out the JDBC code snippet to get your unique server URL, with enabled encryption</a:t>
+            </a:r>
+          </a:p>
+        </p:txBody>
+      </p:sp>
+      <p:pic>
+        <p:nvPicPr>
+          <p:cNvPr id="5" name="Picture 4">
+            <a:extLst>
+              <a:ext uri="{FF2B5EF4-FFF2-40B4-BE49-F238E27FC236}">
+                <a16:creationId xmlns:a16="http://schemas.microsoft.com/office/drawing/2014/main" id="{9DD665B1-0D32-F6E0-5CD4-F0457C21F311}"/>
+              </a:ext>
+            </a:extLst>
+          </p:cNvPr>
+          <p:cNvPicPr>
+            <a:picLocks noChangeAspect="1"/>
+          </p:cNvPicPr>
+          <p:nvPr/>
+        </p:nvPicPr>
+        <p:blipFill>
+          <a:blip r:embed="rId3"/>
+          <a:stretch>
+            <a:fillRect/>
+          </a:stretch>
+        </p:blipFill>
+        <p:spPr>
+          <a:xfrm>
+            <a:off x="1221638" y="5062668"/>
+            <a:ext cx="9748723" cy="1184583"/>
+          </a:xfrm>
+          <a:prstGeom prst="rect">
+            <a:avLst/>
+          </a:prstGeom>
+        </p:spPr>
+      </p:pic>
+    </p:spTree>
+    <p:extLst>
+      <p:ext uri="{BB962C8B-B14F-4D97-AF65-F5344CB8AC3E}">
+        <p14:creationId xmlns:p14="http://schemas.microsoft.com/office/powerpoint/2010/main" val="61343374"/>
+      </p:ext>
+    </p:extLst>
+  </p:cSld>
+  <p:clrMapOvr>
+    <a:masterClrMapping/>
+  </p:clrMapOvr>
+</p:sld>
+</file>
+
+<file path=ppt/slides/slide42.xml><?xml version="1.0" encoding="utf-8"?>
+<p:sld xmlns:a="http://schemas.openxmlformats.org/drawingml/2006/main" xmlns:r="http://schemas.openxmlformats.org/officeDocument/2006/relationships" xmlns:p="http://schemas.openxmlformats.org/presentationml/2006/main">
+  <p:cSld>
+    <p:spTree>
+      <p:nvGrpSpPr>
+        <p:cNvPr id="1" name=""/>
+        <p:cNvGrpSpPr/>
+        <p:nvPr/>
+      </p:nvGrpSpPr>
+      <p:grpSpPr>
+        <a:xfrm>
+          <a:off x="0" y="0"/>
+          <a:ext cx="0" cy="0"/>
+          <a:chOff x="0" y="0"/>
+          <a:chExt cx="0" cy="0"/>
+        </a:xfrm>
+      </p:grpSpPr>
+      <p:sp>
+        <p:nvSpPr>
+          <p:cNvPr id="2" name="Title 1">
+            <a:extLst>
+              <a:ext uri="{FF2B5EF4-FFF2-40B4-BE49-F238E27FC236}">
+                <a16:creationId xmlns:a16="http://schemas.microsoft.com/office/drawing/2014/main" id="{A3C008A6-791A-7C16-1D37-B012060E878A}"/>
+              </a:ext>
+            </a:extLst>
+          </p:cNvPr>
+          <p:cNvSpPr>
+            <a:spLocks noGrp="1"/>
+          </p:cNvSpPr>
+          <p:nvPr>
+            <p:ph type="title"/>
+          </p:nvPr>
+        </p:nvSpPr>
+        <p:spPr/>
+        <p:txBody>
+          <a:bodyPr/>
+          <a:lstStyle/>
+          <a:p>
+            <a:r>
+              <a:rPr lang="en-US" dirty="0"/>
+              <a:t>STOP</a:t>
+            </a:r>
+          </a:p>
+        </p:txBody>
+      </p:sp>
+      <p:sp>
+        <p:nvSpPr>
+          <p:cNvPr id="3" name="Content Placeholder 2">
+            <a:extLst>
+              <a:ext uri="{FF2B5EF4-FFF2-40B4-BE49-F238E27FC236}">
+                <a16:creationId xmlns:a16="http://schemas.microsoft.com/office/drawing/2014/main" id="{A85150D3-FC5F-640E-D3BF-15F67530E97C}"/>
+              </a:ext>
+            </a:extLst>
+          </p:cNvPr>
+          <p:cNvSpPr>
+            <a:spLocks noGrp="1"/>
+          </p:cNvSpPr>
+          <p:nvPr>
+            <p:ph idx="1"/>
+          </p:nvPr>
+        </p:nvSpPr>
+        <p:spPr/>
+        <p:txBody>
+          <a:bodyPr/>
+          <a:lstStyle/>
+          <a:p>
+            <a:r>
+              <a:rPr lang="en-US" dirty="0"/>
+              <a:t>This is a checkpoint</a:t>
+            </a:r>
+          </a:p>
+          <a:p>
+            <a:r>
+              <a:rPr lang="en-US" dirty="0"/>
+              <a:t>Create a CLEAN code app that reads/writes to Postgres here</a:t>
+            </a:r>
+          </a:p>
+          <a:p>
+            <a:r>
+              <a:rPr lang="en-US" dirty="0"/>
+              <a:t>See the ‘</a:t>
+            </a:r>
+            <a:r>
+              <a:rPr lang="en-US" dirty="0" err="1"/>
+              <a:t>cleancodeWithJDBC</a:t>
+            </a:r>
+            <a:r>
+              <a:rPr lang="en-US" dirty="0"/>
+              <a:t>’ project in your course materials as reference</a:t>
+            </a:r>
+          </a:p>
+        </p:txBody>
+      </p:sp>
+    </p:spTree>
+    <p:extLst>
+      <p:ext uri="{BB962C8B-B14F-4D97-AF65-F5344CB8AC3E}">
+        <p14:creationId xmlns:p14="http://schemas.microsoft.com/office/powerpoint/2010/main" val="1960992352"/>
+      </p:ext>
+    </p:extLst>
+  </p:cSld>
+  <p:clrMapOvr>
+    <a:masterClrMapping/>
+  </p:clrMapOvr>
+</p:sld>
+</file>
+
+<file path=ppt/slides/slide43.xml><?xml version="1.0" encoding="utf-8"?>
+<p:sld xmlns:a="http://schemas.openxmlformats.org/drawingml/2006/main" xmlns:r="http://schemas.openxmlformats.org/officeDocument/2006/relationships" xmlns:p="http://schemas.openxmlformats.org/presentationml/2006/main" show="0">
+  <p:cSld>
+    <p:spTree>
+      <p:nvGrpSpPr>
+        <p:cNvPr id="1" name="">
+          <a:extLst>
+            <a:ext uri="{FF2B5EF4-FFF2-40B4-BE49-F238E27FC236}">
+              <a16:creationId xmlns:a16="http://schemas.microsoft.com/office/drawing/2014/main" id="{E83D92F2-BD3F-5502-960E-3CFF3577844B}"/>
+            </a:ext>
+          </a:extLst>
+        </p:cNvPr>
+        <p:cNvGrpSpPr/>
+        <p:nvPr/>
+      </p:nvGrpSpPr>
+      <p:grpSpPr>
+        <a:xfrm>
+          <a:off x="0" y="0"/>
+          <a:ext cx="0" cy="0"/>
+          <a:chOff x="0" y="0"/>
+          <a:chExt cx="0" cy="0"/>
+        </a:xfrm>
+      </p:grpSpPr>
+      <p:sp>
+        <p:nvSpPr>
+          <p:cNvPr id="2" name="Title 1">
+            <a:extLst>
+              <a:ext uri="{FF2B5EF4-FFF2-40B4-BE49-F238E27FC236}">
+                <a16:creationId xmlns:a16="http://schemas.microsoft.com/office/drawing/2014/main" id="{475D234C-D59D-E997-1AA0-D508BFFD3CB6}"/>
+              </a:ext>
+            </a:extLst>
+          </p:cNvPr>
+          <p:cNvSpPr>
+            <a:spLocks noGrp="1"/>
+          </p:cNvSpPr>
+          <p:nvPr>
+            <p:ph type="title"/>
+          </p:nvPr>
+        </p:nvSpPr>
+        <p:spPr/>
+        <p:txBody>
+          <a:bodyPr/>
+          <a:lstStyle/>
+          <a:p>
+            <a:r>
+              <a:rPr lang="en-US" dirty="0"/>
+              <a:t>Challenge Demo – How to Excel in this course</a:t>
+            </a:r>
+          </a:p>
+        </p:txBody>
+      </p:sp>
+      <p:sp>
+        <p:nvSpPr>
+          <p:cNvPr id="3" name="Content Placeholder 2">
+            <a:extLst>
+              <a:ext uri="{FF2B5EF4-FFF2-40B4-BE49-F238E27FC236}">
+                <a16:creationId xmlns:a16="http://schemas.microsoft.com/office/drawing/2014/main" id="{23F8E57B-9E41-4816-C2F2-1105A90F87A9}"/>
+              </a:ext>
+            </a:extLst>
+          </p:cNvPr>
+          <p:cNvSpPr>
+            <a:spLocks noGrp="1"/>
+          </p:cNvSpPr>
+          <p:nvPr>
+            <p:ph idx="1"/>
+          </p:nvPr>
+        </p:nvSpPr>
+        <p:spPr>
+          <a:xfrm>
+            <a:off x="581192" y="2475925"/>
+            <a:ext cx="5317584" cy="1681246"/>
+          </a:xfrm>
+        </p:spPr>
+        <p:txBody>
+          <a:bodyPr/>
+          <a:lstStyle/>
+          <a:p>
+            <a:r>
+              <a:rPr lang="en-US" dirty="0"/>
+              <a:t>Complete a hands-on challenge</a:t>
+            </a:r>
+          </a:p>
+        </p:txBody>
+      </p:sp>
+      <p:sp>
+        <p:nvSpPr>
+          <p:cNvPr id="6" name="TextBox 5">
+            <a:extLst>
+              <a:ext uri="{FF2B5EF4-FFF2-40B4-BE49-F238E27FC236}">
+                <a16:creationId xmlns:a16="http://schemas.microsoft.com/office/drawing/2014/main" id="{2DE50FF0-C783-F3C0-044D-2F094F317804}"/>
+              </a:ext>
+            </a:extLst>
+          </p:cNvPr>
+          <p:cNvSpPr txBox="1"/>
+          <p:nvPr/>
+        </p:nvSpPr>
+        <p:spPr>
+          <a:xfrm>
+            <a:off x="1228165" y="2402747"/>
+            <a:ext cx="756938" cy="369332"/>
+          </a:xfrm>
+          <a:prstGeom prst="rect">
+            <a:avLst/>
+          </a:prstGeom>
+          <a:noFill/>
+        </p:spPr>
+        <p:txBody>
+          <a:bodyPr wrap="none" rtlCol="0">
+            <a:spAutoFit/>
+          </a:bodyPr>
+          <a:lstStyle/>
+          <a:p>
+            <a:r>
+              <a:rPr lang="en-US" b="1" dirty="0"/>
+              <a:t>Goal:</a:t>
+            </a:r>
+          </a:p>
+        </p:txBody>
+      </p:sp>
+      <p:sp>
+        <p:nvSpPr>
+          <p:cNvPr id="7" name="TextBox 6">
+            <a:extLst>
+              <a:ext uri="{FF2B5EF4-FFF2-40B4-BE49-F238E27FC236}">
+                <a16:creationId xmlns:a16="http://schemas.microsoft.com/office/drawing/2014/main" id="{405306AE-2095-D0AE-E069-321DBC55370F}"/>
+              </a:ext>
+            </a:extLst>
+          </p:cNvPr>
+          <p:cNvSpPr txBox="1"/>
+          <p:nvPr/>
+        </p:nvSpPr>
+        <p:spPr>
+          <a:xfrm>
+            <a:off x="6949165" y="2402747"/>
+            <a:ext cx="4661643" cy="369332"/>
+          </a:xfrm>
+          <a:prstGeom prst="rect">
+            <a:avLst/>
+          </a:prstGeom>
+          <a:noFill/>
+        </p:spPr>
+        <p:txBody>
+          <a:bodyPr wrap="square" rtlCol="0">
+            <a:spAutoFit/>
+          </a:bodyPr>
+          <a:lstStyle/>
+          <a:p>
+            <a:r>
+              <a:rPr lang="en-US" b="1" dirty="0"/>
+              <a:t>Scenario:  			   5 min</a:t>
+            </a:r>
+          </a:p>
+        </p:txBody>
+      </p:sp>
+      <p:sp>
+        <p:nvSpPr>
+          <p:cNvPr id="8" name="Content Placeholder 2">
+            <a:extLst>
+              <a:ext uri="{FF2B5EF4-FFF2-40B4-BE49-F238E27FC236}">
+                <a16:creationId xmlns:a16="http://schemas.microsoft.com/office/drawing/2014/main" id="{61B443B1-E14C-64AB-9E9D-75FFCF923C2B}"/>
+              </a:ext>
+            </a:extLst>
+          </p:cNvPr>
+          <p:cNvSpPr txBox="1">
+            <a:spLocks/>
+          </p:cNvSpPr>
+          <p:nvPr/>
+        </p:nvSpPr>
+        <p:spPr>
+          <a:xfrm>
+            <a:off x="6545749" y="2772079"/>
+            <a:ext cx="4661642" cy="1681246"/>
+          </a:xfrm>
+          <a:prstGeom prst="rect">
+            <a:avLst/>
+          </a:prstGeom>
+        </p:spPr>
+        <p:txBody>
+          <a:bodyPr vert="horz" lIns="91440" tIns="45720" rIns="91440" bIns="45720" rtlCol="0" anchor="ctr">
+            <a:normAutofit/>
+          </a:bodyPr>
+          <a:lstStyle>
+            <a:lvl1pPr marL="306000" indent="-306000" algn="l" defTabSz="457200" rtl="0" eaLnBrk="1" latinLnBrk="0" hangingPunct="1">
+              <a:spcBef>
+                <a:spcPct val="20000"/>
+              </a:spcBef>
+              <a:spcAft>
+                <a:spcPts val="600"/>
+              </a:spcAft>
+              <a:buClr>
+                <a:schemeClr val="accent2"/>
+              </a:buClr>
+              <a:buSzPct val="92000"/>
+              <a:buFont typeface="Wingdings 2" panose="05020102010507070707" pitchFamily="18" charset="2"/>
+              <a:buChar char=""/>
+              <a:defRPr sz="1800" kern="1200">
+                <a:solidFill>
+                  <a:schemeClr val="tx2"/>
+                </a:solidFill>
+                <a:latin typeface="+mn-lt"/>
+                <a:ea typeface="+mn-ea"/>
+                <a:cs typeface="+mn-cs"/>
+              </a:defRPr>
+            </a:lvl1pPr>
+            <a:lvl2pPr marL="630000" indent="-306000" algn="l" defTabSz="457200" rtl="0" eaLnBrk="1" latinLnBrk="0" hangingPunct="1">
+              <a:spcBef>
+                <a:spcPct val="20000"/>
+              </a:spcBef>
+              <a:spcAft>
+                <a:spcPts val="600"/>
+              </a:spcAft>
+              <a:buClr>
+                <a:schemeClr val="accent2"/>
+              </a:buClr>
+              <a:buSzPct val="92000"/>
+              <a:buFont typeface="Wingdings 2" panose="05020102010507070707" pitchFamily="18" charset="2"/>
+              <a:buChar char=""/>
+              <a:defRPr sz="1600" kern="1200">
+                <a:solidFill>
+                  <a:schemeClr val="tx2"/>
+                </a:solidFill>
+                <a:latin typeface="+mn-lt"/>
+                <a:ea typeface="+mn-ea"/>
+                <a:cs typeface="+mn-cs"/>
+              </a:defRPr>
+            </a:lvl2pPr>
+            <a:lvl3pPr marL="900000" indent="-270000" algn="l" defTabSz="457200" rtl="0" eaLnBrk="1" latinLnBrk="0" hangingPunct="1">
+              <a:spcBef>
+                <a:spcPct val="20000"/>
+              </a:spcBef>
+              <a:spcAft>
+                <a:spcPts val="600"/>
+              </a:spcAft>
+              <a:buClr>
+                <a:schemeClr val="accent2"/>
+              </a:buClr>
+              <a:buSzPct val="92000"/>
+              <a:buFont typeface="Wingdings 2" panose="05020102010507070707" pitchFamily="18" charset="2"/>
+              <a:buChar char=""/>
+              <a:defRPr sz="1400" kern="1200">
+                <a:solidFill>
+                  <a:schemeClr val="tx2"/>
+                </a:solidFill>
+                <a:latin typeface="+mn-lt"/>
+                <a:ea typeface="+mn-ea"/>
+                <a:cs typeface="+mn-cs"/>
+              </a:defRPr>
+            </a:lvl3pPr>
+            <a:lvl4pPr marL="1242000" indent="-234000" algn="l" defTabSz="457200" rtl="0" eaLnBrk="1" latinLnBrk="0" hangingPunct="1">
+              <a:spcBef>
+                <a:spcPct val="20000"/>
+              </a:spcBef>
+              <a:spcAft>
+                <a:spcPts val="600"/>
+              </a:spcAft>
+              <a:buClr>
+                <a:schemeClr val="accent2"/>
+              </a:buClr>
+              <a:buSzPct val="92000"/>
+              <a:buFont typeface="Wingdings 2" panose="05020102010507070707" pitchFamily="18" charset="2"/>
+              <a:buChar char=""/>
+              <a:defRPr sz="1200" kern="1200">
+                <a:solidFill>
+                  <a:schemeClr val="tx2"/>
+                </a:solidFill>
+                <a:latin typeface="+mn-lt"/>
+                <a:ea typeface="+mn-ea"/>
+                <a:cs typeface="+mn-cs"/>
+              </a:defRPr>
+            </a:lvl4pPr>
+            <a:lvl5pPr marL="1602000" indent="-234000" algn="l" defTabSz="457200" rtl="0" eaLnBrk="1" latinLnBrk="0" hangingPunct="1">
+              <a:spcBef>
+                <a:spcPct val="20000"/>
+              </a:spcBef>
+              <a:spcAft>
+                <a:spcPts val="600"/>
+              </a:spcAft>
+              <a:buClr>
+                <a:schemeClr val="accent2"/>
+              </a:buClr>
+              <a:buSzPct val="92000"/>
+              <a:buFont typeface="Wingdings 2" panose="05020102010507070707" pitchFamily="18" charset="2"/>
+              <a:buChar char=""/>
+              <a:defRPr sz="1200" kern="1200">
+                <a:solidFill>
+                  <a:schemeClr val="tx2"/>
+                </a:solidFill>
+                <a:latin typeface="+mn-lt"/>
+                <a:ea typeface="+mn-ea"/>
+                <a:cs typeface="+mn-cs"/>
+              </a:defRPr>
+            </a:lvl5pPr>
+            <a:lvl6pPr marL="1900000" indent="-228600" algn="l" defTabSz="457200" rtl="0" eaLnBrk="1" latinLnBrk="0" hangingPunct="1">
+              <a:spcBef>
+                <a:spcPct val="20000"/>
+              </a:spcBef>
+              <a:spcAft>
+                <a:spcPts val="600"/>
+              </a:spcAft>
+              <a:buClr>
+                <a:schemeClr val="accent2"/>
+              </a:buClr>
+              <a:buSzPct val="92000"/>
+              <a:buFont typeface="Wingdings 2" panose="05020102010507070707" pitchFamily="18" charset="2"/>
+              <a:buChar char=""/>
+              <a:defRPr sz="1200" kern="1200">
+                <a:solidFill>
+                  <a:schemeClr val="tx2"/>
+                </a:solidFill>
+                <a:latin typeface="+mn-lt"/>
+                <a:ea typeface="+mn-ea"/>
+                <a:cs typeface="+mn-cs"/>
+              </a:defRPr>
+            </a:lvl6pPr>
+            <a:lvl7pPr marL="2200000" indent="-228600" algn="l" defTabSz="457200" rtl="0" eaLnBrk="1" latinLnBrk="0" hangingPunct="1">
+              <a:spcBef>
+                <a:spcPct val="20000"/>
+              </a:spcBef>
+              <a:spcAft>
+                <a:spcPts val="600"/>
+              </a:spcAft>
+              <a:buClr>
+                <a:schemeClr val="accent2"/>
+              </a:buClr>
+              <a:buSzPct val="92000"/>
+              <a:buFont typeface="Wingdings 2" panose="05020102010507070707" pitchFamily="18" charset="2"/>
+              <a:buChar char=""/>
+              <a:defRPr sz="1200" kern="1200">
+                <a:solidFill>
+                  <a:schemeClr val="tx2"/>
+                </a:solidFill>
+                <a:latin typeface="+mn-lt"/>
+                <a:ea typeface="+mn-ea"/>
+                <a:cs typeface="+mn-cs"/>
+              </a:defRPr>
+            </a:lvl7pPr>
+            <a:lvl8pPr marL="2500000" indent="-228600" algn="l" defTabSz="457200" rtl="0" eaLnBrk="1" latinLnBrk="0" hangingPunct="1">
+              <a:spcBef>
+                <a:spcPct val="20000"/>
+              </a:spcBef>
+              <a:spcAft>
+                <a:spcPts val="600"/>
+              </a:spcAft>
+              <a:buClr>
+                <a:schemeClr val="accent2"/>
+              </a:buClr>
+              <a:buSzPct val="92000"/>
+              <a:buFont typeface="Wingdings 2" panose="05020102010507070707" pitchFamily="18" charset="2"/>
+              <a:buChar char=""/>
+              <a:defRPr sz="1200" kern="1200">
+                <a:solidFill>
+                  <a:schemeClr val="tx2"/>
+                </a:solidFill>
+                <a:latin typeface="+mn-lt"/>
+                <a:ea typeface="+mn-ea"/>
+                <a:cs typeface="+mn-cs"/>
+              </a:defRPr>
+            </a:lvl8pPr>
+            <a:lvl9pPr marL="2800000" indent="-228600" algn="l" defTabSz="457200" rtl="0" eaLnBrk="1" latinLnBrk="0" hangingPunct="1">
+              <a:spcBef>
+                <a:spcPct val="20000"/>
+              </a:spcBef>
+              <a:spcAft>
+                <a:spcPts val="600"/>
+              </a:spcAft>
+              <a:buClr>
+                <a:schemeClr val="accent2"/>
+              </a:buClr>
+              <a:buSzPct val="92000"/>
+              <a:buFont typeface="Wingdings 2" panose="05020102010507070707" pitchFamily="18" charset="2"/>
+              <a:buChar char=""/>
+              <a:defRPr sz="1200" kern="1200">
+                <a:solidFill>
+                  <a:schemeClr val="tx2"/>
+                </a:solidFill>
+                <a:latin typeface="+mn-lt"/>
+                <a:ea typeface="+mn-ea"/>
+                <a:cs typeface="+mn-cs"/>
+              </a:defRPr>
+            </a:lvl9pPr>
+          </a:lstStyle>
+          <a:p>
+            <a:r>
+              <a:rPr lang="en-US" dirty="0"/>
+              <a:t>Your organization needs to relay technical concepts to you. Clients often need to do the same. Take a few moments to get some pen and paper ready to take notes. </a:t>
+            </a:r>
+          </a:p>
+        </p:txBody>
+      </p:sp>
+    </p:spTree>
+    <p:extLst>
+      <p:ext uri="{BB962C8B-B14F-4D97-AF65-F5344CB8AC3E}">
+        <p14:creationId xmlns:p14="http://schemas.microsoft.com/office/powerpoint/2010/main" val="3587871389"/>
       </p:ext>
     </p:extLst>
   </p:cSld>

--- a/Week_4/Advanced_Java_Design_Patterns_&_JDBC.pptx
+++ b/Week_4/Advanced_Java_Design_Patterns_&_JDBC.pptx
@@ -414,7 +414,7 @@
             <a:fld id="{B61BEF0D-F0BB-DE4B-95CE-6DB70DBA9567}" type="datetimeFigureOut">
               <a:rPr lang="en-US" dirty="0"/>
               <a:pPr/>
-              <a:t>9/14/2026</a:t>
+              <a:t>9/15/2026</a:t>
             </a:fld>
             <a:endParaRPr lang="en-US" dirty="0"/>
           </a:p>
@@ -676,7 +676,7 @@
             <a:fld id="{B61BEF0D-F0BB-DE4B-95CE-6DB70DBA9567}" type="datetimeFigureOut">
               <a:rPr lang="en-US" dirty="0"/>
               <a:pPr/>
-              <a:t>9/14/2026</a:t>
+              <a:t>9/15/2026</a:t>
             </a:fld>
             <a:endParaRPr lang="en-US" dirty="0"/>
           </a:p>
@@ -911,7 +911,7 @@
             <a:fld id="{B61BEF0D-F0BB-DE4B-95CE-6DB70DBA9567}" type="datetimeFigureOut">
               <a:rPr lang="en-US" dirty="0"/>
               <a:pPr/>
-              <a:t>9/14/2026</a:t>
+              <a:t>9/15/2026</a:t>
             </a:fld>
             <a:endParaRPr lang="en-US" dirty="0"/>
           </a:p>
@@ -1158,7 +1158,7 @@
             <a:fld id="{B61BEF0D-F0BB-DE4B-95CE-6DB70DBA9567}" type="datetimeFigureOut">
               <a:rPr lang="en-US" dirty="0"/>
               <a:pPr/>
-              <a:t>9/14/2026</a:t>
+              <a:t>9/15/2026</a:t>
             </a:fld>
             <a:endParaRPr lang="en-US" dirty="0"/>
           </a:p>
@@ -1466,7 +1466,7 @@
             <a:fld id="{B61BEF0D-F0BB-DE4B-95CE-6DB70DBA9567}" type="datetimeFigureOut">
               <a:rPr lang="en-US" dirty="0"/>
               <a:pPr/>
-              <a:t>9/14/2026</a:t>
+              <a:t>9/15/2026</a:t>
             </a:fld>
             <a:endParaRPr lang="en-US" dirty="0"/>
           </a:p>
@@ -1767,7 +1767,7 @@
             <a:fld id="{B61BEF0D-F0BB-DE4B-95CE-6DB70DBA9567}" type="datetimeFigureOut">
               <a:rPr lang="en-US" dirty="0"/>
               <a:pPr/>
-              <a:t>9/14/2026</a:t>
+              <a:t>9/15/2026</a:t>
             </a:fld>
             <a:endParaRPr lang="en-US" dirty="0"/>
           </a:p>
@@ -2188,7 +2188,7 @@
             <a:fld id="{B61BEF0D-F0BB-DE4B-95CE-6DB70DBA9567}" type="datetimeFigureOut">
               <a:rPr lang="en-US" dirty="0"/>
               <a:pPr/>
-              <a:t>9/14/2026</a:t>
+              <a:t>9/15/2026</a:t>
             </a:fld>
             <a:endParaRPr lang="en-US" dirty="0"/>
           </a:p>
@@ -2351,7 +2351,7 @@
             <a:fld id="{B61BEF0D-F0BB-DE4B-95CE-6DB70DBA9567}" type="datetimeFigureOut">
               <a:rPr lang="en-US" dirty="0"/>
               <a:pPr/>
-              <a:t>9/14/2026</a:t>
+              <a:t>9/15/2026</a:t>
             </a:fld>
             <a:endParaRPr lang="en-US" dirty="0"/>
           </a:p>
@@ -2448,7 +2448,7 @@
             <a:fld id="{B61BEF0D-F0BB-DE4B-95CE-6DB70DBA9567}" type="datetimeFigureOut">
               <a:rPr lang="en-US" dirty="0"/>
               <a:pPr/>
-              <a:t>9/14/2026</a:t>
+              <a:t>9/15/2026</a:t>
             </a:fld>
             <a:endParaRPr lang="en-US" dirty="0"/>
           </a:p>
@@ -2826,7 +2826,7 @@
             <a:fld id="{B61BEF0D-F0BB-DE4B-95CE-6DB70DBA9567}" type="datetimeFigureOut">
               <a:rPr lang="en-US" dirty="0"/>
               <a:pPr/>
-              <a:t>9/14/2026</a:t>
+              <a:t>9/15/2026</a:t>
             </a:fld>
             <a:endParaRPr lang="en-US" dirty="0"/>
           </a:p>
@@ -3112,7 +3112,7 @@
             <a:fld id="{B61BEF0D-F0BB-DE4B-95CE-6DB70DBA9567}" type="datetimeFigureOut">
               <a:rPr lang="en-US" dirty="0"/>
               <a:pPr/>
-              <a:t>9/14/2026</a:t>
+              <a:t>9/15/2026</a:t>
             </a:fld>
             <a:endParaRPr lang="en-US" dirty="0"/>
           </a:p>
@@ -3351,7 +3351,7 @@
             <a:fld id="{B61BEF0D-F0BB-DE4B-95CE-6DB70DBA9567}" type="datetimeFigureOut">
               <a:rPr lang="en-US" dirty="0"/>
               <a:pPr/>
-              <a:t>9/14/2026</a:t>
+              <a:t>9/15/2026</a:t>
             </a:fld>
             <a:endParaRPr lang="en-US" dirty="0"/>
           </a:p>
@@ -11104,6 +11104,49 @@
               <a:t>’ project in your course materials as reference</a:t>
             </a:r>
           </a:p>
+          <a:p>
+            <a:endParaRPr lang="en-US" dirty="0"/>
+          </a:p>
+          <a:p>
+            <a:r>
+              <a:rPr lang="en-US" dirty="0"/>
+              <a:t>To run app with an interactive console (VSCODE won’t automatically do this):</a:t>
+            </a:r>
+          </a:p>
+          <a:p>
+            <a:r>
+              <a:rPr lang="en-US" dirty="0" err="1"/>
+              <a:t>mvn</a:t>
+            </a:r>
+            <a:r>
+              <a:rPr lang="en-US" dirty="0"/>
+              <a:t> </a:t>
+            </a:r>
+            <a:r>
+              <a:rPr lang="en-US" dirty="0" err="1"/>
+              <a:t>exec:java</a:t>
+            </a:r>
+            <a:r>
+              <a:rPr lang="en-US" dirty="0"/>
+              <a:t> "-</a:t>
+            </a:r>
+            <a:r>
+              <a:rPr lang="en-US" dirty="0" err="1"/>
+              <a:t>Dexec.mainClass</a:t>
+            </a:r>
+            <a:r>
+              <a:rPr lang="en-US" dirty="0"/>
+              <a:t>=</a:t>
+            </a:r>
+            <a:r>
+              <a:rPr lang="en-US" dirty="0" err="1"/>
+              <a:t>com.cleancode.api.Main</a:t>
+            </a:r>
+            <a:r>
+              <a:rPr lang="en-US" dirty="0"/>
+              <a:t>" </a:t>
+            </a:r>
+          </a:p>
         </p:txBody>
       </p:sp>
     </p:spTree>
@@ -13735,6 +13778,49 @@
               <a:t>’ project in your course materials as reference</a:t>
             </a:r>
           </a:p>
+          <a:p>
+            <a:endParaRPr lang="en-US" dirty="0"/>
+          </a:p>
+          <a:p>
+            <a:r>
+              <a:rPr lang="en-US" dirty="0"/>
+              <a:t>To run app with an interactive console (VSCODE won’t automatically do this):</a:t>
+            </a:r>
+          </a:p>
+          <a:p>
+            <a:r>
+              <a:rPr lang="en-US" dirty="0" err="1"/>
+              <a:t>mvn</a:t>
+            </a:r>
+            <a:r>
+              <a:rPr lang="en-US" dirty="0"/>
+              <a:t> </a:t>
+            </a:r>
+            <a:r>
+              <a:rPr lang="en-US" dirty="0" err="1"/>
+              <a:t>exec:java</a:t>
+            </a:r>
+            <a:r>
+              <a:rPr lang="en-US" dirty="0"/>
+              <a:t> "-</a:t>
+            </a:r>
+            <a:r>
+              <a:rPr lang="en-US" dirty="0" err="1"/>
+              <a:t>Dexec.mainClass</a:t>
+            </a:r>
+            <a:r>
+              <a:rPr lang="en-US" dirty="0"/>
+              <a:t>=</a:t>
+            </a:r>
+            <a:r>
+              <a:rPr lang="en-US" dirty="0" err="1"/>
+              <a:t>com.cleancode.api.Main</a:t>
+            </a:r>
+            <a:r>
+              <a:rPr lang="en-US"/>
+              <a:t>" </a:t>
+            </a:r>
+          </a:p>
         </p:txBody>
       </p:sp>
     </p:spTree>

--- a/Week_4/Advanced_Java_Design_Patterns_&_JDBC.pptx
+++ b/Week_4/Advanced_Java_Design_Patterns_&_JDBC.pptx
@@ -22,32 +22,35 @@
     <p:sldId id="292" r:id="rId16"/>
     <p:sldId id="291" r:id="rId17"/>
     <p:sldId id="274" r:id="rId18"/>
-    <p:sldId id="275" r:id="rId19"/>
-    <p:sldId id="276" r:id="rId20"/>
-    <p:sldId id="277" r:id="rId21"/>
-    <p:sldId id="278" r:id="rId22"/>
-    <p:sldId id="279" r:id="rId23"/>
-    <p:sldId id="280" r:id="rId24"/>
-    <p:sldId id="281" r:id="rId25"/>
-    <p:sldId id="282" r:id="rId26"/>
-    <p:sldId id="283" r:id="rId27"/>
-    <p:sldId id="284" r:id="rId28"/>
-    <p:sldId id="285" r:id="rId29"/>
-    <p:sldId id="286" r:id="rId30"/>
-    <p:sldId id="287" r:id="rId31"/>
-    <p:sldId id="288" r:id="rId32"/>
-    <p:sldId id="293" r:id="rId33"/>
-    <p:sldId id="294" r:id="rId34"/>
-    <p:sldId id="295" r:id="rId35"/>
-    <p:sldId id="296" r:id="rId36"/>
-    <p:sldId id="300" r:id="rId37"/>
-    <p:sldId id="297" r:id="rId38"/>
-    <p:sldId id="301" r:id="rId39"/>
-    <p:sldId id="298" r:id="rId40"/>
-    <p:sldId id="299" r:id="rId41"/>
-    <p:sldId id="303" r:id="rId42"/>
-    <p:sldId id="302" r:id="rId43"/>
-    <p:sldId id="262" r:id="rId44"/>
+    <p:sldId id="304" r:id="rId19"/>
+    <p:sldId id="305" r:id="rId20"/>
+    <p:sldId id="306" r:id="rId21"/>
+    <p:sldId id="275" r:id="rId22"/>
+    <p:sldId id="276" r:id="rId23"/>
+    <p:sldId id="277" r:id="rId24"/>
+    <p:sldId id="278" r:id="rId25"/>
+    <p:sldId id="279" r:id="rId26"/>
+    <p:sldId id="280" r:id="rId27"/>
+    <p:sldId id="281" r:id="rId28"/>
+    <p:sldId id="282" r:id="rId29"/>
+    <p:sldId id="283" r:id="rId30"/>
+    <p:sldId id="284" r:id="rId31"/>
+    <p:sldId id="285" r:id="rId32"/>
+    <p:sldId id="286" r:id="rId33"/>
+    <p:sldId id="287" r:id="rId34"/>
+    <p:sldId id="288" r:id="rId35"/>
+    <p:sldId id="293" r:id="rId36"/>
+    <p:sldId id="294" r:id="rId37"/>
+    <p:sldId id="295" r:id="rId38"/>
+    <p:sldId id="296" r:id="rId39"/>
+    <p:sldId id="300" r:id="rId40"/>
+    <p:sldId id="297" r:id="rId41"/>
+    <p:sldId id="301" r:id="rId42"/>
+    <p:sldId id="298" r:id="rId43"/>
+    <p:sldId id="299" r:id="rId44"/>
+    <p:sldId id="303" r:id="rId45"/>
+    <p:sldId id="302" r:id="rId46"/>
+    <p:sldId id="262" r:id="rId47"/>
   </p:sldIdLst>
   <p:sldSz cx="12192000" cy="6858000"/>
   <p:notesSz cx="6858000" cy="9144000"/>
@@ -414,7 +417,7 @@
             <a:fld id="{B61BEF0D-F0BB-DE4B-95CE-6DB70DBA9567}" type="datetimeFigureOut">
               <a:rPr lang="en-US" dirty="0"/>
               <a:pPr/>
-              <a:t>9/15/2026</a:t>
+              <a:t>9/23/2026</a:t>
             </a:fld>
             <a:endParaRPr lang="en-US" dirty="0"/>
           </a:p>
@@ -676,7 +679,7 @@
             <a:fld id="{B61BEF0D-F0BB-DE4B-95CE-6DB70DBA9567}" type="datetimeFigureOut">
               <a:rPr lang="en-US" dirty="0"/>
               <a:pPr/>
-              <a:t>9/15/2026</a:t>
+              <a:t>9/23/2026</a:t>
             </a:fld>
             <a:endParaRPr lang="en-US" dirty="0"/>
           </a:p>
@@ -911,7 +914,7 @@
             <a:fld id="{B61BEF0D-F0BB-DE4B-95CE-6DB70DBA9567}" type="datetimeFigureOut">
               <a:rPr lang="en-US" dirty="0"/>
               <a:pPr/>
-              <a:t>9/15/2026</a:t>
+              <a:t>9/23/2026</a:t>
             </a:fld>
             <a:endParaRPr lang="en-US" dirty="0"/>
           </a:p>
@@ -1158,7 +1161,7 @@
             <a:fld id="{B61BEF0D-F0BB-DE4B-95CE-6DB70DBA9567}" type="datetimeFigureOut">
               <a:rPr lang="en-US" dirty="0"/>
               <a:pPr/>
-              <a:t>9/15/2026</a:t>
+              <a:t>9/23/2026</a:t>
             </a:fld>
             <a:endParaRPr lang="en-US" dirty="0"/>
           </a:p>
@@ -1466,7 +1469,7 @@
             <a:fld id="{B61BEF0D-F0BB-DE4B-95CE-6DB70DBA9567}" type="datetimeFigureOut">
               <a:rPr lang="en-US" dirty="0"/>
               <a:pPr/>
-              <a:t>9/15/2026</a:t>
+              <a:t>9/23/2026</a:t>
             </a:fld>
             <a:endParaRPr lang="en-US" dirty="0"/>
           </a:p>
@@ -1767,7 +1770,7 @@
             <a:fld id="{B61BEF0D-F0BB-DE4B-95CE-6DB70DBA9567}" type="datetimeFigureOut">
               <a:rPr lang="en-US" dirty="0"/>
               <a:pPr/>
-              <a:t>9/15/2026</a:t>
+              <a:t>9/23/2026</a:t>
             </a:fld>
             <a:endParaRPr lang="en-US" dirty="0"/>
           </a:p>
@@ -2188,7 +2191,7 @@
             <a:fld id="{B61BEF0D-F0BB-DE4B-95CE-6DB70DBA9567}" type="datetimeFigureOut">
               <a:rPr lang="en-US" dirty="0"/>
               <a:pPr/>
-              <a:t>9/15/2026</a:t>
+              <a:t>9/23/2026</a:t>
             </a:fld>
             <a:endParaRPr lang="en-US" dirty="0"/>
           </a:p>
@@ -2351,7 +2354,7 @@
             <a:fld id="{B61BEF0D-F0BB-DE4B-95CE-6DB70DBA9567}" type="datetimeFigureOut">
               <a:rPr lang="en-US" dirty="0"/>
               <a:pPr/>
-              <a:t>9/15/2026</a:t>
+              <a:t>9/23/2026</a:t>
             </a:fld>
             <a:endParaRPr lang="en-US" dirty="0"/>
           </a:p>
@@ -2448,7 +2451,7 @@
             <a:fld id="{B61BEF0D-F0BB-DE4B-95CE-6DB70DBA9567}" type="datetimeFigureOut">
               <a:rPr lang="en-US" dirty="0"/>
               <a:pPr/>
-              <a:t>9/15/2026</a:t>
+              <a:t>9/23/2026</a:t>
             </a:fld>
             <a:endParaRPr lang="en-US" dirty="0"/>
           </a:p>
@@ -2826,7 +2829,7 @@
             <a:fld id="{B61BEF0D-F0BB-DE4B-95CE-6DB70DBA9567}" type="datetimeFigureOut">
               <a:rPr lang="en-US" dirty="0"/>
               <a:pPr/>
-              <a:t>9/15/2026</a:t>
+              <a:t>9/23/2026</a:t>
             </a:fld>
             <a:endParaRPr lang="en-US" dirty="0"/>
           </a:p>
@@ -3112,7 +3115,7 @@
             <a:fld id="{B61BEF0D-F0BB-DE4B-95CE-6DB70DBA9567}" type="datetimeFigureOut">
               <a:rPr lang="en-US" dirty="0"/>
               <a:pPr/>
-              <a:t>9/15/2026</a:t>
+              <a:t>9/23/2026</a:t>
             </a:fld>
             <a:endParaRPr lang="en-US" dirty="0"/>
           </a:p>
@@ -3351,7 +3354,7 @@
             <a:fld id="{B61BEF0D-F0BB-DE4B-95CE-6DB70DBA9567}" type="datetimeFigureOut">
               <a:rPr lang="en-US" dirty="0"/>
               <a:pPr/>
-              <a:t>9/15/2026</a:t>
+              <a:t>9/23/2026</a:t>
             </a:fld>
             <a:endParaRPr lang="en-US" dirty="0"/>
           </a:p>
@@ -6287,6 +6290,2562 @@
           <p:cNvPr id="2" name="Title 1">
             <a:extLst>
               <a:ext uri="{FF2B5EF4-FFF2-40B4-BE49-F238E27FC236}">
+                <a16:creationId xmlns:a16="http://schemas.microsoft.com/office/drawing/2014/main" id="{7BF85137-05B2-72EA-BBE2-40180D52BE83}"/>
+              </a:ext>
+            </a:extLst>
+          </p:cNvPr>
+          <p:cNvSpPr>
+            <a:spLocks noGrp="1"/>
+          </p:cNvSpPr>
+          <p:nvPr>
+            <p:ph type="title"/>
+          </p:nvPr>
+        </p:nvSpPr>
+        <p:spPr/>
+        <p:txBody>
+          <a:bodyPr/>
+          <a:lstStyle/>
+          <a:p>
+            <a:r>
+              <a:rPr lang="en-US" dirty="0"/>
+              <a:t>Functional interfaces </a:t>
+            </a:r>
+          </a:p>
+        </p:txBody>
+      </p:sp>
+      <p:sp>
+        <p:nvSpPr>
+          <p:cNvPr id="3" name="Content Placeholder 2">
+            <a:extLst>
+              <a:ext uri="{FF2B5EF4-FFF2-40B4-BE49-F238E27FC236}">
+                <a16:creationId xmlns:a16="http://schemas.microsoft.com/office/drawing/2014/main" id="{88F4C880-F5DC-131B-92F2-64C093ED0343}"/>
+              </a:ext>
+            </a:extLst>
+          </p:cNvPr>
+          <p:cNvSpPr>
+            <a:spLocks noGrp="1"/>
+          </p:cNvSpPr>
+          <p:nvPr>
+            <p:ph idx="1"/>
+          </p:nvPr>
+        </p:nvSpPr>
+        <p:spPr>
+          <a:xfrm>
+            <a:off x="580860" y="1956888"/>
+            <a:ext cx="11029615" cy="2961549"/>
+          </a:xfrm>
+        </p:spPr>
+        <p:txBody>
+          <a:bodyPr>
+            <a:normAutofit/>
+          </a:bodyPr>
+          <a:lstStyle/>
+          <a:p>
+            <a:r>
+              <a:rPr lang="en-US" dirty="0"/>
+              <a:t>Functional interfaces are interfaces that have exactly one abstract method.</a:t>
+            </a:r>
+          </a:p>
+          <a:p>
+            <a:r>
+              <a:rPr lang="en-US" dirty="0"/>
+              <a:t>A lambda expression can be used as an implementation of that abstract method. The lambda's parameters and return value must be compatible with the functional interface's method declaration.</a:t>
+            </a:r>
+          </a:p>
+          <a:p>
+            <a:r>
+              <a:rPr lang="en-US" dirty="0"/>
+              <a:t>Functional interfaces allow us to pass not only data into a method, but also behavior. This allows a method to receive instructions about what it should do, rather than having that behavior hardcoded inside the method.</a:t>
+            </a:r>
+          </a:p>
+          <a:p>
+            <a:r>
+              <a:rPr lang="en-US" dirty="0"/>
+              <a:t>We don’t often need to create our own (although we can), instead you will likely run into these common built-in functional interfaces:</a:t>
+            </a:r>
+          </a:p>
+        </p:txBody>
+      </p:sp>
+      <p:graphicFrame>
+        <p:nvGraphicFramePr>
+          <p:cNvPr id="4" name="Table 3">
+            <a:extLst>
+              <a:ext uri="{FF2B5EF4-FFF2-40B4-BE49-F238E27FC236}">
+                <a16:creationId xmlns:a16="http://schemas.microsoft.com/office/drawing/2014/main" id="{D5B705E5-5392-6551-54C9-3C046B59B580}"/>
+              </a:ext>
+            </a:extLst>
+          </p:cNvPr>
+          <p:cNvGraphicFramePr>
+            <a:graphicFrameLocks noGrp="1"/>
+          </p:cNvGraphicFramePr>
+          <p:nvPr>
+            <p:extLst>
+              <p:ext uri="{D42A27DB-BD31-4B8C-83A1-F6EECF244321}">
+                <p14:modId xmlns:p14="http://schemas.microsoft.com/office/powerpoint/2010/main" val="847502605"/>
+              </p:ext>
+            </p:extLst>
+          </p:nvPr>
+        </p:nvGraphicFramePr>
+        <p:xfrm>
+          <a:off x="581192" y="4690753"/>
+          <a:ext cx="11029948" cy="1987902"/>
+        </p:xfrm>
+        <a:graphic>
+          <a:graphicData uri="http://schemas.openxmlformats.org/drawingml/2006/table">
+            <a:tbl>
+              <a:tblPr>
+                <a:tableStyleId>{5C22544A-7EE6-4342-B048-85BDC9FD1C3A}</a:tableStyleId>
+              </a:tblPr>
+              <a:tblGrid>
+                <a:gridCol w="2757487">
+                  <a:extLst>
+                    <a:ext uri="{9D8B030D-6E8A-4147-A177-3AD203B41FA5}">
+                      <a16:colId xmlns:a16="http://schemas.microsoft.com/office/drawing/2014/main" val="3009705556"/>
+                    </a:ext>
+                  </a:extLst>
+                </a:gridCol>
+                <a:gridCol w="2757487">
+                  <a:extLst>
+                    <a:ext uri="{9D8B030D-6E8A-4147-A177-3AD203B41FA5}">
+                      <a16:colId xmlns:a16="http://schemas.microsoft.com/office/drawing/2014/main" val="3666803598"/>
+                    </a:ext>
+                  </a:extLst>
+                </a:gridCol>
+                <a:gridCol w="2757487">
+                  <a:extLst>
+                    <a:ext uri="{9D8B030D-6E8A-4147-A177-3AD203B41FA5}">
+                      <a16:colId xmlns:a16="http://schemas.microsoft.com/office/drawing/2014/main" val="852919607"/>
+                    </a:ext>
+                  </a:extLst>
+                </a:gridCol>
+                <a:gridCol w="2757487">
+                  <a:extLst>
+                    <a:ext uri="{9D8B030D-6E8A-4147-A177-3AD203B41FA5}">
+                      <a16:colId xmlns:a16="http://schemas.microsoft.com/office/drawing/2014/main" val="1709041381"/>
+                    </a:ext>
+                  </a:extLst>
+                </a:gridCol>
+              </a:tblGrid>
+              <a:tr h="283986">
+                <a:tc>
+                  <a:txBody>
+                    <a:bodyPr/>
+                    <a:lstStyle/>
+                    <a:p>
+                      <a:pPr marL="0" marR="0" algn="l">
+                        <a:buNone/>
+                      </a:pPr>
+                      <a:r>
+                        <a:rPr lang="en-US" sz="1000" b="1">
+                          <a:effectLst/>
+                        </a:rPr>
+                        <a:t>Interface</a:t>
+                      </a:r>
+                      <a:endParaRPr lang="en-US" sz="1000" b="1" i="0">
+                        <a:solidFill>
+                          <a:srgbClr val="FFFFFF"/>
+                        </a:solidFill>
+                        <a:effectLst/>
+                        <a:latin typeface="-apple-system-body"/>
+                      </a:endParaRPr>
+                    </a:p>
+                  </a:txBody>
+                  <a:tcPr anchor="ctr"/>
+                </a:tc>
+                <a:tc>
+                  <a:txBody>
+                    <a:bodyPr/>
+                    <a:lstStyle/>
+                    <a:p>
+                      <a:pPr marL="0" marR="0" algn="l">
+                        <a:buNone/>
+                      </a:pPr>
+                      <a:r>
+                        <a:rPr lang="en-US" sz="1000" b="1">
+                          <a:effectLst/>
+                        </a:rPr>
+                        <a:t>Input</a:t>
+                      </a:r>
+                      <a:endParaRPr lang="en-US" sz="1000" b="1" i="0">
+                        <a:solidFill>
+                          <a:srgbClr val="FFFFFF"/>
+                        </a:solidFill>
+                        <a:effectLst/>
+                        <a:latin typeface="-apple-system-body"/>
+                      </a:endParaRPr>
+                    </a:p>
+                  </a:txBody>
+                  <a:tcPr anchor="ctr"/>
+                </a:tc>
+                <a:tc>
+                  <a:txBody>
+                    <a:bodyPr/>
+                    <a:lstStyle/>
+                    <a:p>
+                      <a:pPr marL="0" marR="0" algn="l">
+                        <a:buNone/>
+                      </a:pPr>
+                      <a:r>
+                        <a:rPr lang="en-US" sz="1000" b="1">
+                          <a:effectLst/>
+                        </a:rPr>
+                        <a:t>Output</a:t>
+                      </a:r>
+                      <a:endParaRPr lang="en-US" sz="1000" b="1" i="0">
+                        <a:solidFill>
+                          <a:srgbClr val="FFFFFF"/>
+                        </a:solidFill>
+                        <a:effectLst/>
+                        <a:latin typeface="-apple-system-body"/>
+                      </a:endParaRPr>
+                    </a:p>
+                  </a:txBody>
+                  <a:tcPr anchor="ctr"/>
+                </a:tc>
+                <a:tc>
+                  <a:txBody>
+                    <a:bodyPr/>
+                    <a:lstStyle/>
+                    <a:p>
+                      <a:pPr marL="0" marR="0" algn="l">
+                        <a:buNone/>
+                      </a:pPr>
+                      <a:r>
+                        <a:rPr lang="en-US" sz="1000" b="1" dirty="0">
+                          <a:effectLst/>
+                        </a:rPr>
+                        <a:t>Example</a:t>
+                      </a:r>
+                      <a:endParaRPr lang="en-US" sz="1000" b="1" i="0" dirty="0">
+                        <a:solidFill>
+                          <a:srgbClr val="FFFFFF"/>
+                        </a:solidFill>
+                        <a:effectLst/>
+                        <a:latin typeface="-apple-system-body"/>
+                      </a:endParaRPr>
+                    </a:p>
+                  </a:txBody>
+                  <a:tcPr anchor="ctr"/>
+                </a:tc>
+                <a:extLst>
+                  <a:ext uri="{0D108BD9-81ED-4DB2-BD59-A6C34878D82A}">
+                    <a16:rowId xmlns:a16="http://schemas.microsoft.com/office/drawing/2014/main" val="19421630"/>
+                  </a:ext>
+                </a:extLst>
+              </a:tr>
+              <a:tr h="283986">
+                <a:tc>
+                  <a:txBody>
+                    <a:bodyPr/>
+                    <a:lstStyle/>
+                    <a:p>
+                      <a:pPr marL="0" marR="0" algn="l">
+                        <a:buNone/>
+                      </a:pPr>
+                      <a:r>
+                        <a:rPr lang="en-US" sz="1000">
+                          <a:effectLst/>
+                        </a:rPr>
+                        <a:t>Predicate&lt;T&gt;</a:t>
+                      </a:r>
+                      <a:endParaRPr lang="en-US" sz="1000" b="0" i="0">
+                        <a:solidFill>
+                          <a:srgbClr val="FFFFFF"/>
+                        </a:solidFill>
+                        <a:effectLst/>
+                        <a:latin typeface="-apple-system-body"/>
+                      </a:endParaRPr>
+                    </a:p>
+                  </a:txBody>
+                  <a:tcPr anchor="ctr"/>
+                </a:tc>
+                <a:tc>
+                  <a:txBody>
+                    <a:bodyPr/>
+                    <a:lstStyle/>
+                    <a:p>
+                      <a:pPr marL="0" marR="0" algn="l">
+                        <a:buNone/>
+                      </a:pPr>
+                      <a:r>
+                        <a:rPr lang="en-US" sz="1000">
+                          <a:effectLst/>
+                        </a:rPr>
+                        <a:t>1</a:t>
+                      </a:r>
+                      <a:endParaRPr lang="en-US" sz="1000" b="0" i="0">
+                        <a:solidFill>
+                          <a:srgbClr val="FFFFFF"/>
+                        </a:solidFill>
+                        <a:effectLst/>
+                        <a:latin typeface="-apple-system-body"/>
+                      </a:endParaRPr>
+                    </a:p>
+                  </a:txBody>
+                  <a:tcPr anchor="ctr"/>
+                </a:tc>
+                <a:tc>
+                  <a:txBody>
+                    <a:bodyPr/>
+                    <a:lstStyle/>
+                    <a:p>
+                      <a:pPr marL="0" marR="0" algn="l">
+                        <a:buNone/>
+                      </a:pPr>
+                      <a:r>
+                        <a:rPr lang="en-US" sz="1000">
+                          <a:effectLst/>
+                        </a:rPr>
+                        <a:t>boolean</a:t>
+                      </a:r>
+                      <a:endParaRPr lang="en-US" sz="1000" b="0" i="0">
+                        <a:solidFill>
+                          <a:srgbClr val="FFFFFF"/>
+                        </a:solidFill>
+                        <a:effectLst/>
+                        <a:latin typeface="-apple-system-body"/>
+                      </a:endParaRPr>
+                    </a:p>
+                  </a:txBody>
+                  <a:tcPr anchor="ctr"/>
+                </a:tc>
+                <a:tc>
+                  <a:txBody>
+                    <a:bodyPr/>
+                    <a:lstStyle/>
+                    <a:p>
+                      <a:pPr marL="0" marR="0" algn="l">
+                        <a:buNone/>
+                      </a:pPr>
+                      <a:r>
+                        <a:rPr lang="en-US" sz="1000" dirty="0">
+                          <a:effectLst/>
+                        </a:rPr>
+                        <a:t>name -&gt; </a:t>
+                      </a:r>
+                      <a:r>
+                        <a:rPr lang="en-US" sz="1000" dirty="0" err="1">
+                          <a:effectLst/>
+                        </a:rPr>
+                        <a:t>name.startsWith</a:t>
+                      </a:r>
+                      <a:r>
+                        <a:rPr lang="en-US" sz="1000" dirty="0">
+                          <a:effectLst/>
+                        </a:rPr>
+                        <a:t>("A")</a:t>
+                      </a:r>
+                      <a:endParaRPr lang="en-US" sz="1000" b="0" i="0" dirty="0">
+                        <a:solidFill>
+                          <a:srgbClr val="FFFFFF"/>
+                        </a:solidFill>
+                        <a:effectLst/>
+                        <a:latin typeface="-apple-system-body"/>
+                      </a:endParaRPr>
+                    </a:p>
+                  </a:txBody>
+                  <a:tcPr anchor="ctr"/>
+                </a:tc>
+                <a:extLst>
+                  <a:ext uri="{0D108BD9-81ED-4DB2-BD59-A6C34878D82A}">
+                    <a16:rowId xmlns:a16="http://schemas.microsoft.com/office/drawing/2014/main" val="3414037599"/>
+                  </a:ext>
+                </a:extLst>
+              </a:tr>
+              <a:tr h="283986">
+                <a:tc>
+                  <a:txBody>
+                    <a:bodyPr/>
+                    <a:lstStyle/>
+                    <a:p>
+                      <a:pPr marL="0" marR="0" algn="l">
+                        <a:buNone/>
+                      </a:pPr>
+                      <a:r>
+                        <a:rPr lang="en-US" sz="1000">
+                          <a:effectLst/>
+                        </a:rPr>
+                        <a:t>Function&lt;T,R&gt;</a:t>
+                      </a:r>
+                      <a:endParaRPr lang="en-US" sz="1000" b="0" i="0">
+                        <a:solidFill>
+                          <a:srgbClr val="FFFFFF"/>
+                        </a:solidFill>
+                        <a:effectLst/>
+                        <a:latin typeface="-apple-system-body"/>
+                      </a:endParaRPr>
+                    </a:p>
+                  </a:txBody>
+                  <a:tcPr anchor="ctr"/>
+                </a:tc>
+                <a:tc>
+                  <a:txBody>
+                    <a:bodyPr/>
+                    <a:lstStyle/>
+                    <a:p>
+                      <a:pPr marL="0" marR="0" algn="l">
+                        <a:buNone/>
+                      </a:pPr>
+                      <a:r>
+                        <a:rPr lang="en-US" sz="1000">
+                          <a:effectLst/>
+                        </a:rPr>
+                        <a:t>1</a:t>
+                      </a:r>
+                      <a:endParaRPr lang="en-US" sz="1000" b="0" i="0">
+                        <a:solidFill>
+                          <a:srgbClr val="FFFFFF"/>
+                        </a:solidFill>
+                        <a:effectLst/>
+                        <a:latin typeface="-apple-system-body"/>
+                      </a:endParaRPr>
+                    </a:p>
+                  </a:txBody>
+                  <a:tcPr anchor="ctr"/>
+                </a:tc>
+                <a:tc>
+                  <a:txBody>
+                    <a:bodyPr/>
+                    <a:lstStyle/>
+                    <a:p>
+                      <a:pPr marL="0" marR="0" algn="l">
+                        <a:buNone/>
+                      </a:pPr>
+                      <a:r>
+                        <a:rPr lang="en-US" sz="1000">
+                          <a:effectLst/>
+                        </a:rPr>
+                        <a:t>anything</a:t>
+                      </a:r>
+                      <a:endParaRPr lang="en-US" sz="1000" b="0" i="0">
+                        <a:solidFill>
+                          <a:srgbClr val="FFFFFF"/>
+                        </a:solidFill>
+                        <a:effectLst/>
+                        <a:latin typeface="-apple-system-body"/>
+                      </a:endParaRPr>
+                    </a:p>
+                  </a:txBody>
+                  <a:tcPr anchor="ctr"/>
+                </a:tc>
+                <a:tc>
+                  <a:txBody>
+                    <a:bodyPr/>
+                    <a:lstStyle/>
+                    <a:p>
+                      <a:pPr marL="0" marR="0" algn="l">
+                        <a:buNone/>
+                      </a:pPr>
+                      <a:r>
+                        <a:rPr lang="en-US" sz="1000">
+                          <a:effectLst/>
+                        </a:rPr>
+                        <a:t>name -&gt; name.length()</a:t>
+                      </a:r>
+                      <a:endParaRPr lang="en-US" sz="1000" b="0" i="0">
+                        <a:solidFill>
+                          <a:srgbClr val="FFFFFF"/>
+                        </a:solidFill>
+                        <a:effectLst/>
+                        <a:latin typeface="-apple-system-body"/>
+                      </a:endParaRPr>
+                    </a:p>
+                  </a:txBody>
+                  <a:tcPr anchor="ctr"/>
+                </a:tc>
+                <a:extLst>
+                  <a:ext uri="{0D108BD9-81ED-4DB2-BD59-A6C34878D82A}">
+                    <a16:rowId xmlns:a16="http://schemas.microsoft.com/office/drawing/2014/main" val="4281171055"/>
+                  </a:ext>
+                </a:extLst>
+              </a:tr>
+              <a:tr h="283986">
+                <a:tc>
+                  <a:txBody>
+                    <a:bodyPr/>
+                    <a:lstStyle/>
+                    <a:p>
+                      <a:pPr marL="0" marR="0" algn="l">
+                        <a:buNone/>
+                      </a:pPr>
+                      <a:r>
+                        <a:rPr lang="en-US" sz="1000">
+                          <a:effectLst/>
+                        </a:rPr>
+                        <a:t>Consumer&lt;T&gt;</a:t>
+                      </a:r>
+                      <a:endParaRPr lang="en-US" sz="1000" b="0" i="0">
+                        <a:solidFill>
+                          <a:srgbClr val="FFFFFF"/>
+                        </a:solidFill>
+                        <a:effectLst/>
+                        <a:latin typeface="-apple-system-body"/>
+                      </a:endParaRPr>
+                    </a:p>
+                  </a:txBody>
+                  <a:tcPr anchor="ctr"/>
+                </a:tc>
+                <a:tc>
+                  <a:txBody>
+                    <a:bodyPr/>
+                    <a:lstStyle/>
+                    <a:p>
+                      <a:pPr marL="0" marR="0" algn="l">
+                        <a:buNone/>
+                      </a:pPr>
+                      <a:r>
+                        <a:rPr lang="en-US" sz="1000">
+                          <a:effectLst/>
+                        </a:rPr>
+                        <a:t>1</a:t>
+                      </a:r>
+                      <a:endParaRPr lang="en-US" sz="1000" b="0" i="0">
+                        <a:solidFill>
+                          <a:srgbClr val="FFFFFF"/>
+                        </a:solidFill>
+                        <a:effectLst/>
+                        <a:latin typeface="-apple-system-body"/>
+                      </a:endParaRPr>
+                    </a:p>
+                  </a:txBody>
+                  <a:tcPr anchor="ctr"/>
+                </a:tc>
+                <a:tc>
+                  <a:txBody>
+                    <a:bodyPr/>
+                    <a:lstStyle/>
+                    <a:p>
+                      <a:pPr marL="0" marR="0" algn="l">
+                        <a:buNone/>
+                      </a:pPr>
+                      <a:r>
+                        <a:rPr lang="en-US" sz="1000">
+                          <a:effectLst/>
+                        </a:rPr>
+                        <a:t>void</a:t>
+                      </a:r>
+                      <a:endParaRPr lang="en-US" sz="1000" b="0" i="0">
+                        <a:solidFill>
+                          <a:srgbClr val="FFFFFF"/>
+                        </a:solidFill>
+                        <a:effectLst/>
+                        <a:latin typeface="-apple-system-body"/>
+                      </a:endParaRPr>
+                    </a:p>
+                  </a:txBody>
+                  <a:tcPr anchor="ctr"/>
+                </a:tc>
+                <a:tc>
+                  <a:txBody>
+                    <a:bodyPr/>
+                    <a:lstStyle/>
+                    <a:p>
+                      <a:pPr marL="0" marR="0" algn="l">
+                        <a:buNone/>
+                      </a:pPr>
+                      <a:r>
+                        <a:rPr lang="en-US" sz="1000">
+                          <a:effectLst/>
+                        </a:rPr>
+                        <a:t>name -&gt; System.out.println(name)</a:t>
+                      </a:r>
+                      <a:endParaRPr lang="en-US" sz="1000" b="0" i="0">
+                        <a:solidFill>
+                          <a:srgbClr val="FFFFFF"/>
+                        </a:solidFill>
+                        <a:effectLst/>
+                        <a:latin typeface="-apple-system-body"/>
+                      </a:endParaRPr>
+                    </a:p>
+                  </a:txBody>
+                  <a:tcPr anchor="ctr"/>
+                </a:tc>
+                <a:extLst>
+                  <a:ext uri="{0D108BD9-81ED-4DB2-BD59-A6C34878D82A}">
+                    <a16:rowId xmlns:a16="http://schemas.microsoft.com/office/drawing/2014/main" val="3271013947"/>
+                  </a:ext>
+                </a:extLst>
+              </a:tr>
+              <a:tr h="283986">
+                <a:tc>
+                  <a:txBody>
+                    <a:bodyPr/>
+                    <a:lstStyle/>
+                    <a:p>
+                      <a:pPr marL="0" marR="0" algn="l">
+                        <a:buNone/>
+                      </a:pPr>
+                      <a:r>
+                        <a:rPr lang="en-US" sz="1000">
+                          <a:effectLst/>
+                        </a:rPr>
+                        <a:t>Supplier&lt;T&gt;</a:t>
+                      </a:r>
+                      <a:endParaRPr lang="en-US" sz="1000" b="0" i="0">
+                        <a:solidFill>
+                          <a:srgbClr val="FFFFFF"/>
+                        </a:solidFill>
+                        <a:effectLst/>
+                        <a:latin typeface="-apple-system-body"/>
+                      </a:endParaRPr>
+                    </a:p>
+                  </a:txBody>
+                  <a:tcPr anchor="ctr"/>
+                </a:tc>
+                <a:tc>
+                  <a:txBody>
+                    <a:bodyPr/>
+                    <a:lstStyle/>
+                    <a:p>
+                      <a:pPr marL="0" marR="0" algn="l">
+                        <a:buNone/>
+                      </a:pPr>
+                      <a:r>
+                        <a:rPr lang="en-US" sz="1000">
+                          <a:effectLst/>
+                        </a:rPr>
+                        <a:t>0</a:t>
+                      </a:r>
+                      <a:endParaRPr lang="en-US" sz="1000" b="0" i="0">
+                        <a:solidFill>
+                          <a:srgbClr val="FFFFFF"/>
+                        </a:solidFill>
+                        <a:effectLst/>
+                        <a:latin typeface="-apple-system-body"/>
+                      </a:endParaRPr>
+                    </a:p>
+                  </a:txBody>
+                  <a:tcPr anchor="ctr"/>
+                </a:tc>
+                <a:tc>
+                  <a:txBody>
+                    <a:bodyPr/>
+                    <a:lstStyle/>
+                    <a:p>
+                      <a:pPr marL="0" marR="0" algn="l">
+                        <a:buNone/>
+                      </a:pPr>
+                      <a:r>
+                        <a:rPr lang="en-US" sz="1000">
+                          <a:effectLst/>
+                        </a:rPr>
+                        <a:t>1 value</a:t>
+                      </a:r>
+                      <a:endParaRPr lang="en-US" sz="1000" b="0" i="0">
+                        <a:solidFill>
+                          <a:srgbClr val="FFFFFF"/>
+                        </a:solidFill>
+                        <a:effectLst/>
+                        <a:latin typeface="-apple-system-body"/>
+                      </a:endParaRPr>
+                    </a:p>
+                  </a:txBody>
+                  <a:tcPr anchor="ctr"/>
+                </a:tc>
+                <a:tc>
+                  <a:txBody>
+                    <a:bodyPr/>
+                    <a:lstStyle/>
+                    <a:p>
+                      <a:pPr marL="0" marR="0" algn="l">
+                        <a:buNone/>
+                      </a:pPr>
+                      <a:r>
+                        <a:rPr lang="en-US" sz="1000">
+                          <a:effectLst/>
+                        </a:rPr>
+                        <a:t>() -&gt; "Hello"</a:t>
+                      </a:r>
+                      <a:endParaRPr lang="en-US" sz="1000" b="0" i="0">
+                        <a:solidFill>
+                          <a:srgbClr val="FFFFFF"/>
+                        </a:solidFill>
+                        <a:effectLst/>
+                        <a:latin typeface="-apple-system-body"/>
+                      </a:endParaRPr>
+                    </a:p>
+                  </a:txBody>
+                  <a:tcPr anchor="ctr"/>
+                </a:tc>
+                <a:extLst>
+                  <a:ext uri="{0D108BD9-81ED-4DB2-BD59-A6C34878D82A}">
+                    <a16:rowId xmlns:a16="http://schemas.microsoft.com/office/drawing/2014/main" val="3661603401"/>
+                  </a:ext>
+                </a:extLst>
+              </a:tr>
+              <a:tr h="283986">
+                <a:tc>
+                  <a:txBody>
+                    <a:bodyPr/>
+                    <a:lstStyle/>
+                    <a:p>
+                      <a:pPr marL="0" marR="0" algn="l">
+                        <a:buNone/>
+                      </a:pPr>
+                      <a:r>
+                        <a:rPr lang="en-US" sz="1000">
+                          <a:effectLst/>
+                        </a:rPr>
+                        <a:t>UnaryOperator&lt;T&gt;</a:t>
+                      </a:r>
+                      <a:endParaRPr lang="en-US" sz="1000" b="0" i="0">
+                        <a:solidFill>
+                          <a:srgbClr val="FFFFFF"/>
+                        </a:solidFill>
+                        <a:effectLst/>
+                        <a:latin typeface="-apple-system-body"/>
+                      </a:endParaRPr>
+                    </a:p>
+                  </a:txBody>
+                  <a:tcPr anchor="ctr"/>
+                </a:tc>
+                <a:tc>
+                  <a:txBody>
+                    <a:bodyPr/>
+                    <a:lstStyle/>
+                    <a:p>
+                      <a:pPr marL="0" marR="0" algn="l">
+                        <a:buNone/>
+                      </a:pPr>
+                      <a:r>
+                        <a:rPr lang="en-US" sz="1000">
+                          <a:effectLst/>
+                        </a:rPr>
+                        <a:t>1</a:t>
+                      </a:r>
+                      <a:endParaRPr lang="en-US" sz="1000" b="0" i="0">
+                        <a:solidFill>
+                          <a:srgbClr val="FFFFFF"/>
+                        </a:solidFill>
+                        <a:effectLst/>
+                        <a:latin typeface="-apple-system-body"/>
+                      </a:endParaRPr>
+                    </a:p>
+                  </a:txBody>
+                  <a:tcPr anchor="ctr"/>
+                </a:tc>
+                <a:tc>
+                  <a:txBody>
+                    <a:bodyPr/>
+                    <a:lstStyle/>
+                    <a:p>
+                      <a:pPr marL="0" marR="0" algn="l">
+                        <a:buNone/>
+                      </a:pPr>
+                      <a:r>
+                        <a:rPr lang="en-US" sz="1000">
+                          <a:effectLst/>
+                        </a:rPr>
+                        <a:t>same type</a:t>
+                      </a:r>
+                      <a:endParaRPr lang="en-US" sz="1000" b="0" i="0">
+                        <a:solidFill>
+                          <a:srgbClr val="FFFFFF"/>
+                        </a:solidFill>
+                        <a:effectLst/>
+                        <a:latin typeface="-apple-system-body"/>
+                      </a:endParaRPr>
+                    </a:p>
+                  </a:txBody>
+                  <a:tcPr anchor="ctr"/>
+                </a:tc>
+                <a:tc>
+                  <a:txBody>
+                    <a:bodyPr/>
+                    <a:lstStyle/>
+                    <a:p>
+                      <a:pPr marL="0" marR="0" algn="l">
+                        <a:buNone/>
+                      </a:pPr>
+                      <a:r>
+                        <a:rPr lang="en-US" sz="1000">
+                          <a:effectLst/>
+                        </a:rPr>
+                        <a:t>n -&gt; n * 2</a:t>
+                      </a:r>
+                      <a:endParaRPr lang="en-US" sz="1000" b="0" i="0">
+                        <a:solidFill>
+                          <a:srgbClr val="FFFFFF"/>
+                        </a:solidFill>
+                        <a:effectLst/>
+                        <a:latin typeface="-apple-system-body"/>
+                      </a:endParaRPr>
+                    </a:p>
+                  </a:txBody>
+                  <a:tcPr anchor="ctr"/>
+                </a:tc>
+                <a:extLst>
+                  <a:ext uri="{0D108BD9-81ED-4DB2-BD59-A6C34878D82A}">
+                    <a16:rowId xmlns:a16="http://schemas.microsoft.com/office/drawing/2014/main" val="864793414"/>
+                  </a:ext>
+                </a:extLst>
+              </a:tr>
+              <a:tr h="283986">
+                <a:tc>
+                  <a:txBody>
+                    <a:bodyPr/>
+                    <a:lstStyle/>
+                    <a:p>
+                      <a:pPr marL="0" marR="0" algn="l">
+                        <a:buNone/>
+                      </a:pPr>
+                      <a:r>
+                        <a:rPr lang="en-US" sz="1000">
+                          <a:effectLst/>
+                        </a:rPr>
+                        <a:t>BinaryOperator&lt;T&gt;</a:t>
+                      </a:r>
+                      <a:endParaRPr lang="en-US" sz="1000" b="0" i="0">
+                        <a:solidFill>
+                          <a:srgbClr val="FFFFFF"/>
+                        </a:solidFill>
+                        <a:effectLst/>
+                        <a:latin typeface="-apple-system-body"/>
+                      </a:endParaRPr>
+                    </a:p>
+                  </a:txBody>
+                  <a:tcPr anchor="ctr"/>
+                </a:tc>
+                <a:tc>
+                  <a:txBody>
+                    <a:bodyPr/>
+                    <a:lstStyle/>
+                    <a:p>
+                      <a:pPr marL="0" marR="0" algn="l">
+                        <a:buNone/>
+                      </a:pPr>
+                      <a:r>
+                        <a:rPr lang="en-US" sz="1000">
+                          <a:effectLst/>
+                        </a:rPr>
+                        <a:t>2</a:t>
+                      </a:r>
+                      <a:endParaRPr lang="en-US" sz="1000" b="0" i="0">
+                        <a:solidFill>
+                          <a:srgbClr val="FFFFFF"/>
+                        </a:solidFill>
+                        <a:effectLst/>
+                        <a:latin typeface="-apple-system-body"/>
+                      </a:endParaRPr>
+                    </a:p>
+                  </a:txBody>
+                  <a:tcPr anchor="ctr"/>
+                </a:tc>
+                <a:tc>
+                  <a:txBody>
+                    <a:bodyPr/>
+                    <a:lstStyle/>
+                    <a:p>
+                      <a:pPr marL="0" marR="0" algn="l">
+                        <a:buNone/>
+                      </a:pPr>
+                      <a:r>
+                        <a:rPr lang="en-US" sz="1000">
+                          <a:effectLst/>
+                        </a:rPr>
+                        <a:t>same type</a:t>
+                      </a:r>
+                      <a:endParaRPr lang="en-US" sz="1000" b="0" i="0">
+                        <a:solidFill>
+                          <a:srgbClr val="FFFFFF"/>
+                        </a:solidFill>
+                        <a:effectLst/>
+                        <a:latin typeface="-apple-system-body"/>
+                      </a:endParaRPr>
+                    </a:p>
+                  </a:txBody>
+                  <a:tcPr anchor="ctr"/>
+                </a:tc>
+                <a:tc>
+                  <a:txBody>
+                    <a:bodyPr/>
+                    <a:lstStyle/>
+                    <a:p>
+                      <a:pPr marL="0" marR="0" algn="l">
+                        <a:buNone/>
+                      </a:pPr>
+                      <a:r>
+                        <a:rPr lang="en-US" sz="1000" dirty="0">
+                          <a:effectLst/>
+                        </a:rPr>
+                        <a:t>(</a:t>
+                      </a:r>
+                      <a:r>
+                        <a:rPr lang="en-US" sz="1000" dirty="0" err="1">
+                          <a:effectLst/>
+                        </a:rPr>
+                        <a:t>a,b</a:t>
+                      </a:r>
+                      <a:r>
+                        <a:rPr lang="en-US" sz="1000" dirty="0">
+                          <a:effectLst/>
+                        </a:rPr>
+                        <a:t>) -&gt; a + b</a:t>
+                      </a:r>
+                      <a:endParaRPr lang="en-US" sz="1000" b="0" i="0" dirty="0">
+                        <a:solidFill>
+                          <a:srgbClr val="FFFFFF"/>
+                        </a:solidFill>
+                        <a:effectLst/>
+                        <a:latin typeface="-apple-system-body"/>
+                      </a:endParaRPr>
+                    </a:p>
+                  </a:txBody>
+                  <a:tcPr anchor="ctr"/>
+                </a:tc>
+                <a:extLst>
+                  <a:ext uri="{0D108BD9-81ED-4DB2-BD59-A6C34878D82A}">
+                    <a16:rowId xmlns:a16="http://schemas.microsoft.com/office/drawing/2014/main" val="1235398989"/>
+                  </a:ext>
+                </a:extLst>
+              </a:tr>
+            </a:tbl>
+          </a:graphicData>
+        </a:graphic>
+      </p:graphicFrame>
+    </p:spTree>
+    <p:extLst>
+      <p:ext uri="{BB962C8B-B14F-4D97-AF65-F5344CB8AC3E}">
+        <p14:creationId xmlns:p14="http://schemas.microsoft.com/office/powerpoint/2010/main" val="2178397424"/>
+      </p:ext>
+    </p:extLst>
+  </p:cSld>
+  <p:clrMapOvr>
+    <a:masterClrMapping/>
+  </p:clrMapOvr>
+</p:sld>
+</file>
+
+<file path=ppt/slides/slide19.xml><?xml version="1.0" encoding="utf-8"?>
+<p:sld xmlns:a="http://schemas.openxmlformats.org/drawingml/2006/main" xmlns:r="http://schemas.openxmlformats.org/officeDocument/2006/relationships" xmlns:p="http://schemas.openxmlformats.org/presentationml/2006/main">
+  <p:cSld>
+    <p:bg>
+      <p:bgPr>
+        <a:solidFill>
+          <a:schemeClr val="bg1"/>
+        </a:solidFill>
+        <a:effectLst/>
+      </p:bgPr>
+    </p:bg>
+    <p:spTree>
+      <p:nvGrpSpPr>
+        <p:cNvPr id="1" name=""/>
+        <p:cNvGrpSpPr/>
+        <p:nvPr/>
+      </p:nvGrpSpPr>
+      <p:grpSpPr>
+        <a:xfrm>
+          <a:off x="0" y="0"/>
+          <a:ext cx="0" cy="0"/>
+          <a:chOff x="0" y="0"/>
+          <a:chExt cx="0" cy="0"/>
+        </a:xfrm>
+      </p:grpSpPr>
+      <p:sp>
+        <p:nvSpPr>
+          <p:cNvPr id="12" name="Rectangle 11">
+            <a:extLst>
+              <a:ext uri="{FF2B5EF4-FFF2-40B4-BE49-F238E27FC236}">
+                <a16:creationId xmlns:a16="http://schemas.microsoft.com/office/drawing/2014/main" id="{66D08039-6C4E-4870-9E3D-6218263DE95D}"/>
+              </a:ext>
+              <a:ext uri="{C183D7F6-B498-43B3-948B-1728B52AA6E4}">
+                <adec:decorative xmlns:adec="http://schemas.microsoft.com/office/drawing/2017/decorative" val="1"/>
+              </a:ext>
+            </a:extLst>
+          </p:cNvPr>
+          <p:cNvSpPr>
+            <a:spLocks noGrp="1" noRot="1" noChangeAspect="1" noMove="1" noResize="1" noEditPoints="1" noAdjustHandles="1" noChangeArrowheads="1" noChangeShapeType="1" noTextEdit="1"/>
+          </p:cNvSpPr>
+          <p:nvPr>
+            <p:extLst>
+              <p:ext uri="{386F3935-93C4-4BCD-93E2-E3B085C9AB24}">
+                <p16:designElem xmlns:p16="http://schemas.microsoft.com/office/powerpoint/2015/main" val="1"/>
+              </p:ext>
+            </p:extLst>
+          </p:nvPr>
+        </p:nvSpPr>
+        <p:spPr>
+          <a:xfrm>
+            <a:off x="446534" y="457200"/>
+            <a:ext cx="3703320" cy="94997"/>
+          </a:xfrm>
+          <a:prstGeom prst="rect">
+            <a:avLst/>
+          </a:prstGeom>
+          <a:solidFill>
+            <a:schemeClr val="accent1"/>
+          </a:solidFill>
+          <a:ln>
+            <a:noFill/>
+          </a:ln>
+          <a:effectLst/>
+        </p:spPr>
+        <p:style>
+          <a:lnRef idx="1">
+            <a:schemeClr val="accent1"/>
+          </a:lnRef>
+          <a:fillRef idx="3">
+            <a:schemeClr val="accent1"/>
+          </a:fillRef>
+          <a:effectRef idx="2">
+            <a:schemeClr val="accent1"/>
+          </a:effectRef>
+          <a:fontRef idx="minor">
+            <a:schemeClr val="lt1"/>
+          </a:fontRef>
+        </p:style>
+        <p:txBody>
+          <a:bodyPr/>
+          <a:lstStyle/>
+          <a:p>
+            <a:endParaRPr lang="en-US"/>
+          </a:p>
+        </p:txBody>
+      </p:sp>
+      <p:sp>
+        <p:nvSpPr>
+          <p:cNvPr id="14" name="Rectangle 13">
+            <a:extLst>
+              <a:ext uri="{FF2B5EF4-FFF2-40B4-BE49-F238E27FC236}">
+                <a16:creationId xmlns:a16="http://schemas.microsoft.com/office/drawing/2014/main" id="{9FB31D2E-CBC8-4C4A-917F-DCB48EAEB08A}"/>
+              </a:ext>
+              <a:ext uri="{C183D7F6-B498-43B3-948B-1728B52AA6E4}">
+                <adec:decorative xmlns:adec="http://schemas.microsoft.com/office/drawing/2017/decorative" val="1"/>
+              </a:ext>
+            </a:extLst>
+          </p:cNvPr>
+          <p:cNvSpPr>
+            <a:spLocks noGrp="1" noRot="1" noChangeAspect="1" noMove="1" noResize="1" noEditPoints="1" noAdjustHandles="1" noChangeArrowheads="1" noChangeShapeType="1" noTextEdit="1"/>
+          </p:cNvSpPr>
+          <p:nvPr>
+            <p:extLst>
+              <p:ext uri="{386F3935-93C4-4BCD-93E2-E3B085C9AB24}">
+                <p16:designElem xmlns:p16="http://schemas.microsoft.com/office/powerpoint/2015/main" val="1"/>
+              </p:ext>
+            </p:extLst>
+          </p:nvPr>
+        </p:nvSpPr>
+        <p:spPr>
+          <a:xfrm>
+            <a:off x="8042147" y="453643"/>
+            <a:ext cx="3703320" cy="98554"/>
+          </a:xfrm>
+          <a:prstGeom prst="rect">
+            <a:avLst/>
+          </a:prstGeom>
+          <a:solidFill>
+            <a:schemeClr val="accent4"/>
+          </a:solidFill>
+          <a:ln>
+            <a:noFill/>
+          </a:ln>
+          <a:effectLst/>
+        </p:spPr>
+        <p:style>
+          <a:lnRef idx="1">
+            <a:schemeClr val="accent1"/>
+          </a:lnRef>
+          <a:fillRef idx="3">
+            <a:schemeClr val="accent1"/>
+          </a:fillRef>
+          <a:effectRef idx="2">
+            <a:schemeClr val="accent1"/>
+          </a:effectRef>
+          <a:fontRef idx="minor">
+            <a:schemeClr val="lt1"/>
+          </a:fontRef>
+        </p:style>
+        <p:txBody>
+          <a:bodyPr/>
+          <a:lstStyle/>
+          <a:p>
+            <a:endParaRPr lang="en-US"/>
+          </a:p>
+        </p:txBody>
+      </p:sp>
+      <p:sp>
+        <p:nvSpPr>
+          <p:cNvPr id="16" name="Rectangle 15">
+            <a:extLst>
+              <a:ext uri="{FF2B5EF4-FFF2-40B4-BE49-F238E27FC236}">
+                <a16:creationId xmlns:a16="http://schemas.microsoft.com/office/drawing/2014/main" id="{FCCF4F09-0D96-42BE-AE16-84AB4E0B5674}"/>
+              </a:ext>
+              <a:ext uri="{C183D7F6-B498-43B3-948B-1728B52AA6E4}">
+                <adec:decorative xmlns:adec="http://schemas.microsoft.com/office/drawing/2017/decorative" val="1"/>
+              </a:ext>
+            </a:extLst>
+          </p:cNvPr>
+          <p:cNvSpPr>
+            <a:spLocks noGrp="1" noRot="1" noChangeAspect="1" noMove="1" noResize="1" noEditPoints="1" noAdjustHandles="1" noChangeArrowheads="1" noChangeShapeType="1" noTextEdit="1"/>
+          </p:cNvSpPr>
+          <p:nvPr>
+            <p:extLst>
+              <p:ext uri="{386F3935-93C4-4BCD-93E2-E3B085C9AB24}">
+                <p16:designElem xmlns:p16="http://schemas.microsoft.com/office/powerpoint/2015/main" val="1"/>
+              </p:ext>
+            </p:extLst>
+          </p:nvPr>
+        </p:nvSpPr>
+        <p:spPr>
+          <a:xfrm>
+            <a:off x="4241830" y="457200"/>
+            <a:ext cx="3703320" cy="91440"/>
+          </a:xfrm>
+          <a:prstGeom prst="rect">
+            <a:avLst/>
+          </a:prstGeom>
+          <a:solidFill>
+            <a:schemeClr val="accent2"/>
+          </a:solidFill>
+          <a:ln>
+            <a:noFill/>
+          </a:ln>
+          <a:effectLst/>
+        </p:spPr>
+        <p:style>
+          <a:lnRef idx="1">
+            <a:schemeClr val="accent1"/>
+          </a:lnRef>
+          <a:fillRef idx="3">
+            <a:schemeClr val="accent1"/>
+          </a:fillRef>
+          <a:effectRef idx="2">
+            <a:schemeClr val="accent1"/>
+          </a:effectRef>
+          <a:fontRef idx="minor">
+            <a:schemeClr val="lt1"/>
+          </a:fontRef>
+        </p:style>
+        <p:txBody>
+          <a:bodyPr/>
+          <a:lstStyle/>
+          <a:p>
+            <a:endParaRPr lang="en-US"/>
+          </a:p>
+        </p:txBody>
+      </p:sp>
+      <p:sp>
+        <p:nvSpPr>
+          <p:cNvPr id="18" name="Rectangle 17">
+            <a:extLst>
+              <a:ext uri="{FF2B5EF4-FFF2-40B4-BE49-F238E27FC236}">
+                <a16:creationId xmlns:a16="http://schemas.microsoft.com/office/drawing/2014/main" id="{21AF87EE-372A-438E-B086-63D494ECA27E}"/>
+              </a:ext>
+              <a:ext uri="{C183D7F6-B498-43B3-948B-1728B52AA6E4}">
+                <adec:decorative xmlns:adec="http://schemas.microsoft.com/office/drawing/2017/decorative" val="1"/>
+              </a:ext>
+            </a:extLst>
+          </p:cNvPr>
+          <p:cNvSpPr>
+            <a:spLocks noGrp="1" noRot="1" noChangeAspect="1" noMove="1" noResize="1" noEditPoints="1" noAdjustHandles="1" noChangeArrowheads="1" noChangeShapeType="1" noTextEdit="1"/>
+          </p:cNvSpPr>
+          <p:nvPr>
+            <p:extLst>
+              <p:ext uri="{386F3935-93C4-4BCD-93E2-E3B085C9AB24}">
+                <p16:designElem xmlns:p16="http://schemas.microsoft.com/office/powerpoint/2015/main" val="1"/>
+              </p:ext>
+            </p:extLst>
+          </p:nvPr>
+        </p:nvSpPr>
+        <p:spPr>
+          <a:xfrm>
+            <a:off x="446534" y="3085765"/>
+            <a:ext cx="11262866" cy="3304800"/>
+          </a:xfrm>
+          <a:prstGeom prst="rect">
+            <a:avLst/>
+          </a:prstGeom>
+          <a:solidFill>
+            <a:schemeClr val="accent1"/>
+          </a:solidFill>
+          <a:ln>
+            <a:noFill/>
+          </a:ln>
+          <a:effectLst/>
+        </p:spPr>
+        <p:style>
+          <a:lnRef idx="1">
+            <a:schemeClr val="accent1"/>
+          </a:lnRef>
+          <a:fillRef idx="3">
+            <a:schemeClr val="accent1"/>
+          </a:fillRef>
+          <a:effectRef idx="2">
+            <a:schemeClr val="accent1"/>
+          </a:effectRef>
+          <a:fontRef idx="minor">
+            <a:schemeClr val="lt1"/>
+          </a:fontRef>
+        </p:style>
+        <p:txBody>
+          <a:bodyPr/>
+          <a:lstStyle/>
+          <a:p>
+            <a:endParaRPr lang="en-US"/>
+          </a:p>
+        </p:txBody>
+      </p:sp>
+      <p:sp useBgFill="1">
+        <p:nvSpPr>
+          <p:cNvPr id="20" name="Rectangle 19">
+            <a:extLst>
+              <a:ext uri="{FF2B5EF4-FFF2-40B4-BE49-F238E27FC236}">
+                <a16:creationId xmlns:a16="http://schemas.microsoft.com/office/drawing/2014/main" id="{E2B38E65-3AFD-404A-BEFC-3006BCB7A7D0}"/>
+              </a:ext>
+              <a:ext uri="{C183D7F6-B498-43B3-948B-1728B52AA6E4}">
+                <adec:decorative xmlns:adec="http://schemas.microsoft.com/office/drawing/2017/decorative" val="1"/>
+              </a:ext>
+            </a:extLst>
+          </p:cNvPr>
+          <p:cNvSpPr>
+            <a:spLocks noGrp="1" noRot="1" noChangeAspect="1" noMove="1" noResize="1" noEditPoints="1" noAdjustHandles="1" noChangeArrowheads="1" noChangeShapeType="1" noTextEdit="1"/>
+          </p:cNvSpPr>
+          <p:nvPr>
+            <p:extLst>
+              <p:ext uri="{386F3935-93C4-4BCD-93E2-E3B085C9AB24}">
+                <p16:designElem xmlns:p16="http://schemas.microsoft.com/office/powerpoint/2015/main" val="1"/>
+              </p:ext>
+            </p:extLst>
+          </p:nvPr>
+        </p:nvSpPr>
+        <p:spPr>
+          <a:xfrm>
+            <a:off x="0" y="1"/>
+            <a:ext cx="12191999" cy="6858000"/>
+          </a:xfrm>
+          <a:prstGeom prst="rect">
+            <a:avLst/>
+          </a:prstGeom>
+          <a:ln>
+            <a:noFill/>
+          </a:ln>
+        </p:spPr>
+        <p:style>
+          <a:lnRef idx="2">
+            <a:schemeClr val="accent1">
+              <a:shade val="50000"/>
+            </a:schemeClr>
+          </a:lnRef>
+          <a:fillRef idx="1">
+            <a:schemeClr val="accent1"/>
+          </a:fillRef>
+          <a:effectRef idx="0">
+            <a:schemeClr val="accent1"/>
+          </a:effectRef>
+          <a:fontRef idx="minor">
+            <a:schemeClr val="lt1"/>
+          </a:fontRef>
+        </p:style>
+        <p:txBody>
+          <a:bodyPr rtlCol="0" anchor="ctr"/>
+          <a:lstStyle/>
+          <a:p>
+            <a:pPr algn="ctr"/>
+            <a:endParaRPr lang="en-US"/>
+          </a:p>
+        </p:txBody>
+      </p:sp>
+      <p:sp>
+        <p:nvSpPr>
+          <p:cNvPr id="22" name="Rectangle 21">
+            <a:extLst>
+              <a:ext uri="{FF2B5EF4-FFF2-40B4-BE49-F238E27FC236}">
+                <a16:creationId xmlns:a16="http://schemas.microsoft.com/office/drawing/2014/main" id="{AE598562-3047-4BC2-BFF9-F39420474D21}"/>
+              </a:ext>
+              <a:ext uri="{C183D7F6-B498-43B3-948B-1728B52AA6E4}">
+                <adec:decorative xmlns:adec="http://schemas.microsoft.com/office/drawing/2017/decorative" val="1"/>
+              </a:ext>
+            </a:extLst>
+          </p:cNvPr>
+          <p:cNvSpPr>
+            <a:spLocks noGrp="1" noRot="1" noChangeAspect="1" noMove="1" noResize="1" noEditPoints="1" noAdjustHandles="1" noChangeArrowheads="1" noChangeShapeType="1" noTextEdit="1"/>
+          </p:cNvSpPr>
+          <p:nvPr>
+            <p:extLst>
+              <p:ext uri="{386F3935-93C4-4BCD-93E2-E3B085C9AB24}">
+                <p16:designElem xmlns:p16="http://schemas.microsoft.com/office/powerpoint/2015/main" val="1"/>
+              </p:ext>
+            </p:extLst>
+          </p:nvPr>
+        </p:nvSpPr>
+        <p:spPr>
+          <a:xfrm>
+            <a:off x="8042147" y="723899"/>
+            <a:ext cx="3703320" cy="5666666"/>
+          </a:xfrm>
+          <a:prstGeom prst="rect">
+            <a:avLst/>
+          </a:prstGeom>
+          <a:solidFill>
+            <a:schemeClr val="accent1"/>
+          </a:solidFill>
+          <a:ln>
+            <a:noFill/>
+          </a:ln>
+          <a:effectLst/>
+        </p:spPr>
+        <p:style>
+          <a:lnRef idx="1">
+            <a:schemeClr val="accent1"/>
+          </a:lnRef>
+          <a:fillRef idx="3">
+            <a:schemeClr val="accent1"/>
+          </a:fillRef>
+          <a:effectRef idx="2">
+            <a:schemeClr val="accent1"/>
+          </a:effectRef>
+          <a:fontRef idx="minor">
+            <a:schemeClr val="lt1"/>
+          </a:fontRef>
+        </p:style>
+        <p:txBody>
+          <a:bodyPr/>
+          <a:lstStyle/>
+          <a:p>
+            <a:endParaRPr lang="en-US"/>
+          </a:p>
+        </p:txBody>
+      </p:sp>
+      <p:sp>
+        <p:nvSpPr>
+          <p:cNvPr id="2" name="Title 1">
+            <a:extLst>
+              <a:ext uri="{FF2B5EF4-FFF2-40B4-BE49-F238E27FC236}">
+                <a16:creationId xmlns:a16="http://schemas.microsoft.com/office/drawing/2014/main" id="{81C6AA9E-A55E-577E-89B1-C8436EB5BA08}"/>
+              </a:ext>
+            </a:extLst>
+          </p:cNvPr>
+          <p:cNvSpPr>
+            <a:spLocks noGrp="1"/>
+          </p:cNvSpPr>
+          <p:nvPr>
+            <p:ph type="title"/>
+          </p:nvPr>
+        </p:nvSpPr>
+        <p:spPr>
+          <a:xfrm>
+            <a:off x="8236898" y="1754022"/>
+            <a:ext cx="3081576" cy="2085869"/>
+          </a:xfrm>
+        </p:spPr>
+        <p:txBody>
+          <a:bodyPr vert="horz" lIns="91440" tIns="45720" rIns="91440" bIns="45720" rtlCol="0" anchor="b">
+            <a:normAutofit fontScale="90000"/>
+          </a:bodyPr>
+          <a:lstStyle/>
+          <a:p>
+            <a:r>
+              <a:rPr lang="en-US" sz="3600" dirty="0">
+                <a:solidFill>
+                  <a:srgbClr val="FFFFFF"/>
+                </a:solidFill>
+              </a:rPr>
+              <a:t>Functional Interface </a:t>
+            </a:r>
+            <a:br>
+              <a:rPr lang="en-US" sz="3600" dirty="0">
+                <a:solidFill>
+                  <a:srgbClr val="FFFFFF"/>
+                </a:solidFill>
+              </a:rPr>
+            </a:br>
+            <a:br>
+              <a:rPr lang="en-US" sz="3600" dirty="0">
+                <a:solidFill>
+                  <a:srgbClr val="FFFFFF"/>
+                </a:solidFill>
+              </a:rPr>
+            </a:br>
+            <a:r>
+              <a:rPr lang="en-US" sz="3600" dirty="0">
+                <a:solidFill>
+                  <a:srgbClr val="FFFFFF"/>
+                </a:solidFill>
+              </a:rPr>
+              <a:t>Predicate</a:t>
+            </a:r>
+          </a:p>
+        </p:txBody>
+      </p:sp>
+      <p:grpSp>
+        <p:nvGrpSpPr>
+          <p:cNvPr id="24" name="Group 23">
+            <a:extLst>
+              <a:ext uri="{FF2B5EF4-FFF2-40B4-BE49-F238E27FC236}">
+                <a16:creationId xmlns:a16="http://schemas.microsoft.com/office/drawing/2014/main" id="{C19E0D66-E86B-461B-B58E-7FB356BB03FD}"/>
+              </a:ext>
+              <a:ext uri="{C183D7F6-B498-43B3-948B-1728B52AA6E4}">
+                <adec:decorative xmlns:adec="http://schemas.microsoft.com/office/drawing/2017/decorative" val="1"/>
+              </a:ext>
+            </a:extLst>
+          </p:cNvPr>
+          <p:cNvGrpSpPr>
+            <a:grpSpLocks noGrp="1" noUngrp="1" noRot="1" noChangeAspect="1" noMove="1" noResize="1"/>
+          </p:cNvGrpSpPr>
+          <p:nvPr>
+            <p:extLst>
+              <p:ext uri="{386F3935-93C4-4BCD-93E2-E3B085C9AB24}">
+                <p16:designElem xmlns:p16="http://schemas.microsoft.com/office/powerpoint/2015/main" val="1"/>
+              </p:ext>
+            </p:extLst>
+          </p:nvPr>
+        </p:nvGrpSpPr>
+        <p:grpSpPr>
+          <a:xfrm>
+            <a:off x="446534" y="453643"/>
+            <a:ext cx="11298933" cy="98554"/>
+            <a:chOff x="446534" y="453643"/>
+            <a:chExt cx="11298933" cy="98554"/>
+          </a:xfrm>
+        </p:grpSpPr>
+        <p:sp>
+          <p:nvSpPr>
+            <p:cNvPr id="25" name="Rectangle 24">
+              <a:extLst>
+                <a:ext uri="{FF2B5EF4-FFF2-40B4-BE49-F238E27FC236}">
+                  <a16:creationId xmlns:a16="http://schemas.microsoft.com/office/drawing/2014/main" id="{ED2C7D57-D78E-413F-958A-00ABC85043A8}"/>
+                </a:ext>
+                <a:ext uri="{C183D7F6-B498-43B3-948B-1728B52AA6E4}">
+                  <adec:decorative xmlns:adec="http://schemas.microsoft.com/office/drawing/2017/decorative" val="1"/>
+                </a:ext>
+              </a:extLst>
+            </p:cNvPr>
+            <p:cNvSpPr/>
+            <p:nvPr>
+              <p:extLst>
+                <p:ext uri="{386F3935-93C4-4BCD-93E2-E3B085C9AB24}">
+                  <p16:designElem xmlns:p16="http://schemas.microsoft.com/office/powerpoint/2015/main" val="1"/>
+                </p:ext>
+              </p:extLst>
+            </p:nvPr>
+          </p:nvSpPr>
+          <p:spPr>
+            <a:xfrm>
+              <a:off x="446534" y="457200"/>
+              <a:ext cx="3703320" cy="94997"/>
+            </a:xfrm>
+            <a:prstGeom prst="rect">
+              <a:avLst/>
+            </a:prstGeom>
+            <a:solidFill>
+              <a:schemeClr val="accent1"/>
+            </a:solidFill>
+            <a:ln>
+              <a:noFill/>
+            </a:ln>
+            <a:effectLst/>
+          </p:spPr>
+          <p:style>
+            <a:lnRef idx="1">
+              <a:schemeClr val="accent1"/>
+            </a:lnRef>
+            <a:fillRef idx="3">
+              <a:schemeClr val="accent1"/>
+            </a:fillRef>
+            <a:effectRef idx="2">
+              <a:schemeClr val="accent1"/>
+            </a:effectRef>
+            <a:fontRef idx="minor">
+              <a:schemeClr val="lt1"/>
+            </a:fontRef>
+          </p:style>
+          <p:txBody>
+            <a:bodyPr/>
+            <a:lstStyle/>
+            <a:p>
+              <a:endParaRPr lang="en-US"/>
+            </a:p>
+          </p:txBody>
+        </p:sp>
+        <p:sp>
+          <p:nvSpPr>
+            <p:cNvPr id="26" name="Rectangle 25">
+              <a:extLst>
+                <a:ext uri="{FF2B5EF4-FFF2-40B4-BE49-F238E27FC236}">
+                  <a16:creationId xmlns:a16="http://schemas.microsoft.com/office/drawing/2014/main" id="{1596FEE5-A0CD-4B5D-B4C1-7858019084EF}"/>
+                </a:ext>
+                <a:ext uri="{C183D7F6-B498-43B3-948B-1728B52AA6E4}">
+                  <adec:decorative xmlns:adec="http://schemas.microsoft.com/office/drawing/2017/decorative" val="1"/>
+                </a:ext>
+              </a:extLst>
+            </p:cNvPr>
+            <p:cNvSpPr/>
+            <p:nvPr>
+              <p:extLst>
+                <p:ext uri="{386F3935-93C4-4BCD-93E2-E3B085C9AB24}">
+                  <p16:designElem xmlns:p16="http://schemas.microsoft.com/office/powerpoint/2015/main" val="1"/>
+                </p:ext>
+              </p:extLst>
+            </p:nvPr>
+          </p:nvSpPr>
+          <p:spPr>
+            <a:xfrm>
+              <a:off x="8042147" y="453643"/>
+              <a:ext cx="3703320" cy="98554"/>
+            </a:xfrm>
+            <a:prstGeom prst="rect">
+              <a:avLst/>
+            </a:prstGeom>
+            <a:solidFill>
+              <a:schemeClr val="accent4"/>
+            </a:solidFill>
+            <a:ln>
+              <a:noFill/>
+            </a:ln>
+            <a:effectLst/>
+          </p:spPr>
+          <p:style>
+            <a:lnRef idx="1">
+              <a:schemeClr val="accent1"/>
+            </a:lnRef>
+            <a:fillRef idx="3">
+              <a:schemeClr val="accent1"/>
+            </a:fillRef>
+            <a:effectRef idx="2">
+              <a:schemeClr val="accent1"/>
+            </a:effectRef>
+            <a:fontRef idx="minor">
+              <a:schemeClr val="lt1"/>
+            </a:fontRef>
+          </p:style>
+          <p:txBody>
+            <a:bodyPr/>
+            <a:lstStyle/>
+            <a:p>
+              <a:endParaRPr lang="en-US"/>
+            </a:p>
+          </p:txBody>
+        </p:sp>
+        <p:sp>
+          <p:nvSpPr>
+            <p:cNvPr id="27" name="Rectangle 26">
+              <a:extLst>
+                <a:ext uri="{FF2B5EF4-FFF2-40B4-BE49-F238E27FC236}">
+                  <a16:creationId xmlns:a16="http://schemas.microsoft.com/office/drawing/2014/main" id="{28A81341-6C47-4992-BD01-6BCF3A349944}"/>
+                </a:ext>
+                <a:ext uri="{C183D7F6-B498-43B3-948B-1728B52AA6E4}">
+                  <adec:decorative xmlns:adec="http://schemas.microsoft.com/office/drawing/2017/decorative" val="1"/>
+                </a:ext>
+              </a:extLst>
+            </p:cNvPr>
+            <p:cNvSpPr/>
+            <p:nvPr>
+              <p:extLst>
+                <p:ext uri="{386F3935-93C4-4BCD-93E2-E3B085C9AB24}">
+                  <p16:designElem xmlns:p16="http://schemas.microsoft.com/office/powerpoint/2015/main" val="1"/>
+                </p:ext>
+              </p:extLst>
+            </p:nvPr>
+          </p:nvSpPr>
+          <p:spPr>
+            <a:xfrm>
+              <a:off x="4241830" y="457200"/>
+              <a:ext cx="3703320" cy="91440"/>
+            </a:xfrm>
+            <a:prstGeom prst="rect">
+              <a:avLst/>
+            </a:prstGeom>
+            <a:solidFill>
+              <a:schemeClr val="accent2"/>
+            </a:solidFill>
+            <a:ln>
+              <a:noFill/>
+            </a:ln>
+            <a:effectLst/>
+          </p:spPr>
+          <p:style>
+            <a:lnRef idx="1">
+              <a:schemeClr val="accent1"/>
+            </a:lnRef>
+            <a:fillRef idx="3">
+              <a:schemeClr val="accent1"/>
+            </a:fillRef>
+            <a:effectRef idx="2">
+              <a:schemeClr val="accent1"/>
+            </a:effectRef>
+            <a:fontRef idx="minor">
+              <a:schemeClr val="lt1"/>
+            </a:fontRef>
+          </p:style>
+          <p:txBody>
+            <a:bodyPr/>
+            <a:lstStyle/>
+            <a:p>
+              <a:endParaRPr lang="en-US"/>
+            </a:p>
+          </p:txBody>
+        </p:sp>
+      </p:grpSp>
+      <p:pic>
+        <p:nvPicPr>
+          <p:cNvPr id="11" name="Picture 10">
+            <a:extLst>
+              <a:ext uri="{FF2B5EF4-FFF2-40B4-BE49-F238E27FC236}">
+                <a16:creationId xmlns:a16="http://schemas.microsoft.com/office/drawing/2014/main" id="{C22E98E0-C725-A500-0278-5B8DB90F1615}"/>
+              </a:ext>
+            </a:extLst>
+          </p:cNvPr>
+          <p:cNvPicPr>
+            <a:picLocks noChangeAspect="1"/>
+          </p:cNvPicPr>
+          <p:nvPr/>
+        </p:nvPicPr>
+        <p:blipFill>
+          <a:blip r:embed="rId2"/>
+          <a:stretch>
+            <a:fillRect/>
+          </a:stretch>
+        </p:blipFill>
+        <p:spPr>
+          <a:xfrm>
+            <a:off x="1503050" y="723899"/>
+            <a:ext cx="5482581" cy="5955474"/>
+          </a:xfrm>
+          <a:prstGeom prst="rect">
+            <a:avLst/>
+          </a:prstGeom>
+        </p:spPr>
+      </p:pic>
+      <p:pic>
+        <p:nvPicPr>
+          <p:cNvPr id="15" name="Picture 14">
+            <a:extLst>
+              <a:ext uri="{FF2B5EF4-FFF2-40B4-BE49-F238E27FC236}">
+                <a16:creationId xmlns:a16="http://schemas.microsoft.com/office/drawing/2014/main" id="{FAA2451F-19E5-54E8-C7C3-6B6E818A56B9}"/>
+              </a:ext>
+            </a:extLst>
+          </p:cNvPr>
+          <p:cNvPicPr>
+            <a:picLocks noChangeAspect="1"/>
+          </p:cNvPicPr>
+          <p:nvPr/>
+        </p:nvPicPr>
+        <p:blipFill>
+          <a:blip r:embed="rId3"/>
+          <a:stretch>
+            <a:fillRect/>
+          </a:stretch>
+        </p:blipFill>
+        <p:spPr>
+          <a:xfrm>
+            <a:off x="8645858" y="4780301"/>
+            <a:ext cx="2495898" cy="1038370"/>
+          </a:xfrm>
+          <a:prstGeom prst="rect">
+            <a:avLst/>
+          </a:prstGeom>
+        </p:spPr>
+      </p:pic>
+      <p:sp>
+        <p:nvSpPr>
+          <p:cNvPr id="17" name="TextBox 16">
+            <a:extLst>
+              <a:ext uri="{FF2B5EF4-FFF2-40B4-BE49-F238E27FC236}">
+                <a16:creationId xmlns:a16="http://schemas.microsoft.com/office/drawing/2014/main" id="{76C265AD-2B67-D1C4-F273-4B0F2C8BAD95}"/>
+              </a:ext>
+            </a:extLst>
+          </p:cNvPr>
+          <p:cNvSpPr txBox="1"/>
+          <p:nvPr/>
+        </p:nvSpPr>
+        <p:spPr>
+          <a:xfrm>
+            <a:off x="8314206" y="4306827"/>
+            <a:ext cx="3431260" cy="369332"/>
+          </a:xfrm>
+          <a:prstGeom prst="rect">
+            <a:avLst/>
+          </a:prstGeom>
+          <a:noFill/>
+        </p:spPr>
+        <p:txBody>
+          <a:bodyPr wrap="none" rtlCol="0">
+            <a:spAutoFit/>
+          </a:bodyPr>
+          <a:lstStyle/>
+          <a:p>
+            <a:r>
+              <a:rPr lang="en-US" dirty="0">
+                <a:solidFill>
+                  <a:schemeClr val="bg1"/>
+                </a:solidFill>
+              </a:rPr>
+              <a:t>Built-in – essentially looks like this:</a:t>
+            </a:r>
+          </a:p>
+        </p:txBody>
+      </p:sp>
+    </p:spTree>
+    <p:extLst>
+      <p:ext uri="{BB962C8B-B14F-4D97-AF65-F5344CB8AC3E}">
+        <p14:creationId xmlns:p14="http://schemas.microsoft.com/office/powerpoint/2010/main" val="2665326429"/>
+      </p:ext>
+    </p:extLst>
+  </p:cSld>
+  <p:clrMapOvr>
+    <a:masterClrMapping/>
+  </p:clrMapOvr>
+</p:sld>
+</file>
+
+<file path=ppt/slides/slide2.xml><?xml version="1.0" encoding="utf-8"?>
+<p:sld xmlns:a="http://schemas.openxmlformats.org/drawingml/2006/main" xmlns:r="http://schemas.openxmlformats.org/officeDocument/2006/relationships" xmlns:p="http://schemas.openxmlformats.org/presentationml/2006/main">
+  <p:cSld>
+    <p:spTree>
+      <p:nvGrpSpPr>
+        <p:cNvPr id="1" name=""/>
+        <p:cNvGrpSpPr/>
+        <p:nvPr/>
+      </p:nvGrpSpPr>
+      <p:grpSpPr>
+        <a:xfrm>
+          <a:off x="0" y="0"/>
+          <a:ext cx="0" cy="0"/>
+          <a:chOff x="0" y="0"/>
+          <a:chExt cx="0" cy="0"/>
+        </a:xfrm>
+      </p:grpSpPr>
+      <p:sp>
+        <p:nvSpPr>
+          <p:cNvPr id="2" name="Title 1">
+            <a:extLst>
+              <a:ext uri="{FF2B5EF4-FFF2-40B4-BE49-F238E27FC236}">
+                <a16:creationId xmlns:a16="http://schemas.microsoft.com/office/drawing/2014/main" id="{752895A1-89DB-DC66-DF51-D24A37948F14}"/>
+              </a:ext>
+            </a:extLst>
+          </p:cNvPr>
+          <p:cNvSpPr>
+            <a:spLocks noGrp="1"/>
+          </p:cNvSpPr>
+          <p:nvPr>
+            <p:ph type="title"/>
+          </p:nvPr>
+        </p:nvSpPr>
+        <p:spPr/>
+        <p:txBody>
+          <a:bodyPr/>
+          <a:lstStyle/>
+          <a:p>
+            <a:r>
+              <a:rPr lang="en-US" dirty="0"/>
+              <a:t>Collections</a:t>
+            </a:r>
+          </a:p>
+        </p:txBody>
+      </p:sp>
+      <p:sp>
+        <p:nvSpPr>
+          <p:cNvPr id="3" name="Content Placeholder 2">
+            <a:extLst>
+              <a:ext uri="{FF2B5EF4-FFF2-40B4-BE49-F238E27FC236}">
+                <a16:creationId xmlns:a16="http://schemas.microsoft.com/office/drawing/2014/main" id="{3BE966C1-50DB-8A0E-76D8-AEE1C3245759}"/>
+              </a:ext>
+            </a:extLst>
+          </p:cNvPr>
+          <p:cNvSpPr>
+            <a:spLocks noGrp="1"/>
+          </p:cNvSpPr>
+          <p:nvPr>
+            <p:ph idx="1"/>
+          </p:nvPr>
+        </p:nvSpPr>
+        <p:spPr>
+          <a:xfrm>
+            <a:off x="581192" y="2180496"/>
+            <a:ext cx="11029615" cy="1609961"/>
+          </a:xfrm>
+        </p:spPr>
+        <p:txBody>
+          <a:bodyPr>
+            <a:normAutofit fontScale="85000" lnSpcReduction="20000"/>
+          </a:bodyPr>
+          <a:lstStyle/>
+          <a:p>
+            <a:r>
+              <a:rPr lang="en-US" dirty="0"/>
+              <a:t>A collection is an object that stores multiple objects together</a:t>
+            </a:r>
+          </a:p>
+          <a:p>
+            <a:r>
+              <a:rPr lang="en-US" dirty="0"/>
+              <a:t>Collections are accompanied by ‘Generics’ – which tell Java the datatype the collection stores i.e. List&lt;Integer&gt;</a:t>
+            </a:r>
+          </a:p>
+          <a:p>
+            <a:r>
+              <a:rPr lang="en-US" dirty="0"/>
+              <a:t>Why not List&lt;int&gt;?  </a:t>
+            </a:r>
+          </a:p>
+          <a:p>
+            <a:pPr lvl="1"/>
+            <a:r>
+              <a:rPr lang="en-US" dirty="0"/>
+              <a:t>That’s because collections store objects, not primitive types</a:t>
+            </a:r>
+          </a:p>
+          <a:p>
+            <a:pPr lvl="1"/>
+            <a:r>
+              <a:rPr lang="en-US" dirty="0"/>
+              <a:t>Wrapper classes are provided such as: Integer, Long, Double, Boolean, etc. </a:t>
+            </a:r>
+          </a:p>
+          <a:p>
+            <a:endParaRPr lang="en-US" dirty="0"/>
+          </a:p>
+        </p:txBody>
+      </p:sp>
+      <p:sp>
+        <p:nvSpPr>
+          <p:cNvPr id="5" name="TextBox 4">
+            <a:extLst>
+              <a:ext uri="{FF2B5EF4-FFF2-40B4-BE49-F238E27FC236}">
+                <a16:creationId xmlns:a16="http://schemas.microsoft.com/office/drawing/2014/main" id="{8128ED45-BB3E-82C7-BD6F-363E4704F3B9}"/>
+              </a:ext>
+            </a:extLst>
+          </p:cNvPr>
+          <p:cNvSpPr txBox="1"/>
+          <p:nvPr/>
+        </p:nvSpPr>
+        <p:spPr>
+          <a:xfrm>
+            <a:off x="1013043" y="4338935"/>
+            <a:ext cx="3446223" cy="923330"/>
+          </a:xfrm>
+          <a:prstGeom prst="rect">
+            <a:avLst/>
+          </a:prstGeom>
+          <a:noFill/>
+        </p:spPr>
+        <p:txBody>
+          <a:bodyPr wrap="square">
+            <a:spAutoFit/>
+          </a:bodyPr>
+          <a:lstStyle/>
+          <a:p>
+            <a:r>
+              <a:rPr lang="en-US" dirty="0"/>
+              <a:t>String student1 = "Alice";</a:t>
+            </a:r>
+          </a:p>
+          <a:p>
+            <a:r>
+              <a:rPr lang="en-US" dirty="0"/>
+              <a:t>String student2 = "Bob";</a:t>
+            </a:r>
+          </a:p>
+          <a:p>
+            <a:r>
+              <a:rPr lang="en-US" dirty="0"/>
+              <a:t>String student3 = "Charlie";</a:t>
+            </a:r>
+          </a:p>
+        </p:txBody>
+      </p:sp>
+      <p:sp>
+        <p:nvSpPr>
+          <p:cNvPr id="7" name="TextBox 6">
+            <a:extLst>
+              <a:ext uri="{FF2B5EF4-FFF2-40B4-BE49-F238E27FC236}">
+                <a16:creationId xmlns:a16="http://schemas.microsoft.com/office/drawing/2014/main" id="{D9A4EA57-F018-8E2B-1AC2-26DDDB8067CE}"/>
+              </a:ext>
+            </a:extLst>
+          </p:cNvPr>
+          <p:cNvSpPr txBox="1"/>
+          <p:nvPr/>
+        </p:nvSpPr>
+        <p:spPr>
+          <a:xfrm>
+            <a:off x="6494743" y="4338935"/>
+            <a:ext cx="4684214" cy="1477328"/>
+          </a:xfrm>
+          <a:prstGeom prst="rect">
+            <a:avLst/>
+          </a:prstGeom>
+          <a:noFill/>
+        </p:spPr>
+        <p:txBody>
+          <a:bodyPr wrap="square">
+            <a:spAutoFit/>
+          </a:bodyPr>
+          <a:lstStyle/>
+          <a:p>
+            <a:r>
+              <a:rPr lang="en-US" dirty="0"/>
+              <a:t>List&lt;String&gt; students = new </a:t>
+            </a:r>
+            <a:r>
+              <a:rPr lang="en-US" dirty="0" err="1"/>
+              <a:t>ArrayList</a:t>
+            </a:r>
+            <a:r>
+              <a:rPr lang="en-US" dirty="0"/>
+              <a:t>&lt;&gt;();</a:t>
+            </a:r>
+          </a:p>
+          <a:p>
+            <a:endParaRPr lang="en-US" dirty="0"/>
+          </a:p>
+          <a:p>
+            <a:r>
+              <a:rPr lang="en-US" dirty="0" err="1"/>
+              <a:t>students.add</a:t>
+            </a:r>
+            <a:r>
+              <a:rPr lang="en-US" dirty="0"/>
+              <a:t>("Alice");</a:t>
+            </a:r>
+          </a:p>
+          <a:p>
+            <a:r>
+              <a:rPr lang="en-US" dirty="0" err="1"/>
+              <a:t>students.add</a:t>
+            </a:r>
+            <a:r>
+              <a:rPr lang="en-US" dirty="0"/>
+              <a:t>("Bob");</a:t>
+            </a:r>
+          </a:p>
+          <a:p>
+            <a:r>
+              <a:rPr lang="en-US" dirty="0" err="1"/>
+              <a:t>students.add</a:t>
+            </a:r>
+            <a:r>
+              <a:rPr lang="en-US" dirty="0"/>
+              <a:t>("Charlie");</a:t>
+            </a:r>
+          </a:p>
+        </p:txBody>
+      </p:sp>
+      <p:sp>
+        <p:nvSpPr>
+          <p:cNvPr id="8" name="TextBox 7">
+            <a:extLst>
+              <a:ext uri="{FF2B5EF4-FFF2-40B4-BE49-F238E27FC236}">
+                <a16:creationId xmlns:a16="http://schemas.microsoft.com/office/drawing/2014/main" id="{3063F559-58CB-7F07-6A29-9E71F561B524}"/>
+              </a:ext>
+            </a:extLst>
+          </p:cNvPr>
+          <p:cNvSpPr txBox="1"/>
+          <p:nvPr/>
+        </p:nvSpPr>
+        <p:spPr>
+          <a:xfrm>
+            <a:off x="1346548" y="3880030"/>
+            <a:ext cx="1544012" cy="369332"/>
+          </a:xfrm>
+          <a:prstGeom prst="rect">
+            <a:avLst/>
+          </a:prstGeom>
+          <a:noFill/>
+        </p:spPr>
+        <p:txBody>
+          <a:bodyPr wrap="none" rtlCol="0">
+            <a:spAutoFit/>
+          </a:bodyPr>
+          <a:lstStyle/>
+          <a:p>
+            <a:r>
+              <a:rPr lang="en-US" dirty="0"/>
+              <a:t>Instead of this:</a:t>
+            </a:r>
+          </a:p>
+        </p:txBody>
+      </p:sp>
+      <p:sp>
+        <p:nvSpPr>
+          <p:cNvPr id="10" name="TextBox 9">
+            <a:extLst>
+              <a:ext uri="{FF2B5EF4-FFF2-40B4-BE49-F238E27FC236}">
+                <a16:creationId xmlns:a16="http://schemas.microsoft.com/office/drawing/2014/main" id="{7DF3CBB3-EFE5-039F-00D3-34AADEE8EB1B}"/>
+              </a:ext>
+            </a:extLst>
+          </p:cNvPr>
+          <p:cNvSpPr txBox="1"/>
+          <p:nvPr/>
+        </p:nvSpPr>
+        <p:spPr>
+          <a:xfrm>
+            <a:off x="6494743" y="3880030"/>
+            <a:ext cx="1648336" cy="369332"/>
+          </a:xfrm>
+          <a:prstGeom prst="rect">
+            <a:avLst/>
+          </a:prstGeom>
+          <a:noFill/>
+        </p:spPr>
+        <p:txBody>
+          <a:bodyPr wrap="none" rtlCol="0">
+            <a:spAutoFit/>
+          </a:bodyPr>
+          <a:lstStyle/>
+          <a:p>
+            <a:r>
+              <a:rPr lang="en-US" dirty="0"/>
+              <a:t>We can do this:</a:t>
+            </a:r>
+          </a:p>
+        </p:txBody>
+      </p:sp>
+    </p:spTree>
+    <p:extLst>
+      <p:ext uri="{BB962C8B-B14F-4D97-AF65-F5344CB8AC3E}">
+        <p14:creationId xmlns:p14="http://schemas.microsoft.com/office/powerpoint/2010/main" val="572767474"/>
+      </p:ext>
+    </p:extLst>
+  </p:cSld>
+  <p:clrMapOvr>
+    <a:masterClrMapping/>
+  </p:clrMapOvr>
+</p:sld>
+</file>
+
+<file path=ppt/slides/slide20.xml><?xml version="1.0" encoding="utf-8"?>
+<p:sld xmlns:a="http://schemas.openxmlformats.org/drawingml/2006/main" xmlns:r="http://schemas.openxmlformats.org/officeDocument/2006/relationships" xmlns:p="http://schemas.openxmlformats.org/presentationml/2006/main">
+  <p:cSld>
+    <p:spTree>
+      <p:nvGrpSpPr>
+        <p:cNvPr id="1" name=""/>
+        <p:cNvGrpSpPr/>
+        <p:nvPr/>
+      </p:nvGrpSpPr>
+      <p:grpSpPr>
+        <a:xfrm>
+          <a:off x="0" y="0"/>
+          <a:ext cx="0" cy="0"/>
+          <a:chOff x="0" y="0"/>
+          <a:chExt cx="0" cy="0"/>
+        </a:xfrm>
+      </p:grpSpPr>
+      <p:sp>
+        <p:nvSpPr>
+          <p:cNvPr id="2" name="Title 1">
+            <a:extLst>
+              <a:ext uri="{FF2B5EF4-FFF2-40B4-BE49-F238E27FC236}">
+                <a16:creationId xmlns:a16="http://schemas.microsoft.com/office/drawing/2014/main" id="{E217A737-9E71-EC24-3E3B-AE26C8A78B59}"/>
+              </a:ext>
+            </a:extLst>
+          </p:cNvPr>
+          <p:cNvSpPr>
+            <a:spLocks noGrp="1"/>
+          </p:cNvSpPr>
+          <p:nvPr>
+            <p:ph type="title"/>
+          </p:nvPr>
+        </p:nvSpPr>
+        <p:spPr/>
+        <p:txBody>
+          <a:bodyPr/>
+          <a:lstStyle/>
+          <a:p>
+            <a:r>
+              <a:rPr lang="en-US" dirty="0"/>
+              <a:t>Functional Interfaces</a:t>
+            </a:r>
+          </a:p>
+        </p:txBody>
+      </p:sp>
+      <p:sp>
+        <p:nvSpPr>
+          <p:cNvPr id="5" name="TextBox 4">
+            <a:extLst>
+              <a:ext uri="{FF2B5EF4-FFF2-40B4-BE49-F238E27FC236}">
+                <a16:creationId xmlns:a16="http://schemas.microsoft.com/office/drawing/2014/main" id="{B58B69E1-6B81-3946-1120-D1381585DC5A}"/>
+              </a:ext>
+            </a:extLst>
+          </p:cNvPr>
+          <p:cNvSpPr txBox="1"/>
+          <p:nvPr/>
+        </p:nvSpPr>
+        <p:spPr>
+          <a:xfrm>
+            <a:off x="720355" y="2690336"/>
+            <a:ext cx="6097978" cy="1477328"/>
+          </a:xfrm>
+          <a:prstGeom prst="rect">
+            <a:avLst/>
+          </a:prstGeom>
+          <a:noFill/>
+        </p:spPr>
+        <p:txBody>
+          <a:bodyPr wrap="square">
+            <a:spAutoFit/>
+          </a:bodyPr>
+          <a:lstStyle/>
+          <a:p>
+            <a:r>
+              <a:rPr lang="en-US" dirty="0"/>
+              <a:t>Function&lt;String, Integer&gt; </a:t>
+            </a:r>
+            <a:r>
+              <a:rPr lang="en-US" dirty="0" err="1"/>
+              <a:t>getLength</a:t>
+            </a:r>
+            <a:r>
+              <a:rPr lang="en-US" dirty="0"/>
+              <a:t> = text -&gt; </a:t>
+            </a:r>
+            <a:r>
+              <a:rPr lang="en-US" dirty="0" err="1"/>
+              <a:t>text.length</a:t>
+            </a:r>
+            <a:r>
+              <a:rPr lang="en-US" dirty="0"/>
+              <a:t>();</a:t>
+            </a:r>
+          </a:p>
+          <a:p>
+            <a:endParaRPr lang="en-US" dirty="0"/>
+          </a:p>
+          <a:p>
+            <a:r>
+              <a:rPr lang="en-US" dirty="0"/>
+              <a:t>int length = </a:t>
+            </a:r>
+            <a:r>
+              <a:rPr lang="en-US" dirty="0" err="1"/>
+              <a:t>getLength.apply</a:t>
+            </a:r>
+            <a:r>
+              <a:rPr lang="en-US" dirty="0"/>
+              <a:t>("Hello");</a:t>
+            </a:r>
+          </a:p>
+          <a:p>
+            <a:endParaRPr lang="en-US" dirty="0"/>
+          </a:p>
+          <a:p>
+            <a:r>
+              <a:rPr lang="en-US" dirty="0" err="1"/>
+              <a:t>System.out.println</a:t>
+            </a:r>
+            <a:r>
+              <a:rPr lang="en-US" dirty="0"/>
+              <a:t>(length); // 5</a:t>
+            </a:r>
+          </a:p>
+        </p:txBody>
+      </p:sp>
+      <p:sp>
+        <p:nvSpPr>
+          <p:cNvPr id="7" name="TextBox 6">
+            <a:extLst>
+              <a:ext uri="{FF2B5EF4-FFF2-40B4-BE49-F238E27FC236}">
+                <a16:creationId xmlns:a16="http://schemas.microsoft.com/office/drawing/2014/main" id="{8E3B7032-A484-946F-D1E0-17C9FB069793}"/>
+              </a:ext>
+            </a:extLst>
+          </p:cNvPr>
+          <p:cNvSpPr txBox="1"/>
+          <p:nvPr/>
+        </p:nvSpPr>
+        <p:spPr>
+          <a:xfrm>
+            <a:off x="720355" y="4922764"/>
+            <a:ext cx="6097772" cy="923330"/>
+          </a:xfrm>
+          <a:prstGeom prst="rect">
+            <a:avLst/>
+          </a:prstGeom>
+          <a:noFill/>
+        </p:spPr>
+        <p:txBody>
+          <a:bodyPr wrap="square">
+            <a:spAutoFit/>
+          </a:bodyPr>
+          <a:lstStyle/>
+          <a:p>
+            <a:r>
+              <a:rPr lang="en-US" dirty="0"/>
+              <a:t>Consumer&lt;String&gt; print = text -&gt; </a:t>
+            </a:r>
+            <a:r>
+              <a:rPr lang="en-US" dirty="0" err="1"/>
+              <a:t>System.out.println</a:t>
+            </a:r>
+            <a:r>
+              <a:rPr lang="en-US" dirty="0"/>
+              <a:t>(text);</a:t>
+            </a:r>
+          </a:p>
+          <a:p>
+            <a:endParaRPr lang="en-US" dirty="0"/>
+          </a:p>
+          <a:p>
+            <a:r>
+              <a:rPr lang="en-US" dirty="0" err="1"/>
+              <a:t>print.accept</a:t>
+            </a:r>
+            <a:r>
+              <a:rPr lang="en-US" dirty="0"/>
+              <a:t>("Hello");</a:t>
+            </a:r>
+          </a:p>
+        </p:txBody>
+      </p:sp>
+      <p:sp>
+        <p:nvSpPr>
+          <p:cNvPr id="9" name="TextBox 8">
+            <a:extLst>
+              <a:ext uri="{FF2B5EF4-FFF2-40B4-BE49-F238E27FC236}">
+                <a16:creationId xmlns:a16="http://schemas.microsoft.com/office/drawing/2014/main" id="{FBF753F8-32F6-958C-5682-D268D58E7D86}"/>
+              </a:ext>
+            </a:extLst>
+          </p:cNvPr>
+          <p:cNvSpPr txBox="1"/>
+          <p:nvPr/>
+        </p:nvSpPr>
+        <p:spPr>
+          <a:xfrm>
+            <a:off x="6951035" y="3160292"/>
+            <a:ext cx="4181253" cy="1477328"/>
+          </a:xfrm>
+          <a:prstGeom prst="rect">
+            <a:avLst/>
+          </a:prstGeom>
+          <a:noFill/>
+        </p:spPr>
+        <p:txBody>
+          <a:bodyPr wrap="square">
+            <a:spAutoFit/>
+          </a:bodyPr>
+          <a:lstStyle/>
+          <a:p>
+            <a:r>
+              <a:rPr lang="en-US" dirty="0"/>
+              <a:t>Supplier&lt;String&gt; greeting = () -&gt; "Hello!";</a:t>
+            </a:r>
+          </a:p>
+          <a:p>
+            <a:endParaRPr lang="en-US" dirty="0"/>
+          </a:p>
+          <a:p>
+            <a:r>
+              <a:rPr lang="en-US" dirty="0"/>
+              <a:t>String message = </a:t>
+            </a:r>
+            <a:r>
+              <a:rPr lang="en-US" dirty="0" err="1"/>
+              <a:t>greeting.get</a:t>
+            </a:r>
+            <a:r>
+              <a:rPr lang="en-US" dirty="0"/>
+              <a:t>();</a:t>
+            </a:r>
+          </a:p>
+          <a:p>
+            <a:endParaRPr lang="en-US" dirty="0"/>
+          </a:p>
+          <a:p>
+            <a:r>
+              <a:rPr lang="en-US" dirty="0" err="1"/>
+              <a:t>System.out.println</a:t>
+            </a:r>
+            <a:r>
+              <a:rPr lang="en-US" dirty="0"/>
+              <a:t>(message);</a:t>
+            </a:r>
+          </a:p>
+        </p:txBody>
+      </p:sp>
+      <p:sp>
+        <p:nvSpPr>
+          <p:cNvPr id="10" name="Rectangle 9">
+            <a:extLst>
+              <a:ext uri="{FF2B5EF4-FFF2-40B4-BE49-F238E27FC236}">
+                <a16:creationId xmlns:a16="http://schemas.microsoft.com/office/drawing/2014/main" id="{196732E4-B9C6-BDFC-CAC7-C862F3336EDF}"/>
+              </a:ext>
+            </a:extLst>
+          </p:cNvPr>
+          <p:cNvSpPr/>
+          <p:nvPr/>
+        </p:nvSpPr>
+        <p:spPr>
+          <a:xfrm>
+            <a:off x="720355" y="4922764"/>
+            <a:ext cx="5733608" cy="923330"/>
+          </a:xfrm>
+          <a:prstGeom prst="rect">
+            <a:avLst/>
+          </a:prstGeom>
+          <a:noFill/>
+          <a:ln>
+            <a:solidFill>
+              <a:schemeClr val="accent2"/>
+            </a:solidFill>
+          </a:ln>
+        </p:spPr>
+        <p:style>
+          <a:lnRef idx="2">
+            <a:schemeClr val="accent1">
+              <a:shade val="15000"/>
+            </a:schemeClr>
+          </a:lnRef>
+          <a:fillRef idx="1">
+            <a:schemeClr val="accent1"/>
+          </a:fillRef>
+          <a:effectRef idx="0">
+            <a:schemeClr val="accent1"/>
+          </a:effectRef>
+          <a:fontRef idx="minor">
+            <a:schemeClr val="lt1"/>
+          </a:fontRef>
+        </p:style>
+        <p:txBody>
+          <a:bodyPr rtlCol="0" anchor="ctr"/>
+          <a:lstStyle/>
+          <a:p>
+            <a:pPr algn="ctr"/>
+            <a:endParaRPr lang="en-US"/>
+          </a:p>
+        </p:txBody>
+      </p:sp>
+      <p:sp>
+        <p:nvSpPr>
+          <p:cNvPr id="12" name="Rectangle 11">
+            <a:extLst>
+              <a:ext uri="{FF2B5EF4-FFF2-40B4-BE49-F238E27FC236}">
+                <a16:creationId xmlns:a16="http://schemas.microsoft.com/office/drawing/2014/main" id="{89D82B92-A141-B22C-9276-492BFFE90201}"/>
+              </a:ext>
+            </a:extLst>
+          </p:cNvPr>
+          <p:cNvSpPr/>
+          <p:nvPr/>
+        </p:nvSpPr>
+        <p:spPr>
+          <a:xfrm>
+            <a:off x="720355" y="2628272"/>
+            <a:ext cx="5733608" cy="1646016"/>
+          </a:xfrm>
+          <a:prstGeom prst="rect">
+            <a:avLst/>
+          </a:prstGeom>
+          <a:noFill/>
+          <a:ln>
+            <a:solidFill>
+              <a:schemeClr val="accent2"/>
+            </a:solidFill>
+          </a:ln>
+        </p:spPr>
+        <p:style>
+          <a:lnRef idx="2">
+            <a:schemeClr val="accent1">
+              <a:shade val="15000"/>
+            </a:schemeClr>
+          </a:lnRef>
+          <a:fillRef idx="1">
+            <a:schemeClr val="accent1"/>
+          </a:fillRef>
+          <a:effectRef idx="0">
+            <a:schemeClr val="accent1"/>
+          </a:effectRef>
+          <a:fontRef idx="minor">
+            <a:schemeClr val="lt1"/>
+          </a:fontRef>
+        </p:style>
+        <p:txBody>
+          <a:bodyPr rtlCol="0" anchor="ctr"/>
+          <a:lstStyle/>
+          <a:p>
+            <a:pPr algn="ctr"/>
+            <a:endParaRPr lang="en-US"/>
+          </a:p>
+        </p:txBody>
+      </p:sp>
+      <p:sp>
+        <p:nvSpPr>
+          <p:cNvPr id="14" name="Rectangle 13">
+            <a:extLst>
+              <a:ext uri="{FF2B5EF4-FFF2-40B4-BE49-F238E27FC236}">
+                <a16:creationId xmlns:a16="http://schemas.microsoft.com/office/drawing/2014/main" id="{AB5C62C4-28F1-D160-0A42-5E7F78B36074}"/>
+              </a:ext>
+            </a:extLst>
+          </p:cNvPr>
+          <p:cNvSpPr/>
+          <p:nvPr/>
+        </p:nvSpPr>
+        <p:spPr>
+          <a:xfrm>
+            <a:off x="6951035" y="3160292"/>
+            <a:ext cx="4181253" cy="1477328"/>
+          </a:xfrm>
+          <a:prstGeom prst="rect">
+            <a:avLst/>
+          </a:prstGeom>
+          <a:noFill/>
+          <a:ln>
+            <a:solidFill>
+              <a:schemeClr val="accent2"/>
+            </a:solidFill>
+          </a:ln>
+        </p:spPr>
+        <p:style>
+          <a:lnRef idx="2">
+            <a:schemeClr val="accent1">
+              <a:shade val="15000"/>
+            </a:schemeClr>
+          </a:lnRef>
+          <a:fillRef idx="1">
+            <a:schemeClr val="accent1"/>
+          </a:fillRef>
+          <a:effectRef idx="0">
+            <a:schemeClr val="accent1"/>
+          </a:effectRef>
+          <a:fontRef idx="minor">
+            <a:schemeClr val="lt1"/>
+          </a:fontRef>
+        </p:style>
+        <p:txBody>
+          <a:bodyPr rtlCol="0" anchor="ctr"/>
+          <a:lstStyle/>
+          <a:p>
+            <a:pPr algn="ctr"/>
+            <a:endParaRPr lang="en-US"/>
+          </a:p>
+        </p:txBody>
+      </p:sp>
+      <p:sp>
+        <p:nvSpPr>
+          <p:cNvPr id="15" name="TextBox 14">
+            <a:extLst>
+              <a:ext uri="{FF2B5EF4-FFF2-40B4-BE49-F238E27FC236}">
+                <a16:creationId xmlns:a16="http://schemas.microsoft.com/office/drawing/2014/main" id="{09EB9EB4-2269-7CE3-748C-97501827618D}"/>
+              </a:ext>
+            </a:extLst>
+          </p:cNvPr>
+          <p:cNvSpPr txBox="1"/>
+          <p:nvPr/>
+        </p:nvSpPr>
+        <p:spPr>
+          <a:xfrm>
+            <a:off x="967563" y="2232837"/>
+            <a:ext cx="1607491" cy="369332"/>
+          </a:xfrm>
+          <a:prstGeom prst="rect">
+            <a:avLst/>
+          </a:prstGeom>
+          <a:noFill/>
+        </p:spPr>
+        <p:txBody>
+          <a:bodyPr wrap="none" rtlCol="0">
+            <a:spAutoFit/>
+          </a:bodyPr>
+          <a:lstStyle/>
+          <a:p>
+            <a:r>
+              <a:rPr lang="en-US" dirty="0"/>
+              <a:t>Function&lt;T, R&gt;</a:t>
+            </a:r>
+          </a:p>
+        </p:txBody>
+      </p:sp>
+      <p:sp>
+        <p:nvSpPr>
+          <p:cNvPr id="17" name="TextBox 16">
+            <a:extLst>
+              <a:ext uri="{FF2B5EF4-FFF2-40B4-BE49-F238E27FC236}">
+                <a16:creationId xmlns:a16="http://schemas.microsoft.com/office/drawing/2014/main" id="{E6A91698-F0C0-84A7-D968-99619C3CA860}"/>
+              </a:ext>
+            </a:extLst>
+          </p:cNvPr>
+          <p:cNvSpPr txBox="1"/>
+          <p:nvPr/>
+        </p:nvSpPr>
+        <p:spPr>
+          <a:xfrm>
+            <a:off x="967562" y="4553432"/>
+            <a:ext cx="1582484" cy="369332"/>
+          </a:xfrm>
+          <a:prstGeom prst="rect">
+            <a:avLst/>
+          </a:prstGeom>
+          <a:noFill/>
+        </p:spPr>
+        <p:txBody>
+          <a:bodyPr wrap="none" rtlCol="0">
+            <a:spAutoFit/>
+          </a:bodyPr>
+          <a:lstStyle/>
+          <a:p>
+            <a:r>
+              <a:rPr lang="en-US" dirty="0"/>
+              <a:t>Consumer&lt;T&gt;</a:t>
+            </a:r>
+          </a:p>
+        </p:txBody>
+      </p:sp>
+      <p:sp>
+        <p:nvSpPr>
+          <p:cNvPr id="19" name="TextBox 18">
+            <a:extLst>
+              <a:ext uri="{FF2B5EF4-FFF2-40B4-BE49-F238E27FC236}">
+                <a16:creationId xmlns:a16="http://schemas.microsoft.com/office/drawing/2014/main" id="{65E657F1-F22D-63A8-D735-A631F29D30EC}"/>
+              </a:ext>
+            </a:extLst>
+          </p:cNvPr>
+          <p:cNvSpPr txBox="1"/>
+          <p:nvPr/>
+        </p:nvSpPr>
+        <p:spPr>
+          <a:xfrm>
+            <a:off x="6951035" y="2738096"/>
+            <a:ext cx="1350050" cy="369332"/>
+          </a:xfrm>
+          <a:prstGeom prst="rect">
+            <a:avLst/>
+          </a:prstGeom>
+          <a:noFill/>
+        </p:spPr>
+        <p:txBody>
+          <a:bodyPr wrap="none" rtlCol="0">
+            <a:spAutoFit/>
+          </a:bodyPr>
+          <a:lstStyle/>
+          <a:p>
+            <a:r>
+              <a:rPr lang="en-US" dirty="0"/>
+              <a:t>Supplier&lt;T&gt;</a:t>
+            </a:r>
+          </a:p>
+        </p:txBody>
+      </p:sp>
+    </p:spTree>
+    <p:extLst>
+      <p:ext uri="{BB962C8B-B14F-4D97-AF65-F5344CB8AC3E}">
+        <p14:creationId xmlns:p14="http://schemas.microsoft.com/office/powerpoint/2010/main" val="254353692"/>
+      </p:ext>
+    </p:extLst>
+  </p:cSld>
+  <p:clrMapOvr>
+    <a:masterClrMapping/>
+  </p:clrMapOvr>
+</p:sld>
+</file>
+
+<file path=ppt/slides/slide21.xml><?xml version="1.0" encoding="utf-8"?>
+<p:sld xmlns:a="http://schemas.openxmlformats.org/drawingml/2006/main" xmlns:r="http://schemas.openxmlformats.org/officeDocument/2006/relationships" xmlns:p="http://schemas.openxmlformats.org/presentationml/2006/main">
+  <p:cSld>
+    <p:spTree>
+      <p:nvGrpSpPr>
+        <p:cNvPr id="1" name=""/>
+        <p:cNvGrpSpPr/>
+        <p:nvPr/>
+      </p:nvGrpSpPr>
+      <p:grpSpPr>
+        <a:xfrm>
+          <a:off x="0" y="0"/>
+          <a:ext cx="0" cy="0"/>
+          <a:chOff x="0" y="0"/>
+          <a:chExt cx="0" cy="0"/>
+        </a:xfrm>
+      </p:grpSpPr>
+      <p:sp>
+        <p:nvSpPr>
+          <p:cNvPr id="2" name="Title 1">
+            <a:extLst>
+              <a:ext uri="{FF2B5EF4-FFF2-40B4-BE49-F238E27FC236}">
                 <a16:creationId xmlns:a16="http://schemas.microsoft.com/office/drawing/2014/main" id="{59542437-ADD0-31B0-A258-34951065D283}"/>
               </a:ext>
             </a:extLst>
@@ -6469,7 +9028,7 @@
 </p:sld>
 </file>
 
-<file path=ppt/slides/slide19.xml><?xml version="1.0" encoding="utf-8"?>
+<file path=ppt/slides/slide22.xml><?xml version="1.0" encoding="utf-8"?>
 <p:sld xmlns:a="http://schemas.openxmlformats.org/drawingml/2006/main" xmlns:r="http://schemas.openxmlformats.org/officeDocument/2006/relationships" xmlns:p="http://schemas.openxmlformats.org/presentationml/2006/main">
   <p:cSld>
     <p:spTree>
@@ -6597,823 +9156,6 @@
 </p:sld>
 </file>
 
-<file path=ppt/slides/slide2.xml><?xml version="1.0" encoding="utf-8"?>
-<p:sld xmlns:a="http://schemas.openxmlformats.org/drawingml/2006/main" xmlns:r="http://schemas.openxmlformats.org/officeDocument/2006/relationships" xmlns:p="http://schemas.openxmlformats.org/presentationml/2006/main">
-  <p:cSld>
-    <p:spTree>
-      <p:nvGrpSpPr>
-        <p:cNvPr id="1" name=""/>
-        <p:cNvGrpSpPr/>
-        <p:nvPr/>
-      </p:nvGrpSpPr>
-      <p:grpSpPr>
-        <a:xfrm>
-          <a:off x="0" y="0"/>
-          <a:ext cx="0" cy="0"/>
-          <a:chOff x="0" y="0"/>
-          <a:chExt cx="0" cy="0"/>
-        </a:xfrm>
-      </p:grpSpPr>
-      <p:sp>
-        <p:nvSpPr>
-          <p:cNvPr id="2" name="Title 1">
-            <a:extLst>
-              <a:ext uri="{FF2B5EF4-FFF2-40B4-BE49-F238E27FC236}">
-                <a16:creationId xmlns:a16="http://schemas.microsoft.com/office/drawing/2014/main" id="{752895A1-89DB-DC66-DF51-D24A37948F14}"/>
-              </a:ext>
-            </a:extLst>
-          </p:cNvPr>
-          <p:cNvSpPr>
-            <a:spLocks noGrp="1"/>
-          </p:cNvSpPr>
-          <p:nvPr>
-            <p:ph type="title"/>
-          </p:nvPr>
-        </p:nvSpPr>
-        <p:spPr/>
-        <p:txBody>
-          <a:bodyPr/>
-          <a:lstStyle/>
-          <a:p>
-            <a:r>
-              <a:rPr lang="en-US" dirty="0"/>
-              <a:t>Collections</a:t>
-            </a:r>
-          </a:p>
-        </p:txBody>
-      </p:sp>
-      <p:sp>
-        <p:nvSpPr>
-          <p:cNvPr id="3" name="Content Placeholder 2">
-            <a:extLst>
-              <a:ext uri="{FF2B5EF4-FFF2-40B4-BE49-F238E27FC236}">
-                <a16:creationId xmlns:a16="http://schemas.microsoft.com/office/drawing/2014/main" id="{3BE966C1-50DB-8A0E-76D8-AEE1C3245759}"/>
-              </a:ext>
-            </a:extLst>
-          </p:cNvPr>
-          <p:cNvSpPr>
-            <a:spLocks noGrp="1"/>
-          </p:cNvSpPr>
-          <p:nvPr>
-            <p:ph idx="1"/>
-          </p:nvPr>
-        </p:nvSpPr>
-        <p:spPr>
-          <a:xfrm>
-            <a:off x="581192" y="2180496"/>
-            <a:ext cx="11029615" cy="1609961"/>
-          </a:xfrm>
-        </p:spPr>
-        <p:txBody>
-          <a:bodyPr>
-            <a:normAutofit fontScale="85000" lnSpcReduction="20000"/>
-          </a:bodyPr>
-          <a:lstStyle/>
-          <a:p>
-            <a:r>
-              <a:rPr lang="en-US" dirty="0"/>
-              <a:t>A collection is an object that stores multiple objects together</a:t>
-            </a:r>
-          </a:p>
-          <a:p>
-            <a:r>
-              <a:rPr lang="en-US" dirty="0"/>
-              <a:t>Collections are accompanied by ‘Generics’ – which tell Java the datatype the collection stores i.e. List&lt;Integer&gt;</a:t>
-            </a:r>
-          </a:p>
-          <a:p>
-            <a:r>
-              <a:rPr lang="en-US" dirty="0"/>
-              <a:t>Why not List&lt;int&gt;?  </a:t>
-            </a:r>
-          </a:p>
-          <a:p>
-            <a:pPr lvl="1"/>
-            <a:r>
-              <a:rPr lang="en-US" dirty="0"/>
-              <a:t>That’s because collections store objects, not primitive types</a:t>
-            </a:r>
-          </a:p>
-          <a:p>
-            <a:pPr lvl="1"/>
-            <a:r>
-              <a:rPr lang="en-US" dirty="0"/>
-              <a:t>Wrapper classes are provided such as: Integer, Long, Double, Boolean, etc. </a:t>
-            </a:r>
-          </a:p>
-          <a:p>
-            <a:endParaRPr lang="en-US" dirty="0"/>
-          </a:p>
-        </p:txBody>
-      </p:sp>
-      <p:sp>
-        <p:nvSpPr>
-          <p:cNvPr id="5" name="TextBox 4">
-            <a:extLst>
-              <a:ext uri="{FF2B5EF4-FFF2-40B4-BE49-F238E27FC236}">
-                <a16:creationId xmlns:a16="http://schemas.microsoft.com/office/drawing/2014/main" id="{8128ED45-BB3E-82C7-BD6F-363E4704F3B9}"/>
-              </a:ext>
-            </a:extLst>
-          </p:cNvPr>
-          <p:cNvSpPr txBox="1"/>
-          <p:nvPr/>
-        </p:nvSpPr>
-        <p:spPr>
-          <a:xfrm>
-            <a:off x="1013043" y="4338935"/>
-            <a:ext cx="3446223" cy="923330"/>
-          </a:xfrm>
-          <a:prstGeom prst="rect">
-            <a:avLst/>
-          </a:prstGeom>
-          <a:noFill/>
-        </p:spPr>
-        <p:txBody>
-          <a:bodyPr wrap="square">
-            <a:spAutoFit/>
-          </a:bodyPr>
-          <a:lstStyle/>
-          <a:p>
-            <a:r>
-              <a:rPr lang="en-US" dirty="0"/>
-              <a:t>String student1 = "Alice";</a:t>
-            </a:r>
-          </a:p>
-          <a:p>
-            <a:r>
-              <a:rPr lang="en-US" dirty="0"/>
-              <a:t>String student2 = "Bob";</a:t>
-            </a:r>
-          </a:p>
-          <a:p>
-            <a:r>
-              <a:rPr lang="en-US" dirty="0"/>
-              <a:t>String student3 = "Charlie";</a:t>
-            </a:r>
-          </a:p>
-        </p:txBody>
-      </p:sp>
-      <p:sp>
-        <p:nvSpPr>
-          <p:cNvPr id="7" name="TextBox 6">
-            <a:extLst>
-              <a:ext uri="{FF2B5EF4-FFF2-40B4-BE49-F238E27FC236}">
-                <a16:creationId xmlns:a16="http://schemas.microsoft.com/office/drawing/2014/main" id="{D9A4EA57-F018-8E2B-1AC2-26DDDB8067CE}"/>
-              </a:ext>
-            </a:extLst>
-          </p:cNvPr>
-          <p:cNvSpPr txBox="1"/>
-          <p:nvPr/>
-        </p:nvSpPr>
-        <p:spPr>
-          <a:xfrm>
-            <a:off x="6494743" y="4338935"/>
-            <a:ext cx="4684214" cy="1477328"/>
-          </a:xfrm>
-          <a:prstGeom prst="rect">
-            <a:avLst/>
-          </a:prstGeom>
-          <a:noFill/>
-        </p:spPr>
-        <p:txBody>
-          <a:bodyPr wrap="square">
-            <a:spAutoFit/>
-          </a:bodyPr>
-          <a:lstStyle/>
-          <a:p>
-            <a:r>
-              <a:rPr lang="en-US" dirty="0"/>
-              <a:t>List&lt;String&gt; students = new </a:t>
-            </a:r>
-            <a:r>
-              <a:rPr lang="en-US" dirty="0" err="1"/>
-              <a:t>ArrayList</a:t>
-            </a:r>
-            <a:r>
-              <a:rPr lang="en-US" dirty="0"/>
-              <a:t>&lt;&gt;();</a:t>
-            </a:r>
-          </a:p>
-          <a:p>
-            <a:endParaRPr lang="en-US" dirty="0"/>
-          </a:p>
-          <a:p>
-            <a:r>
-              <a:rPr lang="en-US" dirty="0" err="1"/>
-              <a:t>students.add</a:t>
-            </a:r>
-            <a:r>
-              <a:rPr lang="en-US" dirty="0"/>
-              <a:t>("Alice");</a:t>
-            </a:r>
-          </a:p>
-          <a:p>
-            <a:r>
-              <a:rPr lang="en-US" dirty="0" err="1"/>
-              <a:t>students.add</a:t>
-            </a:r>
-            <a:r>
-              <a:rPr lang="en-US" dirty="0"/>
-              <a:t>("Bob");</a:t>
-            </a:r>
-          </a:p>
-          <a:p>
-            <a:r>
-              <a:rPr lang="en-US" dirty="0" err="1"/>
-              <a:t>students.add</a:t>
-            </a:r>
-            <a:r>
-              <a:rPr lang="en-US" dirty="0"/>
-              <a:t>("Charlie");</a:t>
-            </a:r>
-          </a:p>
-        </p:txBody>
-      </p:sp>
-      <p:sp>
-        <p:nvSpPr>
-          <p:cNvPr id="8" name="TextBox 7">
-            <a:extLst>
-              <a:ext uri="{FF2B5EF4-FFF2-40B4-BE49-F238E27FC236}">
-                <a16:creationId xmlns:a16="http://schemas.microsoft.com/office/drawing/2014/main" id="{3063F559-58CB-7F07-6A29-9E71F561B524}"/>
-              </a:ext>
-            </a:extLst>
-          </p:cNvPr>
-          <p:cNvSpPr txBox="1"/>
-          <p:nvPr/>
-        </p:nvSpPr>
-        <p:spPr>
-          <a:xfrm>
-            <a:off x="1346548" y="3880030"/>
-            <a:ext cx="1544012" cy="369332"/>
-          </a:xfrm>
-          <a:prstGeom prst="rect">
-            <a:avLst/>
-          </a:prstGeom>
-          <a:noFill/>
-        </p:spPr>
-        <p:txBody>
-          <a:bodyPr wrap="none" rtlCol="0">
-            <a:spAutoFit/>
-          </a:bodyPr>
-          <a:lstStyle/>
-          <a:p>
-            <a:r>
-              <a:rPr lang="en-US" dirty="0"/>
-              <a:t>Instead of this:</a:t>
-            </a:r>
-          </a:p>
-        </p:txBody>
-      </p:sp>
-      <p:sp>
-        <p:nvSpPr>
-          <p:cNvPr id="10" name="TextBox 9">
-            <a:extLst>
-              <a:ext uri="{FF2B5EF4-FFF2-40B4-BE49-F238E27FC236}">
-                <a16:creationId xmlns:a16="http://schemas.microsoft.com/office/drawing/2014/main" id="{7DF3CBB3-EFE5-039F-00D3-34AADEE8EB1B}"/>
-              </a:ext>
-            </a:extLst>
-          </p:cNvPr>
-          <p:cNvSpPr txBox="1"/>
-          <p:nvPr/>
-        </p:nvSpPr>
-        <p:spPr>
-          <a:xfrm>
-            <a:off x="6494743" y="3880030"/>
-            <a:ext cx="1648336" cy="369332"/>
-          </a:xfrm>
-          <a:prstGeom prst="rect">
-            <a:avLst/>
-          </a:prstGeom>
-          <a:noFill/>
-        </p:spPr>
-        <p:txBody>
-          <a:bodyPr wrap="none" rtlCol="0">
-            <a:spAutoFit/>
-          </a:bodyPr>
-          <a:lstStyle/>
-          <a:p>
-            <a:r>
-              <a:rPr lang="en-US" dirty="0"/>
-              <a:t>We can do this:</a:t>
-            </a:r>
-          </a:p>
-        </p:txBody>
-      </p:sp>
-    </p:spTree>
-    <p:extLst>
-      <p:ext uri="{BB962C8B-B14F-4D97-AF65-F5344CB8AC3E}">
-        <p14:creationId xmlns:p14="http://schemas.microsoft.com/office/powerpoint/2010/main" val="572767474"/>
-      </p:ext>
-    </p:extLst>
-  </p:cSld>
-  <p:clrMapOvr>
-    <a:masterClrMapping/>
-  </p:clrMapOvr>
-</p:sld>
-</file>
-
-<file path=ppt/slides/slide20.xml><?xml version="1.0" encoding="utf-8"?>
-<p:sld xmlns:a="http://schemas.openxmlformats.org/drawingml/2006/main" xmlns:r="http://schemas.openxmlformats.org/officeDocument/2006/relationships" xmlns:p="http://schemas.openxmlformats.org/presentationml/2006/main">
-  <p:cSld>
-    <p:spTree>
-      <p:nvGrpSpPr>
-        <p:cNvPr id="1" name=""/>
-        <p:cNvGrpSpPr/>
-        <p:nvPr/>
-      </p:nvGrpSpPr>
-      <p:grpSpPr>
-        <a:xfrm>
-          <a:off x="0" y="0"/>
-          <a:ext cx="0" cy="0"/>
-          <a:chOff x="0" y="0"/>
-          <a:chExt cx="0" cy="0"/>
-        </a:xfrm>
-      </p:grpSpPr>
-      <p:sp>
-        <p:nvSpPr>
-          <p:cNvPr id="2" name="Title 1">
-            <a:extLst>
-              <a:ext uri="{FF2B5EF4-FFF2-40B4-BE49-F238E27FC236}">
-                <a16:creationId xmlns:a16="http://schemas.microsoft.com/office/drawing/2014/main" id="{38C47C0A-14E6-8DA1-176F-5646F37D3F8E}"/>
-              </a:ext>
-            </a:extLst>
-          </p:cNvPr>
-          <p:cNvSpPr>
-            <a:spLocks noGrp="1"/>
-          </p:cNvSpPr>
-          <p:nvPr>
-            <p:ph type="title"/>
-          </p:nvPr>
-        </p:nvSpPr>
-        <p:spPr/>
-        <p:txBody>
-          <a:bodyPr/>
-          <a:lstStyle/>
-          <a:p>
-            <a:r>
-              <a:rPr lang="en-US" dirty="0"/>
-              <a:t>Big O notation</a:t>
-            </a:r>
-          </a:p>
-        </p:txBody>
-      </p:sp>
-      <p:sp>
-        <p:nvSpPr>
-          <p:cNvPr id="3" name="Content Placeholder 2">
-            <a:extLst>
-              <a:ext uri="{FF2B5EF4-FFF2-40B4-BE49-F238E27FC236}">
-                <a16:creationId xmlns:a16="http://schemas.microsoft.com/office/drawing/2014/main" id="{BFF37CB2-D4D4-6A4D-F1D2-8BD66E87E11A}"/>
-              </a:ext>
-            </a:extLst>
-          </p:cNvPr>
-          <p:cNvSpPr>
-            <a:spLocks noGrp="1"/>
-          </p:cNvSpPr>
-          <p:nvPr>
-            <p:ph idx="1"/>
-          </p:nvPr>
-        </p:nvSpPr>
-        <p:spPr/>
-        <p:txBody>
-          <a:bodyPr/>
-          <a:lstStyle/>
-          <a:p>
-            <a:r>
-              <a:rPr lang="en-US" dirty="0"/>
-              <a:t>Big O notation is a tool to describe the efficiency and scalability of an algorithm </a:t>
-            </a:r>
-          </a:p>
-          <a:p>
-            <a:r>
-              <a:rPr lang="en-US" dirty="0"/>
-              <a:t>It measures how the execution time (Time Complexity) or memory usage (Space Complexity) of your code grows as the input size (usually denoted as ‘n’) increases </a:t>
-            </a:r>
-          </a:p>
-          <a:p>
-            <a:r>
-              <a:rPr lang="en-US" dirty="0"/>
-              <a:t>Big O doesn’t measure exact time to completion – it focuses on a worse-case scenario and how many operations are required to complete an algorithm </a:t>
-            </a:r>
-          </a:p>
-        </p:txBody>
-      </p:sp>
-    </p:spTree>
-    <p:extLst>
-      <p:ext uri="{BB962C8B-B14F-4D97-AF65-F5344CB8AC3E}">
-        <p14:creationId xmlns:p14="http://schemas.microsoft.com/office/powerpoint/2010/main" val="646298123"/>
-      </p:ext>
-    </p:extLst>
-  </p:cSld>
-  <p:clrMapOvr>
-    <a:masterClrMapping/>
-  </p:clrMapOvr>
-</p:sld>
-</file>
-
-<file path=ppt/slides/slide21.xml><?xml version="1.0" encoding="utf-8"?>
-<p:sld xmlns:a="http://schemas.openxmlformats.org/drawingml/2006/main" xmlns:r="http://schemas.openxmlformats.org/officeDocument/2006/relationships" xmlns:p="http://schemas.openxmlformats.org/presentationml/2006/main">
-  <p:cSld>
-    <p:spTree>
-      <p:nvGrpSpPr>
-        <p:cNvPr id="1" name=""/>
-        <p:cNvGrpSpPr/>
-        <p:nvPr/>
-      </p:nvGrpSpPr>
-      <p:grpSpPr>
-        <a:xfrm>
-          <a:off x="0" y="0"/>
-          <a:ext cx="0" cy="0"/>
-          <a:chOff x="0" y="0"/>
-          <a:chExt cx="0" cy="0"/>
-        </a:xfrm>
-      </p:grpSpPr>
-      <p:sp>
-        <p:nvSpPr>
-          <p:cNvPr id="2" name="Title 1">
-            <a:extLst>
-              <a:ext uri="{FF2B5EF4-FFF2-40B4-BE49-F238E27FC236}">
-                <a16:creationId xmlns:a16="http://schemas.microsoft.com/office/drawing/2014/main" id="{5CEA2683-834F-A979-2793-2D544D9CFE4F}"/>
-              </a:ext>
-            </a:extLst>
-          </p:cNvPr>
-          <p:cNvSpPr>
-            <a:spLocks noGrp="1"/>
-          </p:cNvSpPr>
-          <p:nvPr>
-            <p:ph type="title"/>
-          </p:nvPr>
-        </p:nvSpPr>
-        <p:spPr/>
-        <p:txBody>
-          <a:bodyPr/>
-          <a:lstStyle/>
-          <a:p>
-            <a:r>
-              <a:rPr lang="en-US" dirty="0"/>
-              <a:t>O(1) – constant time</a:t>
-            </a:r>
-          </a:p>
-        </p:txBody>
-      </p:sp>
-      <p:sp>
-        <p:nvSpPr>
-          <p:cNvPr id="3" name="Content Placeholder 2">
-            <a:extLst>
-              <a:ext uri="{FF2B5EF4-FFF2-40B4-BE49-F238E27FC236}">
-                <a16:creationId xmlns:a16="http://schemas.microsoft.com/office/drawing/2014/main" id="{7B8F9D09-34CC-158D-3546-765C23BC88AD}"/>
-              </a:ext>
-            </a:extLst>
-          </p:cNvPr>
-          <p:cNvSpPr>
-            <a:spLocks noGrp="1"/>
-          </p:cNvSpPr>
-          <p:nvPr>
-            <p:ph idx="1"/>
-          </p:nvPr>
-        </p:nvSpPr>
-        <p:spPr>
-          <a:xfrm>
-            <a:off x="581192" y="2180497"/>
-            <a:ext cx="11029615" cy="1248504"/>
-          </a:xfrm>
-        </p:spPr>
-        <p:txBody>
-          <a:bodyPr/>
-          <a:lstStyle/>
-          <a:p>
-            <a:r>
-              <a:rPr lang="en-US" dirty="0"/>
-              <a:t>The runtime does not change, no matter how large the output grows</a:t>
-            </a:r>
-          </a:p>
-        </p:txBody>
-      </p:sp>
-      <p:sp>
-        <p:nvSpPr>
-          <p:cNvPr id="5" name="TextBox 4">
-            <a:extLst>
-              <a:ext uri="{FF2B5EF4-FFF2-40B4-BE49-F238E27FC236}">
-                <a16:creationId xmlns:a16="http://schemas.microsoft.com/office/drawing/2014/main" id="{0956A021-5F9A-75C5-992B-1684FC7CF5E7}"/>
-              </a:ext>
-            </a:extLst>
-          </p:cNvPr>
-          <p:cNvSpPr txBox="1"/>
-          <p:nvPr/>
-        </p:nvSpPr>
-        <p:spPr>
-          <a:xfrm>
-            <a:off x="4166251" y="3698441"/>
-            <a:ext cx="3859495" cy="923330"/>
-          </a:xfrm>
-          <a:prstGeom prst="rect">
-            <a:avLst/>
-          </a:prstGeom>
-          <a:noFill/>
-        </p:spPr>
-        <p:txBody>
-          <a:bodyPr wrap="square">
-            <a:spAutoFit/>
-          </a:bodyPr>
-          <a:lstStyle/>
-          <a:p>
-            <a:r>
-              <a:rPr lang="en-US" sz="1800" b="0" u="none" strike="noStrike" dirty="0">
-                <a:effectLst/>
-                <a:latin typeface="+mn-lt"/>
-              </a:rPr>
-              <a:t>public int </a:t>
-            </a:r>
-            <a:r>
-              <a:rPr lang="en-US" sz="1800" b="0" u="none" strike="noStrike" dirty="0" err="1">
-                <a:effectLst/>
-                <a:latin typeface="+mn-lt"/>
-              </a:rPr>
-              <a:t>getFirstElement</a:t>
-            </a:r>
-            <a:r>
-              <a:rPr lang="en-US" sz="1800" b="0" u="none" strike="noStrike" dirty="0">
-                <a:effectLst/>
-                <a:latin typeface="+mn-lt"/>
-              </a:rPr>
-              <a:t>(int[] array) { </a:t>
-            </a:r>
-          </a:p>
-          <a:p>
-            <a:r>
-              <a:rPr lang="en-US" sz="1800" b="0" u="none" strike="noStrike" dirty="0">
-                <a:effectLst/>
-                <a:latin typeface="+mn-lt"/>
-              </a:rPr>
-              <a:t>	return array[0]; </a:t>
-            </a:r>
-          </a:p>
-          <a:p>
-            <a:r>
-              <a:rPr lang="en-US" sz="1800" b="0" u="none" strike="noStrike" dirty="0">
-                <a:effectLst/>
-                <a:latin typeface="+mn-lt"/>
-              </a:rPr>
-              <a:t>}</a:t>
-            </a:r>
-            <a:endParaRPr lang="en-US" dirty="0"/>
-          </a:p>
-        </p:txBody>
-      </p:sp>
-    </p:spTree>
-    <p:extLst>
-      <p:ext uri="{BB962C8B-B14F-4D97-AF65-F5344CB8AC3E}">
-        <p14:creationId xmlns:p14="http://schemas.microsoft.com/office/powerpoint/2010/main" val="4162554545"/>
-      </p:ext>
-    </p:extLst>
-  </p:cSld>
-  <p:clrMapOvr>
-    <a:masterClrMapping/>
-  </p:clrMapOvr>
-</p:sld>
-</file>
-
-<file path=ppt/slides/slide22.xml><?xml version="1.0" encoding="utf-8"?>
-<p:sld xmlns:a="http://schemas.openxmlformats.org/drawingml/2006/main" xmlns:r="http://schemas.openxmlformats.org/officeDocument/2006/relationships" xmlns:p="http://schemas.openxmlformats.org/presentationml/2006/main">
-  <p:cSld>
-    <p:spTree>
-      <p:nvGrpSpPr>
-        <p:cNvPr id="1" name=""/>
-        <p:cNvGrpSpPr/>
-        <p:nvPr/>
-      </p:nvGrpSpPr>
-      <p:grpSpPr>
-        <a:xfrm>
-          <a:off x="0" y="0"/>
-          <a:ext cx="0" cy="0"/>
-          <a:chOff x="0" y="0"/>
-          <a:chExt cx="0" cy="0"/>
-        </a:xfrm>
-      </p:grpSpPr>
-      <p:sp>
-        <p:nvSpPr>
-          <p:cNvPr id="2" name="Title 1">
-            <a:extLst>
-              <a:ext uri="{FF2B5EF4-FFF2-40B4-BE49-F238E27FC236}">
-                <a16:creationId xmlns:a16="http://schemas.microsoft.com/office/drawing/2014/main" id="{AB293939-AC54-19B8-18AB-28C94D89F331}"/>
-              </a:ext>
-            </a:extLst>
-          </p:cNvPr>
-          <p:cNvSpPr>
-            <a:spLocks noGrp="1"/>
-          </p:cNvSpPr>
-          <p:nvPr>
-            <p:ph type="title"/>
-          </p:nvPr>
-        </p:nvSpPr>
-        <p:spPr/>
-        <p:txBody>
-          <a:bodyPr/>
-          <a:lstStyle/>
-          <a:p>
-            <a:r>
-              <a:rPr lang="en-US" dirty="0"/>
-              <a:t>O(</a:t>
-            </a:r>
-            <a:r>
-              <a:rPr lang="en-US" dirty="0" err="1"/>
-              <a:t>logn</a:t>
-            </a:r>
-            <a:r>
-              <a:rPr lang="en-US" dirty="0"/>
-              <a:t>) – logarithmic Time</a:t>
-            </a:r>
-          </a:p>
-        </p:txBody>
-      </p:sp>
-      <p:sp>
-        <p:nvSpPr>
-          <p:cNvPr id="3" name="Content Placeholder 2">
-            <a:extLst>
-              <a:ext uri="{FF2B5EF4-FFF2-40B4-BE49-F238E27FC236}">
-                <a16:creationId xmlns:a16="http://schemas.microsoft.com/office/drawing/2014/main" id="{5E7A09AC-3791-528D-5872-EE2F43EC71B9}"/>
-              </a:ext>
-            </a:extLst>
-          </p:cNvPr>
-          <p:cNvSpPr>
-            <a:spLocks noGrp="1"/>
-          </p:cNvSpPr>
-          <p:nvPr>
-            <p:ph idx="1"/>
-          </p:nvPr>
-        </p:nvSpPr>
-        <p:spPr>
-          <a:xfrm>
-            <a:off x="581192" y="1966626"/>
-            <a:ext cx="11029615" cy="701418"/>
-          </a:xfrm>
-        </p:spPr>
-        <p:txBody>
-          <a:bodyPr>
-            <a:normAutofit fontScale="92500" lnSpcReduction="10000"/>
-          </a:bodyPr>
-          <a:lstStyle/>
-          <a:p>
-            <a:r>
-              <a:rPr lang="en-US" dirty="0"/>
-              <a:t>The problem is cut in half with each step</a:t>
-            </a:r>
-          </a:p>
-          <a:p>
-            <a:r>
-              <a:rPr lang="en-US" dirty="0"/>
-              <a:t>Such as with a binary search on a sorted array</a:t>
-            </a:r>
-          </a:p>
-        </p:txBody>
-      </p:sp>
-      <p:sp>
-        <p:nvSpPr>
-          <p:cNvPr id="5" name="TextBox 4">
-            <a:extLst>
-              <a:ext uri="{FF2B5EF4-FFF2-40B4-BE49-F238E27FC236}">
-                <a16:creationId xmlns:a16="http://schemas.microsoft.com/office/drawing/2014/main" id="{B29ACAC8-72CC-9B24-B0EF-6B7D7843682C}"/>
-              </a:ext>
-            </a:extLst>
-          </p:cNvPr>
-          <p:cNvSpPr txBox="1"/>
-          <p:nvPr/>
-        </p:nvSpPr>
-        <p:spPr>
-          <a:xfrm>
-            <a:off x="3361672" y="2886474"/>
-            <a:ext cx="6097044" cy="3139321"/>
-          </a:xfrm>
-          <a:prstGeom prst="rect">
-            <a:avLst/>
-          </a:prstGeom>
-          <a:noFill/>
-        </p:spPr>
-        <p:txBody>
-          <a:bodyPr wrap="square">
-            <a:spAutoFit/>
-          </a:bodyPr>
-          <a:lstStyle/>
-          <a:p>
-            <a:r>
-              <a:rPr lang="en-US" dirty="0"/>
-              <a:t>public int </a:t>
-            </a:r>
-            <a:r>
-              <a:rPr lang="en-US" dirty="0" err="1"/>
-              <a:t>binarySearch</a:t>
-            </a:r>
-            <a:r>
-              <a:rPr lang="en-US" dirty="0"/>
-              <a:t>(int[] </a:t>
-            </a:r>
-            <a:r>
-              <a:rPr lang="en-US" dirty="0" err="1"/>
-              <a:t>sortedArray</a:t>
-            </a:r>
-            <a:r>
-              <a:rPr lang="en-US" dirty="0"/>
-              <a:t>, int target) {</a:t>
-            </a:r>
-          </a:p>
-          <a:p>
-            <a:r>
-              <a:rPr lang="en-US" dirty="0"/>
-              <a:t>    int left = 0;</a:t>
-            </a:r>
-          </a:p>
-          <a:p>
-            <a:r>
-              <a:rPr lang="en-US" dirty="0"/>
-              <a:t>    int right = </a:t>
-            </a:r>
-            <a:r>
-              <a:rPr lang="en-US" dirty="0" err="1"/>
-              <a:t>sortedArray.length</a:t>
-            </a:r>
-            <a:r>
-              <a:rPr lang="en-US" dirty="0"/>
-              <a:t> - 1;</a:t>
-            </a:r>
-          </a:p>
-          <a:p>
-            <a:r>
-              <a:rPr lang="en-US" dirty="0"/>
-              <a:t>    while (left &lt;= right) {</a:t>
-            </a:r>
-          </a:p>
-          <a:p>
-            <a:r>
-              <a:rPr lang="en-US" dirty="0"/>
-              <a:t>        int mid = left + (right - left) / 2;</a:t>
-            </a:r>
-          </a:p>
-          <a:p>
-            <a:r>
-              <a:rPr lang="en-US" dirty="0"/>
-              <a:t>        if (</a:t>
-            </a:r>
-            <a:r>
-              <a:rPr lang="en-US" dirty="0" err="1"/>
-              <a:t>sortedArray</a:t>
-            </a:r>
-            <a:r>
-              <a:rPr lang="en-US" dirty="0"/>
-              <a:t>[mid] == target) return mid;</a:t>
-            </a:r>
-          </a:p>
-          <a:p>
-            <a:r>
-              <a:rPr lang="en-US" dirty="0"/>
-              <a:t>        if (</a:t>
-            </a:r>
-            <a:r>
-              <a:rPr lang="en-US" dirty="0" err="1"/>
-              <a:t>sortedArray</a:t>
-            </a:r>
-            <a:r>
-              <a:rPr lang="en-US" dirty="0"/>
-              <a:t>[mid] &lt; target) left = mid + 1;</a:t>
-            </a:r>
-          </a:p>
-          <a:p>
-            <a:r>
-              <a:rPr lang="en-US" dirty="0"/>
-              <a:t>        else right = mid - 1;</a:t>
-            </a:r>
-          </a:p>
-          <a:p>
-            <a:r>
-              <a:rPr lang="en-US" dirty="0"/>
-              <a:t>    }</a:t>
-            </a:r>
-          </a:p>
-          <a:p>
-            <a:r>
-              <a:rPr lang="en-US" dirty="0"/>
-              <a:t>    return -1; // Halves the search space each iteration</a:t>
-            </a:r>
-          </a:p>
-          <a:p>
-            <a:r>
-              <a:rPr lang="en-US" dirty="0"/>
-              <a:t>}</a:t>
-            </a:r>
-          </a:p>
-        </p:txBody>
-      </p:sp>
-    </p:spTree>
-    <p:extLst>
-      <p:ext uri="{BB962C8B-B14F-4D97-AF65-F5344CB8AC3E}">
-        <p14:creationId xmlns:p14="http://schemas.microsoft.com/office/powerpoint/2010/main" val="2978572491"/>
-      </p:ext>
-    </p:extLst>
-  </p:cSld>
-  <p:clrMapOvr>
-    <a:masterClrMapping/>
-  </p:clrMapOvr>
-</p:sld>
-</file>
-
 <file path=ppt/slides/slide23.xml><?xml version="1.0" encoding="utf-8"?>
 <p:sld xmlns:a="http://schemas.openxmlformats.org/drawingml/2006/main" xmlns:r="http://schemas.openxmlformats.org/officeDocument/2006/relationships" xmlns:p="http://schemas.openxmlformats.org/presentationml/2006/main">
   <p:cSld>
@@ -7436,7 +9178,7 @@
           <p:cNvPr id="2" name="Title 1">
             <a:extLst>
               <a:ext uri="{FF2B5EF4-FFF2-40B4-BE49-F238E27FC236}">
-                <a16:creationId xmlns:a16="http://schemas.microsoft.com/office/drawing/2014/main" id="{4F32E8DF-2916-8082-2E23-B0F3F46D69A5}"/>
+                <a16:creationId xmlns:a16="http://schemas.microsoft.com/office/drawing/2014/main" id="{38C47C0A-14E6-8DA1-176F-5646F37D3F8E}"/>
               </a:ext>
             </a:extLst>
           </p:cNvPr>
@@ -7454,7 +9196,7 @@
           <a:p>
             <a:r>
               <a:rPr lang="en-US" dirty="0"/>
-              <a:t>O(n) – linear time</a:t>
+              <a:t>Big O notation</a:t>
             </a:r>
           </a:p>
         </p:txBody>
@@ -7464,7 +9206,7 @@
           <p:cNvPr id="3" name="Content Placeholder 2">
             <a:extLst>
               <a:ext uri="{FF2B5EF4-FFF2-40B4-BE49-F238E27FC236}">
-                <a16:creationId xmlns:a16="http://schemas.microsoft.com/office/drawing/2014/main" id="{53AC3875-7E35-A465-CA38-1C6424618CAB}"/>
+                <a16:creationId xmlns:a16="http://schemas.microsoft.com/office/drawing/2014/main" id="{BFF37CB2-D4D4-6A4D-F1D2-8BD66E87E11A}"/>
               </a:ext>
             </a:extLst>
           </p:cNvPr>
@@ -7475,148 +9217,34 @@
             <p:ph idx="1"/>
           </p:nvPr>
         </p:nvSpPr>
-        <p:spPr>
-          <a:xfrm>
-            <a:off x="581192" y="2180497"/>
-            <a:ext cx="11029615" cy="763120"/>
-          </a:xfrm>
-        </p:spPr>
-        <p:txBody>
-          <a:bodyPr>
-            <a:normAutofit lnSpcReduction="10000"/>
-          </a:bodyPr>
+        <p:spPr/>
+        <p:txBody>
+          <a:bodyPr/>
           <a:lstStyle/>
           <a:p>
             <a:r>
               <a:rPr lang="en-US" dirty="0"/>
-              <a:t>The execution time grows proportionally with the input size</a:t>
-            </a:r>
-          </a:p>
-          <a:p>
-            <a:r>
-              <a:rPr lang="en-US" dirty="0"/>
-              <a:t>If your data doubles, the time doubles</a:t>
-            </a:r>
-          </a:p>
-        </p:txBody>
-      </p:sp>
-      <p:sp>
-        <p:nvSpPr>
-          <p:cNvPr id="5" name="TextBox 4">
-            <a:extLst>
-              <a:ext uri="{FF2B5EF4-FFF2-40B4-BE49-F238E27FC236}">
-                <a16:creationId xmlns:a16="http://schemas.microsoft.com/office/drawing/2014/main" id="{AF7C35C2-DC24-AFBF-8918-BAE23404F501}"/>
-              </a:ext>
-            </a:extLst>
-          </p:cNvPr>
-          <p:cNvSpPr txBox="1"/>
-          <p:nvPr/>
-        </p:nvSpPr>
-        <p:spPr>
-          <a:xfrm>
-            <a:off x="3047478" y="3278246"/>
-            <a:ext cx="6097044" cy="1754326"/>
-          </a:xfrm>
-          <a:prstGeom prst="rect">
-            <a:avLst/>
-          </a:prstGeom>
-          <a:noFill/>
-        </p:spPr>
-        <p:txBody>
-          <a:bodyPr wrap="square">
-            <a:spAutoFit/>
-          </a:bodyPr>
-          <a:lstStyle/>
-          <a:p>
-            <a:r>
-              <a:rPr lang="en-US" sz="1800" b="0" u="none" strike="noStrike" dirty="0">
-                <a:effectLst/>
-                <a:latin typeface="+mn-lt"/>
-              </a:rPr>
-              <a:t>// A simple loop visiting every item in an array is O(n) </a:t>
-            </a:r>
-          </a:p>
-          <a:p>
-            <a:r>
-              <a:rPr lang="en-US" sz="1800" b="0" u="none" strike="noStrike" dirty="0">
-                <a:effectLst/>
-                <a:latin typeface="+mn-lt"/>
-              </a:rPr>
-              <a:t>public void </a:t>
-            </a:r>
-            <a:r>
-              <a:rPr lang="en-US" sz="1800" b="0" u="none" strike="noStrike" dirty="0" err="1">
-                <a:effectLst/>
-                <a:latin typeface="+mn-lt"/>
-              </a:rPr>
-              <a:t>printAllItems</a:t>
-            </a:r>
-            <a:r>
-              <a:rPr lang="en-US" sz="1800" b="0" u="none" strike="noStrike" dirty="0">
-                <a:effectLst/>
-                <a:latin typeface="+mn-lt"/>
-              </a:rPr>
-              <a:t>(int[] array) { </a:t>
-            </a:r>
-          </a:p>
-          <a:p>
-            <a:r>
-              <a:rPr lang="en-US" dirty="0"/>
-              <a:t>	</a:t>
-            </a:r>
-            <a:r>
-              <a:rPr lang="en-US" sz="1800" b="0" u="none" strike="noStrike" dirty="0">
-                <a:effectLst/>
-                <a:latin typeface="+mn-lt"/>
-              </a:rPr>
-              <a:t>for (int item : array) { </a:t>
-            </a:r>
-          </a:p>
-          <a:p>
-            <a:r>
-              <a:rPr lang="en-US" dirty="0"/>
-              <a:t>		</a:t>
-            </a:r>
-            <a:r>
-              <a:rPr lang="en-US" sz="1800" b="0" u="none" strike="noStrike" dirty="0" err="1">
-                <a:effectLst/>
-                <a:latin typeface="+mn-lt"/>
-              </a:rPr>
-              <a:t>System.out.println</a:t>
-            </a:r>
-            <a:r>
-              <a:rPr lang="en-US" sz="1800" b="0" u="none" strike="noStrike" dirty="0">
-                <a:effectLst/>
-                <a:latin typeface="+mn-lt"/>
-              </a:rPr>
-              <a:t>(item); </a:t>
-            </a:r>
-          </a:p>
-          <a:p>
-            <a:r>
-              <a:rPr lang="en-US" sz="1800" b="0" u="none" strike="noStrike" dirty="0">
-                <a:effectLst/>
-                <a:latin typeface="+mn-lt"/>
-              </a:rPr>
-              <a:t>	} </a:t>
-            </a:r>
-          </a:p>
-          <a:p>
-            <a:r>
-              <a:rPr lang="en-US" sz="1800" b="0" u="none" strike="noStrike" dirty="0">
-                <a:effectLst/>
-                <a:latin typeface="+mn-lt"/>
-              </a:rPr>
-              <a:t>}</a:t>
-            </a:r>
-            <a:endParaRPr lang="en-US" dirty="0"/>
+              <a:t>Big O notation is a tool to describe the efficiency and scalability of an algorithm </a:t>
+            </a:r>
+          </a:p>
+          <a:p>
+            <a:r>
+              <a:rPr lang="en-US" dirty="0"/>
+              <a:t>It measures how the execution time (Time Complexity) or memory usage (Space Complexity) of your code grows as the input size (usually denoted as ‘n’) increases </a:t>
+            </a:r>
+          </a:p>
+          <a:p>
+            <a:r>
+              <a:rPr lang="en-US" dirty="0"/>
+              <a:t>Big O doesn’t measure exact time to completion – it focuses on a worse-case scenario and how many operations are required to complete an algorithm </a:t>
+            </a:r>
           </a:p>
         </p:txBody>
       </p:sp>
     </p:spTree>
     <p:extLst>
       <p:ext uri="{BB962C8B-B14F-4D97-AF65-F5344CB8AC3E}">
-        <p14:creationId xmlns:p14="http://schemas.microsoft.com/office/powerpoint/2010/main" val="1573060006"/>
+        <p14:creationId xmlns:p14="http://schemas.microsoft.com/office/powerpoint/2010/main" val="646298123"/>
       </p:ext>
     </p:extLst>
   </p:cSld>
@@ -7648,6 +9276,622 @@
           <p:cNvPr id="2" name="Title 1">
             <a:extLst>
               <a:ext uri="{FF2B5EF4-FFF2-40B4-BE49-F238E27FC236}">
+                <a16:creationId xmlns:a16="http://schemas.microsoft.com/office/drawing/2014/main" id="{5CEA2683-834F-A979-2793-2D544D9CFE4F}"/>
+              </a:ext>
+            </a:extLst>
+          </p:cNvPr>
+          <p:cNvSpPr>
+            <a:spLocks noGrp="1"/>
+          </p:cNvSpPr>
+          <p:nvPr>
+            <p:ph type="title"/>
+          </p:nvPr>
+        </p:nvSpPr>
+        <p:spPr/>
+        <p:txBody>
+          <a:bodyPr/>
+          <a:lstStyle/>
+          <a:p>
+            <a:r>
+              <a:rPr lang="en-US" dirty="0"/>
+              <a:t>O(1) – constant time</a:t>
+            </a:r>
+          </a:p>
+        </p:txBody>
+      </p:sp>
+      <p:sp>
+        <p:nvSpPr>
+          <p:cNvPr id="3" name="Content Placeholder 2">
+            <a:extLst>
+              <a:ext uri="{FF2B5EF4-FFF2-40B4-BE49-F238E27FC236}">
+                <a16:creationId xmlns:a16="http://schemas.microsoft.com/office/drawing/2014/main" id="{7B8F9D09-34CC-158D-3546-765C23BC88AD}"/>
+              </a:ext>
+            </a:extLst>
+          </p:cNvPr>
+          <p:cNvSpPr>
+            <a:spLocks noGrp="1"/>
+          </p:cNvSpPr>
+          <p:nvPr>
+            <p:ph idx="1"/>
+          </p:nvPr>
+        </p:nvSpPr>
+        <p:spPr>
+          <a:xfrm>
+            <a:off x="581192" y="2180497"/>
+            <a:ext cx="11029615" cy="1248504"/>
+          </a:xfrm>
+        </p:spPr>
+        <p:txBody>
+          <a:bodyPr/>
+          <a:lstStyle/>
+          <a:p>
+            <a:r>
+              <a:rPr lang="en-US" dirty="0"/>
+              <a:t>The runtime does not change, no matter how large the output grows</a:t>
+            </a:r>
+          </a:p>
+        </p:txBody>
+      </p:sp>
+      <p:sp>
+        <p:nvSpPr>
+          <p:cNvPr id="5" name="TextBox 4">
+            <a:extLst>
+              <a:ext uri="{FF2B5EF4-FFF2-40B4-BE49-F238E27FC236}">
+                <a16:creationId xmlns:a16="http://schemas.microsoft.com/office/drawing/2014/main" id="{0956A021-5F9A-75C5-992B-1684FC7CF5E7}"/>
+              </a:ext>
+            </a:extLst>
+          </p:cNvPr>
+          <p:cNvSpPr txBox="1"/>
+          <p:nvPr/>
+        </p:nvSpPr>
+        <p:spPr>
+          <a:xfrm>
+            <a:off x="4166251" y="3698441"/>
+            <a:ext cx="3859495" cy="923330"/>
+          </a:xfrm>
+          <a:prstGeom prst="rect">
+            <a:avLst/>
+          </a:prstGeom>
+          <a:noFill/>
+        </p:spPr>
+        <p:txBody>
+          <a:bodyPr wrap="square">
+            <a:spAutoFit/>
+          </a:bodyPr>
+          <a:lstStyle/>
+          <a:p>
+            <a:r>
+              <a:rPr lang="en-US" sz="1800" b="0" u="none" strike="noStrike" dirty="0">
+                <a:effectLst/>
+                <a:latin typeface="+mn-lt"/>
+              </a:rPr>
+              <a:t>public int </a:t>
+            </a:r>
+            <a:r>
+              <a:rPr lang="en-US" sz="1800" b="0" u="none" strike="noStrike" dirty="0" err="1">
+                <a:effectLst/>
+                <a:latin typeface="+mn-lt"/>
+              </a:rPr>
+              <a:t>getFirstElement</a:t>
+            </a:r>
+            <a:r>
+              <a:rPr lang="en-US" sz="1800" b="0" u="none" strike="noStrike" dirty="0">
+                <a:effectLst/>
+                <a:latin typeface="+mn-lt"/>
+              </a:rPr>
+              <a:t>(int[] array) { </a:t>
+            </a:r>
+          </a:p>
+          <a:p>
+            <a:r>
+              <a:rPr lang="en-US" sz="1800" b="0" u="none" strike="noStrike" dirty="0">
+                <a:effectLst/>
+                <a:latin typeface="+mn-lt"/>
+              </a:rPr>
+              <a:t>	return array[0]; </a:t>
+            </a:r>
+          </a:p>
+          <a:p>
+            <a:r>
+              <a:rPr lang="en-US" sz="1800" b="0" u="none" strike="noStrike" dirty="0">
+                <a:effectLst/>
+                <a:latin typeface="+mn-lt"/>
+              </a:rPr>
+              <a:t>}</a:t>
+            </a:r>
+            <a:endParaRPr lang="en-US" dirty="0"/>
+          </a:p>
+        </p:txBody>
+      </p:sp>
+    </p:spTree>
+    <p:extLst>
+      <p:ext uri="{BB962C8B-B14F-4D97-AF65-F5344CB8AC3E}">
+        <p14:creationId xmlns:p14="http://schemas.microsoft.com/office/powerpoint/2010/main" val="4162554545"/>
+      </p:ext>
+    </p:extLst>
+  </p:cSld>
+  <p:clrMapOvr>
+    <a:masterClrMapping/>
+  </p:clrMapOvr>
+</p:sld>
+</file>
+
+<file path=ppt/slides/slide25.xml><?xml version="1.0" encoding="utf-8"?>
+<p:sld xmlns:a="http://schemas.openxmlformats.org/drawingml/2006/main" xmlns:r="http://schemas.openxmlformats.org/officeDocument/2006/relationships" xmlns:p="http://schemas.openxmlformats.org/presentationml/2006/main">
+  <p:cSld>
+    <p:spTree>
+      <p:nvGrpSpPr>
+        <p:cNvPr id="1" name=""/>
+        <p:cNvGrpSpPr/>
+        <p:nvPr/>
+      </p:nvGrpSpPr>
+      <p:grpSpPr>
+        <a:xfrm>
+          <a:off x="0" y="0"/>
+          <a:ext cx="0" cy="0"/>
+          <a:chOff x="0" y="0"/>
+          <a:chExt cx="0" cy="0"/>
+        </a:xfrm>
+      </p:grpSpPr>
+      <p:sp>
+        <p:nvSpPr>
+          <p:cNvPr id="2" name="Title 1">
+            <a:extLst>
+              <a:ext uri="{FF2B5EF4-FFF2-40B4-BE49-F238E27FC236}">
+                <a16:creationId xmlns:a16="http://schemas.microsoft.com/office/drawing/2014/main" id="{AB293939-AC54-19B8-18AB-28C94D89F331}"/>
+              </a:ext>
+            </a:extLst>
+          </p:cNvPr>
+          <p:cNvSpPr>
+            <a:spLocks noGrp="1"/>
+          </p:cNvSpPr>
+          <p:nvPr>
+            <p:ph type="title"/>
+          </p:nvPr>
+        </p:nvSpPr>
+        <p:spPr/>
+        <p:txBody>
+          <a:bodyPr/>
+          <a:lstStyle/>
+          <a:p>
+            <a:r>
+              <a:rPr lang="en-US" dirty="0"/>
+              <a:t>O(</a:t>
+            </a:r>
+            <a:r>
+              <a:rPr lang="en-US" dirty="0" err="1"/>
+              <a:t>logn</a:t>
+            </a:r>
+            <a:r>
+              <a:rPr lang="en-US" dirty="0"/>
+              <a:t>) – logarithmic Time</a:t>
+            </a:r>
+          </a:p>
+        </p:txBody>
+      </p:sp>
+      <p:sp>
+        <p:nvSpPr>
+          <p:cNvPr id="3" name="Content Placeholder 2">
+            <a:extLst>
+              <a:ext uri="{FF2B5EF4-FFF2-40B4-BE49-F238E27FC236}">
+                <a16:creationId xmlns:a16="http://schemas.microsoft.com/office/drawing/2014/main" id="{5E7A09AC-3791-528D-5872-EE2F43EC71B9}"/>
+              </a:ext>
+            </a:extLst>
+          </p:cNvPr>
+          <p:cNvSpPr>
+            <a:spLocks noGrp="1"/>
+          </p:cNvSpPr>
+          <p:nvPr>
+            <p:ph idx="1"/>
+          </p:nvPr>
+        </p:nvSpPr>
+        <p:spPr>
+          <a:xfrm>
+            <a:off x="581192" y="1966626"/>
+            <a:ext cx="11029615" cy="701418"/>
+          </a:xfrm>
+        </p:spPr>
+        <p:txBody>
+          <a:bodyPr>
+            <a:normAutofit fontScale="92500" lnSpcReduction="10000"/>
+          </a:bodyPr>
+          <a:lstStyle/>
+          <a:p>
+            <a:r>
+              <a:rPr lang="en-US" dirty="0"/>
+              <a:t>The problem is cut in half with each step</a:t>
+            </a:r>
+          </a:p>
+          <a:p>
+            <a:r>
+              <a:rPr lang="en-US" dirty="0"/>
+              <a:t>Such as with a binary search on a sorted array</a:t>
+            </a:r>
+          </a:p>
+        </p:txBody>
+      </p:sp>
+      <p:sp>
+        <p:nvSpPr>
+          <p:cNvPr id="5" name="TextBox 4">
+            <a:extLst>
+              <a:ext uri="{FF2B5EF4-FFF2-40B4-BE49-F238E27FC236}">
+                <a16:creationId xmlns:a16="http://schemas.microsoft.com/office/drawing/2014/main" id="{B29ACAC8-72CC-9B24-B0EF-6B7D7843682C}"/>
+              </a:ext>
+            </a:extLst>
+          </p:cNvPr>
+          <p:cNvSpPr txBox="1"/>
+          <p:nvPr/>
+        </p:nvSpPr>
+        <p:spPr>
+          <a:xfrm>
+            <a:off x="3361672" y="2886474"/>
+            <a:ext cx="6097044" cy="3139321"/>
+          </a:xfrm>
+          <a:prstGeom prst="rect">
+            <a:avLst/>
+          </a:prstGeom>
+          <a:noFill/>
+        </p:spPr>
+        <p:txBody>
+          <a:bodyPr wrap="square">
+            <a:spAutoFit/>
+          </a:bodyPr>
+          <a:lstStyle/>
+          <a:p>
+            <a:r>
+              <a:rPr lang="en-US" dirty="0"/>
+              <a:t>public int </a:t>
+            </a:r>
+            <a:r>
+              <a:rPr lang="en-US" dirty="0" err="1"/>
+              <a:t>binarySearch</a:t>
+            </a:r>
+            <a:r>
+              <a:rPr lang="en-US" dirty="0"/>
+              <a:t>(int[] </a:t>
+            </a:r>
+            <a:r>
+              <a:rPr lang="en-US" dirty="0" err="1"/>
+              <a:t>sortedArray</a:t>
+            </a:r>
+            <a:r>
+              <a:rPr lang="en-US" dirty="0"/>
+              <a:t>, int target) {</a:t>
+            </a:r>
+          </a:p>
+          <a:p>
+            <a:r>
+              <a:rPr lang="en-US" dirty="0"/>
+              <a:t>    int left = 0;</a:t>
+            </a:r>
+          </a:p>
+          <a:p>
+            <a:r>
+              <a:rPr lang="en-US" dirty="0"/>
+              <a:t>    int right = </a:t>
+            </a:r>
+            <a:r>
+              <a:rPr lang="en-US" dirty="0" err="1"/>
+              <a:t>sortedArray.length</a:t>
+            </a:r>
+            <a:r>
+              <a:rPr lang="en-US" dirty="0"/>
+              <a:t> - 1;</a:t>
+            </a:r>
+          </a:p>
+          <a:p>
+            <a:r>
+              <a:rPr lang="en-US" dirty="0"/>
+              <a:t>    while (left &lt;= right) {</a:t>
+            </a:r>
+          </a:p>
+          <a:p>
+            <a:r>
+              <a:rPr lang="en-US" dirty="0"/>
+              <a:t>        int mid = left + (right - left) / 2;</a:t>
+            </a:r>
+          </a:p>
+          <a:p>
+            <a:r>
+              <a:rPr lang="en-US" dirty="0"/>
+              <a:t>        if (</a:t>
+            </a:r>
+            <a:r>
+              <a:rPr lang="en-US" dirty="0" err="1"/>
+              <a:t>sortedArray</a:t>
+            </a:r>
+            <a:r>
+              <a:rPr lang="en-US" dirty="0"/>
+              <a:t>[mid] == target) return mid;</a:t>
+            </a:r>
+          </a:p>
+          <a:p>
+            <a:r>
+              <a:rPr lang="en-US" dirty="0"/>
+              <a:t>        if (</a:t>
+            </a:r>
+            <a:r>
+              <a:rPr lang="en-US" dirty="0" err="1"/>
+              <a:t>sortedArray</a:t>
+            </a:r>
+            <a:r>
+              <a:rPr lang="en-US" dirty="0"/>
+              <a:t>[mid] &lt; target) left = mid + 1;</a:t>
+            </a:r>
+          </a:p>
+          <a:p>
+            <a:r>
+              <a:rPr lang="en-US" dirty="0"/>
+              <a:t>        else right = mid - 1;</a:t>
+            </a:r>
+          </a:p>
+          <a:p>
+            <a:r>
+              <a:rPr lang="en-US" dirty="0"/>
+              <a:t>    }</a:t>
+            </a:r>
+          </a:p>
+          <a:p>
+            <a:r>
+              <a:rPr lang="en-US" dirty="0"/>
+              <a:t>    return -1; // Halves the search space each iteration</a:t>
+            </a:r>
+          </a:p>
+          <a:p>
+            <a:r>
+              <a:rPr lang="en-US" dirty="0"/>
+              <a:t>}</a:t>
+            </a:r>
+          </a:p>
+        </p:txBody>
+      </p:sp>
+    </p:spTree>
+    <p:extLst>
+      <p:ext uri="{BB962C8B-B14F-4D97-AF65-F5344CB8AC3E}">
+        <p14:creationId xmlns:p14="http://schemas.microsoft.com/office/powerpoint/2010/main" val="2978572491"/>
+      </p:ext>
+    </p:extLst>
+  </p:cSld>
+  <p:clrMapOvr>
+    <a:masterClrMapping/>
+  </p:clrMapOvr>
+</p:sld>
+</file>
+
+<file path=ppt/slides/slide26.xml><?xml version="1.0" encoding="utf-8"?>
+<p:sld xmlns:a="http://schemas.openxmlformats.org/drawingml/2006/main" xmlns:r="http://schemas.openxmlformats.org/officeDocument/2006/relationships" xmlns:p="http://schemas.openxmlformats.org/presentationml/2006/main">
+  <p:cSld>
+    <p:spTree>
+      <p:nvGrpSpPr>
+        <p:cNvPr id="1" name=""/>
+        <p:cNvGrpSpPr/>
+        <p:nvPr/>
+      </p:nvGrpSpPr>
+      <p:grpSpPr>
+        <a:xfrm>
+          <a:off x="0" y="0"/>
+          <a:ext cx="0" cy="0"/>
+          <a:chOff x="0" y="0"/>
+          <a:chExt cx="0" cy="0"/>
+        </a:xfrm>
+      </p:grpSpPr>
+      <p:sp>
+        <p:nvSpPr>
+          <p:cNvPr id="2" name="Title 1">
+            <a:extLst>
+              <a:ext uri="{FF2B5EF4-FFF2-40B4-BE49-F238E27FC236}">
+                <a16:creationId xmlns:a16="http://schemas.microsoft.com/office/drawing/2014/main" id="{4F32E8DF-2916-8082-2E23-B0F3F46D69A5}"/>
+              </a:ext>
+            </a:extLst>
+          </p:cNvPr>
+          <p:cNvSpPr>
+            <a:spLocks noGrp="1"/>
+          </p:cNvSpPr>
+          <p:nvPr>
+            <p:ph type="title"/>
+          </p:nvPr>
+        </p:nvSpPr>
+        <p:spPr/>
+        <p:txBody>
+          <a:bodyPr/>
+          <a:lstStyle/>
+          <a:p>
+            <a:r>
+              <a:rPr lang="en-US" dirty="0"/>
+              <a:t>O(n) – linear time</a:t>
+            </a:r>
+          </a:p>
+        </p:txBody>
+      </p:sp>
+      <p:sp>
+        <p:nvSpPr>
+          <p:cNvPr id="3" name="Content Placeholder 2">
+            <a:extLst>
+              <a:ext uri="{FF2B5EF4-FFF2-40B4-BE49-F238E27FC236}">
+                <a16:creationId xmlns:a16="http://schemas.microsoft.com/office/drawing/2014/main" id="{53AC3875-7E35-A465-CA38-1C6424618CAB}"/>
+              </a:ext>
+            </a:extLst>
+          </p:cNvPr>
+          <p:cNvSpPr>
+            <a:spLocks noGrp="1"/>
+          </p:cNvSpPr>
+          <p:nvPr>
+            <p:ph idx="1"/>
+          </p:nvPr>
+        </p:nvSpPr>
+        <p:spPr>
+          <a:xfrm>
+            <a:off x="581192" y="2180497"/>
+            <a:ext cx="11029615" cy="763120"/>
+          </a:xfrm>
+        </p:spPr>
+        <p:txBody>
+          <a:bodyPr>
+            <a:normAutofit lnSpcReduction="10000"/>
+          </a:bodyPr>
+          <a:lstStyle/>
+          <a:p>
+            <a:r>
+              <a:rPr lang="en-US" dirty="0"/>
+              <a:t>The execution time grows proportionally with the input size</a:t>
+            </a:r>
+          </a:p>
+          <a:p>
+            <a:r>
+              <a:rPr lang="en-US" dirty="0"/>
+              <a:t>If your data doubles, the time doubles</a:t>
+            </a:r>
+          </a:p>
+        </p:txBody>
+      </p:sp>
+      <p:sp>
+        <p:nvSpPr>
+          <p:cNvPr id="5" name="TextBox 4">
+            <a:extLst>
+              <a:ext uri="{FF2B5EF4-FFF2-40B4-BE49-F238E27FC236}">
+                <a16:creationId xmlns:a16="http://schemas.microsoft.com/office/drawing/2014/main" id="{AF7C35C2-DC24-AFBF-8918-BAE23404F501}"/>
+              </a:ext>
+            </a:extLst>
+          </p:cNvPr>
+          <p:cNvSpPr txBox="1"/>
+          <p:nvPr/>
+        </p:nvSpPr>
+        <p:spPr>
+          <a:xfrm>
+            <a:off x="3047478" y="3278246"/>
+            <a:ext cx="6097044" cy="1754326"/>
+          </a:xfrm>
+          <a:prstGeom prst="rect">
+            <a:avLst/>
+          </a:prstGeom>
+          <a:noFill/>
+        </p:spPr>
+        <p:txBody>
+          <a:bodyPr wrap="square">
+            <a:spAutoFit/>
+          </a:bodyPr>
+          <a:lstStyle/>
+          <a:p>
+            <a:r>
+              <a:rPr lang="en-US" sz="1800" b="0" u="none" strike="noStrike" dirty="0">
+                <a:effectLst/>
+                <a:latin typeface="+mn-lt"/>
+              </a:rPr>
+              <a:t>// A simple loop visiting every item in an array is O(n) </a:t>
+            </a:r>
+          </a:p>
+          <a:p>
+            <a:r>
+              <a:rPr lang="en-US" sz="1800" b="0" u="none" strike="noStrike" dirty="0">
+                <a:effectLst/>
+                <a:latin typeface="+mn-lt"/>
+              </a:rPr>
+              <a:t>public void </a:t>
+            </a:r>
+            <a:r>
+              <a:rPr lang="en-US" sz="1800" b="0" u="none" strike="noStrike" dirty="0" err="1">
+                <a:effectLst/>
+                <a:latin typeface="+mn-lt"/>
+              </a:rPr>
+              <a:t>printAllItems</a:t>
+            </a:r>
+            <a:r>
+              <a:rPr lang="en-US" sz="1800" b="0" u="none" strike="noStrike" dirty="0">
+                <a:effectLst/>
+                <a:latin typeface="+mn-lt"/>
+              </a:rPr>
+              <a:t>(int[] array) { </a:t>
+            </a:r>
+          </a:p>
+          <a:p>
+            <a:r>
+              <a:rPr lang="en-US" dirty="0"/>
+              <a:t>	</a:t>
+            </a:r>
+            <a:r>
+              <a:rPr lang="en-US" sz="1800" b="0" u="none" strike="noStrike" dirty="0">
+                <a:effectLst/>
+                <a:latin typeface="+mn-lt"/>
+              </a:rPr>
+              <a:t>for (int item : array) { </a:t>
+            </a:r>
+          </a:p>
+          <a:p>
+            <a:r>
+              <a:rPr lang="en-US" dirty="0"/>
+              <a:t>		</a:t>
+            </a:r>
+            <a:r>
+              <a:rPr lang="en-US" sz="1800" b="0" u="none" strike="noStrike" dirty="0" err="1">
+                <a:effectLst/>
+                <a:latin typeface="+mn-lt"/>
+              </a:rPr>
+              <a:t>System.out.println</a:t>
+            </a:r>
+            <a:r>
+              <a:rPr lang="en-US" sz="1800" b="0" u="none" strike="noStrike" dirty="0">
+                <a:effectLst/>
+                <a:latin typeface="+mn-lt"/>
+              </a:rPr>
+              <a:t>(item); </a:t>
+            </a:r>
+          </a:p>
+          <a:p>
+            <a:r>
+              <a:rPr lang="en-US" sz="1800" b="0" u="none" strike="noStrike" dirty="0">
+                <a:effectLst/>
+                <a:latin typeface="+mn-lt"/>
+              </a:rPr>
+              <a:t>	} </a:t>
+            </a:r>
+          </a:p>
+          <a:p>
+            <a:r>
+              <a:rPr lang="en-US" sz="1800" b="0" u="none" strike="noStrike" dirty="0">
+                <a:effectLst/>
+                <a:latin typeface="+mn-lt"/>
+              </a:rPr>
+              <a:t>}</a:t>
+            </a:r>
+            <a:endParaRPr lang="en-US" dirty="0"/>
+          </a:p>
+        </p:txBody>
+      </p:sp>
+    </p:spTree>
+    <p:extLst>
+      <p:ext uri="{BB962C8B-B14F-4D97-AF65-F5344CB8AC3E}">
+        <p14:creationId xmlns:p14="http://schemas.microsoft.com/office/powerpoint/2010/main" val="1573060006"/>
+      </p:ext>
+    </p:extLst>
+  </p:cSld>
+  <p:clrMapOvr>
+    <a:masterClrMapping/>
+  </p:clrMapOvr>
+</p:sld>
+</file>
+
+<file path=ppt/slides/slide27.xml><?xml version="1.0" encoding="utf-8"?>
+<p:sld xmlns:a="http://schemas.openxmlformats.org/drawingml/2006/main" xmlns:r="http://schemas.openxmlformats.org/officeDocument/2006/relationships" xmlns:p="http://schemas.openxmlformats.org/presentationml/2006/main">
+  <p:cSld>
+    <p:spTree>
+      <p:nvGrpSpPr>
+        <p:cNvPr id="1" name=""/>
+        <p:cNvGrpSpPr/>
+        <p:nvPr/>
+      </p:nvGrpSpPr>
+      <p:grpSpPr>
+        <a:xfrm>
+          <a:off x="0" y="0"/>
+          <a:ext cx="0" cy="0"/>
+          <a:chOff x="0" y="0"/>
+          <a:chExt cx="0" cy="0"/>
+        </a:xfrm>
+      </p:grpSpPr>
+      <p:sp>
+        <p:nvSpPr>
+          <p:cNvPr id="2" name="Title 1">
+            <a:extLst>
+              <a:ext uri="{FF2B5EF4-FFF2-40B4-BE49-F238E27FC236}">
                 <a16:creationId xmlns:a16="http://schemas.microsoft.com/office/drawing/2014/main" id="{252FA55D-7FF3-84C4-9981-46AB1337DC37}"/>
               </a:ext>
             </a:extLst>
@@ -7838,7 +10082,7 @@
 </p:sld>
 </file>
 
-<file path=ppt/slides/slide25.xml><?xml version="1.0" encoding="utf-8"?>
+<file path=ppt/slides/slide28.xml><?xml version="1.0" encoding="utf-8"?>
 <p:sld xmlns:a="http://schemas.openxmlformats.org/drawingml/2006/main" xmlns:r="http://schemas.openxmlformats.org/officeDocument/2006/relationships" xmlns:p="http://schemas.openxmlformats.org/presentationml/2006/main">
   <p:cSld>
     <p:spTree>
@@ -7967,7 +10211,7 @@
 </p:sld>
 </file>
 
-<file path=ppt/slides/slide26.xml><?xml version="1.0" encoding="utf-8"?>
+<file path=ppt/slides/slide29.xml><?xml version="1.0" encoding="utf-8"?>
 <p:sld xmlns:a="http://schemas.openxmlformats.org/drawingml/2006/main" xmlns:r="http://schemas.openxmlformats.org/officeDocument/2006/relationships" xmlns:p="http://schemas.openxmlformats.org/presentationml/2006/main">
   <p:cSld>
     <p:spTree>
@@ -8102,7 +10346,193 @@
 </p:sld>
 </file>
 
-<file path=ppt/slides/slide27.xml><?xml version="1.0" encoding="utf-8"?>
+<file path=ppt/slides/slide3.xml><?xml version="1.0" encoding="utf-8"?>
+<p:sld xmlns:a="http://schemas.openxmlformats.org/drawingml/2006/main" xmlns:r="http://schemas.openxmlformats.org/officeDocument/2006/relationships" xmlns:p="http://schemas.openxmlformats.org/presentationml/2006/main">
+  <p:cSld>
+    <p:spTree>
+      <p:nvGrpSpPr>
+        <p:cNvPr id="1" name=""/>
+        <p:cNvGrpSpPr/>
+        <p:nvPr/>
+      </p:nvGrpSpPr>
+      <p:grpSpPr>
+        <a:xfrm>
+          <a:off x="0" y="0"/>
+          <a:ext cx="0" cy="0"/>
+          <a:chOff x="0" y="0"/>
+          <a:chExt cx="0" cy="0"/>
+        </a:xfrm>
+      </p:grpSpPr>
+      <p:sp>
+        <p:nvSpPr>
+          <p:cNvPr id="2" name="Title 1">
+            <a:extLst>
+              <a:ext uri="{FF2B5EF4-FFF2-40B4-BE49-F238E27FC236}">
+                <a16:creationId xmlns:a16="http://schemas.microsoft.com/office/drawing/2014/main" id="{9A24F3C0-79DF-338F-B84C-124E93530E14}"/>
+              </a:ext>
+            </a:extLst>
+          </p:cNvPr>
+          <p:cNvSpPr>
+            <a:spLocks noGrp="1"/>
+          </p:cNvSpPr>
+          <p:nvPr>
+            <p:ph type="title"/>
+          </p:nvPr>
+        </p:nvSpPr>
+        <p:spPr/>
+        <p:txBody>
+          <a:bodyPr/>
+          <a:lstStyle/>
+          <a:p>
+            <a:r>
+              <a:rPr lang="en-US" dirty="0"/>
+              <a:t>Collections API</a:t>
+            </a:r>
+          </a:p>
+        </p:txBody>
+      </p:sp>
+      <p:sp>
+        <p:nvSpPr>
+          <p:cNvPr id="3" name="Content Placeholder 2">
+            <a:extLst>
+              <a:ext uri="{FF2B5EF4-FFF2-40B4-BE49-F238E27FC236}">
+                <a16:creationId xmlns:a16="http://schemas.microsoft.com/office/drawing/2014/main" id="{75AAFD62-7918-78F7-FBEC-59D5E0D93B22}"/>
+              </a:ext>
+            </a:extLst>
+          </p:cNvPr>
+          <p:cNvSpPr>
+            <a:spLocks noGrp="1"/>
+          </p:cNvSpPr>
+          <p:nvPr>
+            <p:ph idx="1"/>
+          </p:nvPr>
+        </p:nvSpPr>
+        <p:spPr>
+          <a:xfrm>
+            <a:off x="742690" y="2413727"/>
+            <a:ext cx="5301118" cy="3678303"/>
+          </a:xfrm>
+        </p:spPr>
+        <p:txBody>
+          <a:bodyPr/>
+          <a:lstStyle/>
+          <a:p>
+            <a:r>
+              <a:rPr lang="en-US" dirty="0"/>
+              <a:t>We have many types of collections, which usually inherit the Collection interface, except for Map</a:t>
+            </a:r>
+          </a:p>
+          <a:p>
+            <a:pPr lvl="1"/>
+            <a:r>
+              <a:rPr lang="en-US" dirty="0"/>
+              <a:t>Map is still considered to be part of the Collections API however</a:t>
+            </a:r>
+          </a:p>
+          <a:p>
+            <a:r>
+              <a:rPr lang="en-US" dirty="0"/>
+              <a:t>Collections from the API are imported from ‘</a:t>
+            </a:r>
+            <a:r>
+              <a:rPr lang="en-US" dirty="0" err="1"/>
+              <a:t>java.util</a:t>
+            </a:r>
+            <a:r>
+              <a:rPr lang="en-US" dirty="0"/>
+              <a:t>’ </a:t>
+            </a:r>
+          </a:p>
+          <a:p>
+            <a:r>
+              <a:rPr lang="en-US" dirty="0"/>
+              <a:t>Prefer interfaces over concretions </a:t>
+            </a:r>
+          </a:p>
+          <a:p>
+            <a:pPr lvl="1"/>
+            <a:r>
+              <a:rPr lang="en-US" dirty="0"/>
+              <a:t>I.e. List&lt;String&gt; names = new </a:t>
+            </a:r>
+            <a:r>
+              <a:rPr lang="en-US" dirty="0" err="1"/>
+              <a:t>ArrayList</a:t>
+            </a:r>
+            <a:r>
+              <a:rPr lang="en-US" dirty="0"/>
+              <a:t>&lt;&gt;(); </a:t>
+            </a:r>
+          </a:p>
+          <a:p>
+            <a:pPr lvl="1"/>
+            <a:r>
+              <a:rPr lang="en-US" dirty="0"/>
+              <a:t>NOT </a:t>
+            </a:r>
+            <a:r>
+              <a:rPr lang="en-US" dirty="0" err="1"/>
+              <a:t>ArrayList</a:t>
+            </a:r>
+            <a:r>
+              <a:rPr lang="en-US" dirty="0"/>
+              <a:t>&lt;String&gt; names = new </a:t>
+            </a:r>
+            <a:r>
+              <a:rPr lang="en-US" dirty="0" err="1"/>
+              <a:t>ArrayList</a:t>
+            </a:r>
+            <a:r>
+              <a:rPr lang="en-US" dirty="0"/>
+              <a:t>&lt;&gt;();</a:t>
+            </a:r>
+          </a:p>
+        </p:txBody>
+      </p:sp>
+      <p:pic>
+        <p:nvPicPr>
+          <p:cNvPr id="5" name="Picture 4">
+            <a:extLst>
+              <a:ext uri="{FF2B5EF4-FFF2-40B4-BE49-F238E27FC236}">
+                <a16:creationId xmlns:a16="http://schemas.microsoft.com/office/drawing/2014/main" id="{5C302CAA-CEC8-1578-74A8-3C8A33910D1B}"/>
+              </a:ext>
+            </a:extLst>
+          </p:cNvPr>
+          <p:cNvPicPr>
+            <a:picLocks noChangeAspect="1"/>
+          </p:cNvPicPr>
+          <p:nvPr/>
+        </p:nvPicPr>
+        <p:blipFill>
+          <a:blip r:embed="rId2"/>
+          <a:stretch>
+            <a:fillRect/>
+          </a:stretch>
+        </p:blipFill>
+        <p:spPr>
+          <a:xfrm>
+            <a:off x="6481473" y="2180496"/>
+            <a:ext cx="4471809" cy="4144766"/>
+          </a:xfrm>
+          <a:prstGeom prst="rect">
+            <a:avLst/>
+          </a:prstGeom>
+        </p:spPr>
+      </p:pic>
+    </p:spTree>
+    <p:extLst>
+      <p:ext uri="{BB962C8B-B14F-4D97-AF65-F5344CB8AC3E}">
+        <p14:creationId xmlns:p14="http://schemas.microsoft.com/office/powerpoint/2010/main" val="3637316829"/>
+      </p:ext>
+    </p:extLst>
+  </p:cSld>
+  <p:clrMapOvr>
+    <a:masterClrMapping/>
+  </p:clrMapOvr>
+</p:sld>
+</file>
+
+<file path=ppt/slides/slide30.xml><?xml version="1.0" encoding="utf-8"?>
 <p:sld xmlns:a="http://schemas.openxmlformats.org/drawingml/2006/main" xmlns:r="http://schemas.openxmlformats.org/officeDocument/2006/relationships" xmlns:p="http://schemas.openxmlformats.org/presentationml/2006/main">
   <p:cSld>
     <p:bg>
@@ -8839,7 +11269,7 @@
 </p:sld>
 </file>
 
-<file path=ppt/slides/slide28.xml><?xml version="1.0" encoding="utf-8"?>
+<file path=ppt/slides/slide31.xml><?xml version="1.0" encoding="utf-8"?>
 <p:sld xmlns:a="http://schemas.openxmlformats.org/drawingml/2006/main" xmlns:r="http://schemas.openxmlformats.org/officeDocument/2006/relationships" xmlns:p="http://schemas.openxmlformats.org/presentationml/2006/main">
   <p:cSld>
     <p:spTree>
@@ -9523,7 +11953,7 @@
 </p:sld>
 </file>
 
-<file path=ppt/slides/slide29.xml><?xml version="1.0" encoding="utf-8"?>
+<file path=ppt/slides/slide32.xml><?xml version="1.0" encoding="utf-8"?>
 <p:sld xmlns:a="http://schemas.openxmlformats.org/drawingml/2006/main" xmlns:r="http://schemas.openxmlformats.org/officeDocument/2006/relationships" xmlns:p="http://schemas.openxmlformats.org/presentationml/2006/main">
   <p:cSld>
     <p:spTree>
@@ -9760,7 +12190,7 @@
 </p:sld>
 </file>
 
-<file path=ppt/slides/slide3.xml><?xml version="1.0" encoding="utf-8"?>
+<file path=ppt/slides/slide33.xml><?xml version="1.0" encoding="utf-8"?>
 <p:sld xmlns:a="http://schemas.openxmlformats.org/drawingml/2006/main" xmlns:r="http://schemas.openxmlformats.org/officeDocument/2006/relationships" xmlns:p="http://schemas.openxmlformats.org/presentationml/2006/main">
   <p:cSld>
     <p:spTree>
@@ -9782,192 +12212,6 @@
           <p:cNvPr id="2" name="Title 1">
             <a:extLst>
               <a:ext uri="{FF2B5EF4-FFF2-40B4-BE49-F238E27FC236}">
-                <a16:creationId xmlns:a16="http://schemas.microsoft.com/office/drawing/2014/main" id="{9A24F3C0-79DF-338F-B84C-124E93530E14}"/>
-              </a:ext>
-            </a:extLst>
-          </p:cNvPr>
-          <p:cNvSpPr>
-            <a:spLocks noGrp="1"/>
-          </p:cNvSpPr>
-          <p:nvPr>
-            <p:ph type="title"/>
-          </p:nvPr>
-        </p:nvSpPr>
-        <p:spPr/>
-        <p:txBody>
-          <a:bodyPr/>
-          <a:lstStyle/>
-          <a:p>
-            <a:r>
-              <a:rPr lang="en-US" dirty="0"/>
-              <a:t>Collections API</a:t>
-            </a:r>
-          </a:p>
-        </p:txBody>
-      </p:sp>
-      <p:sp>
-        <p:nvSpPr>
-          <p:cNvPr id="3" name="Content Placeholder 2">
-            <a:extLst>
-              <a:ext uri="{FF2B5EF4-FFF2-40B4-BE49-F238E27FC236}">
-                <a16:creationId xmlns:a16="http://schemas.microsoft.com/office/drawing/2014/main" id="{75AAFD62-7918-78F7-FBEC-59D5E0D93B22}"/>
-              </a:ext>
-            </a:extLst>
-          </p:cNvPr>
-          <p:cNvSpPr>
-            <a:spLocks noGrp="1"/>
-          </p:cNvSpPr>
-          <p:nvPr>
-            <p:ph idx="1"/>
-          </p:nvPr>
-        </p:nvSpPr>
-        <p:spPr>
-          <a:xfrm>
-            <a:off x="742690" y="2413727"/>
-            <a:ext cx="5301118" cy="3678303"/>
-          </a:xfrm>
-        </p:spPr>
-        <p:txBody>
-          <a:bodyPr/>
-          <a:lstStyle/>
-          <a:p>
-            <a:r>
-              <a:rPr lang="en-US" dirty="0"/>
-              <a:t>We have many types of collections, which usually inherit the Collection interface, except for Map</a:t>
-            </a:r>
-          </a:p>
-          <a:p>
-            <a:pPr lvl="1"/>
-            <a:r>
-              <a:rPr lang="en-US" dirty="0"/>
-              <a:t>Map is still considered to be part of the Collections API however</a:t>
-            </a:r>
-          </a:p>
-          <a:p>
-            <a:r>
-              <a:rPr lang="en-US" dirty="0"/>
-              <a:t>Collections from the API are imported from ‘</a:t>
-            </a:r>
-            <a:r>
-              <a:rPr lang="en-US" dirty="0" err="1"/>
-              <a:t>java.util</a:t>
-            </a:r>
-            <a:r>
-              <a:rPr lang="en-US" dirty="0"/>
-              <a:t>’ </a:t>
-            </a:r>
-          </a:p>
-          <a:p>
-            <a:r>
-              <a:rPr lang="en-US" dirty="0"/>
-              <a:t>Prefer interfaces over concretions </a:t>
-            </a:r>
-          </a:p>
-          <a:p>
-            <a:pPr lvl="1"/>
-            <a:r>
-              <a:rPr lang="en-US" dirty="0"/>
-              <a:t>I.e. List&lt;String&gt; names = new </a:t>
-            </a:r>
-            <a:r>
-              <a:rPr lang="en-US" dirty="0" err="1"/>
-              <a:t>ArrayList</a:t>
-            </a:r>
-            <a:r>
-              <a:rPr lang="en-US" dirty="0"/>
-              <a:t>&lt;&gt;(); </a:t>
-            </a:r>
-          </a:p>
-          <a:p>
-            <a:pPr lvl="1"/>
-            <a:r>
-              <a:rPr lang="en-US" dirty="0"/>
-              <a:t>NOT </a:t>
-            </a:r>
-            <a:r>
-              <a:rPr lang="en-US" dirty="0" err="1"/>
-              <a:t>ArrayList</a:t>
-            </a:r>
-            <a:r>
-              <a:rPr lang="en-US" dirty="0"/>
-              <a:t>&lt;String&gt; names = new </a:t>
-            </a:r>
-            <a:r>
-              <a:rPr lang="en-US" dirty="0" err="1"/>
-              <a:t>ArrayList</a:t>
-            </a:r>
-            <a:r>
-              <a:rPr lang="en-US" dirty="0"/>
-              <a:t>&lt;&gt;();</a:t>
-            </a:r>
-          </a:p>
-        </p:txBody>
-      </p:sp>
-      <p:pic>
-        <p:nvPicPr>
-          <p:cNvPr id="5" name="Picture 4">
-            <a:extLst>
-              <a:ext uri="{FF2B5EF4-FFF2-40B4-BE49-F238E27FC236}">
-                <a16:creationId xmlns:a16="http://schemas.microsoft.com/office/drawing/2014/main" id="{5C302CAA-CEC8-1578-74A8-3C8A33910D1B}"/>
-              </a:ext>
-            </a:extLst>
-          </p:cNvPr>
-          <p:cNvPicPr>
-            <a:picLocks noChangeAspect="1"/>
-          </p:cNvPicPr>
-          <p:nvPr/>
-        </p:nvPicPr>
-        <p:blipFill>
-          <a:blip r:embed="rId2"/>
-          <a:stretch>
-            <a:fillRect/>
-          </a:stretch>
-        </p:blipFill>
-        <p:spPr>
-          <a:xfrm>
-            <a:off x="6481473" y="2180496"/>
-            <a:ext cx="4471809" cy="4144766"/>
-          </a:xfrm>
-          <a:prstGeom prst="rect">
-            <a:avLst/>
-          </a:prstGeom>
-        </p:spPr>
-      </p:pic>
-    </p:spTree>
-    <p:extLst>
-      <p:ext uri="{BB962C8B-B14F-4D97-AF65-F5344CB8AC3E}">
-        <p14:creationId xmlns:p14="http://schemas.microsoft.com/office/powerpoint/2010/main" val="3637316829"/>
-      </p:ext>
-    </p:extLst>
-  </p:cSld>
-  <p:clrMapOvr>
-    <a:masterClrMapping/>
-  </p:clrMapOvr>
-</p:sld>
-</file>
-
-<file path=ppt/slides/slide30.xml><?xml version="1.0" encoding="utf-8"?>
-<p:sld xmlns:a="http://schemas.openxmlformats.org/drawingml/2006/main" xmlns:r="http://schemas.openxmlformats.org/officeDocument/2006/relationships" xmlns:p="http://schemas.openxmlformats.org/presentationml/2006/main">
-  <p:cSld>
-    <p:spTree>
-      <p:nvGrpSpPr>
-        <p:cNvPr id="1" name=""/>
-        <p:cNvGrpSpPr/>
-        <p:nvPr/>
-      </p:nvGrpSpPr>
-      <p:grpSpPr>
-        <a:xfrm>
-          <a:off x="0" y="0"/>
-          <a:ext cx="0" cy="0"/>
-          <a:chOff x="0" y="0"/>
-          <a:chExt cx="0" cy="0"/>
-        </a:xfrm>
-      </p:grpSpPr>
-      <p:sp>
-        <p:nvSpPr>
-          <p:cNvPr id="2" name="Title 1">
-            <a:extLst>
-              <a:ext uri="{FF2B5EF4-FFF2-40B4-BE49-F238E27FC236}">
                 <a16:creationId xmlns:a16="http://schemas.microsoft.com/office/drawing/2014/main" id="{16FD355D-62AC-E24C-7DA7-19CFB2B34F13}"/>
               </a:ext>
             </a:extLst>
@@ -10150,7 +12394,7 @@
 </p:sld>
 </file>
 
-<file path=ppt/slides/slide31.xml><?xml version="1.0" encoding="utf-8"?>
+<file path=ppt/slides/slide34.xml><?xml version="1.0" encoding="utf-8"?>
 <p:sld xmlns:a="http://schemas.openxmlformats.org/drawingml/2006/main" xmlns:r="http://schemas.openxmlformats.org/officeDocument/2006/relationships" xmlns:p="http://schemas.openxmlformats.org/presentationml/2006/main">
   <p:cSld>
     <p:bg>
@@ -10887,7 +13131,7 @@
 </p:sld>
 </file>
 
-<file path=ppt/slides/slide32.xml><?xml version="1.0" encoding="utf-8"?>
+<file path=ppt/slides/slide35.xml><?xml version="1.0" encoding="utf-8"?>
 <p:sld xmlns:a="http://schemas.openxmlformats.org/drawingml/2006/main" xmlns:r="http://schemas.openxmlformats.org/officeDocument/2006/relationships" xmlns:p="http://schemas.openxmlformats.org/presentationml/2006/main">
   <p:cSld>
     <p:spTree>
@@ -11013,7 +13257,7 @@
 </p:sld>
 </file>
 
-<file path=ppt/slides/slide33.xml><?xml version="1.0" encoding="utf-8"?>
+<file path=ppt/slides/slide36.xml><?xml version="1.0" encoding="utf-8"?>
 <p:sld xmlns:a="http://schemas.openxmlformats.org/drawingml/2006/main" xmlns:r="http://schemas.openxmlformats.org/officeDocument/2006/relationships" xmlns:p="http://schemas.openxmlformats.org/presentationml/2006/main">
   <p:cSld>
     <p:spTree>
@@ -11162,7 +13406,7 @@
 </p:sld>
 </file>
 
-<file path=ppt/slides/slide34.xml><?xml version="1.0" encoding="utf-8"?>
+<file path=ppt/slides/slide37.xml><?xml version="1.0" encoding="utf-8"?>
 <p:sld xmlns:a="http://schemas.openxmlformats.org/drawingml/2006/main" xmlns:r="http://schemas.openxmlformats.org/officeDocument/2006/relationships" xmlns:p="http://schemas.openxmlformats.org/presentationml/2006/main">
   <p:cSld>
     <p:spTree>
@@ -11339,7 +13583,7 @@
 </p:sld>
 </file>
 
-<file path=ppt/slides/slide35.xml><?xml version="1.0" encoding="utf-8"?>
+<file path=ppt/slides/slide38.xml><?xml version="1.0" encoding="utf-8"?>
 <p:sld xmlns:a="http://schemas.openxmlformats.org/drawingml/2006/main" xmlns:r="http://schemas.openxmlformats.org/officeDocument/2006/relationships" xmlns:p="http://schemas.openxmlformats.org/presentationml/2006/main">
   <p:cSld>
     <p:spTree>
@@ -11556,7 +13800,7 @@
 </p:sld>
 </file>
 
-<file path=ppt/slides/slide36.xml><?xml version="1.0" encoding="utf-8"?>
+<file path=ppt/slides/slide39.xml><?xml version="1.0" encoding="utf-8"?>
 <p:sld xmlns:a="http://schemas.openxmlformats.org/drawingml/2006/main" xmlns:r="http://schemas.openxmlformats.org/officeDocument/2006/relationships" xmlns:p="http://schemas.openxmlformats.org/presentationml/2006/main">
   <p:cSld>
     <p:spTree>
@@ -12013,634 +14257,6 @@
 </p:sld>
 </file>
 
-<file path=ppt/slides/slide37.xml><?xml version="1.0" encoding="utf-8"?>
-<p:sld xmlns:a="http://schemas.openxmlformats.org/drawingml/2006/main" xmlns:r="http://schemas.openxmlformats.org/officeDocument/2006/relationships" xmlns:p="http://schemas.openxmlformats.org/presentationml/2006/main">
-  <p:cSld>
-    <p:spTree>
-      <p:nvGrpSpPr>
-        <p:cNvPr id="1" name=""/>
-        <p:cNvGrpSpPr/>
-        <p:nvPr/>
-      </p:nvGrpSpPr>
-      <p:grpSpPr>
-        <a:xfrm>
-          <a:off x="0" y="0"/>
-          <a:ext cx="0" cy="0"/>
-          <a:chOff x="0" y="0"/>
-          <a:chExt cx="0" cy="0"/>
-        </a:xfrm>
-      </p:grpSpPr>
-      <p:sp>
-        <p:nvSpPr>
-          <p:cNvPr id="2" name="Title 1">
-            <a:extLst>
-              <a:ext uri="{FF2B5EF4-FFF2-40B4-BE49-F238E27FC236}">
-                <a16:creationId xmlns:a16="http://schemas.microsoft.com/office/drawing/2014/main" id="{F6C69135-6FF1-FC10-8C8D-959FE14D8CDC}"/>
-              </a:ext>
-            </a:extLst>
-          </p:cNvPr>
-          <p:cNvSpPr>
-            <a:spLocks noGrp="1"/>
-          </p:cNvSpPr>
-          <p:nvPr>
-            <p:ph type="title"/>
-          </p:nvPr>
-        </p:nvSpPr>
-        <p:spPr/>
-        <p:txBody>
-          <a:bodyPr/>
-          <a:lstStyle/>
-          <a:p>
-            <a:r>
-              <a:rPr lang="en-US" dirty="0" err="1"/>
-              <a:t>Resultlset</a:t>
-            </a:r>
-            <a:r>
-              <a:rPr lang="en-US" dirty="0"/>
-              <a:t> methods</a:t>
-            </a:r>
-          </a:p>
-        </p:txBody>
-      </p:sp>
-      <p:sp>
-        <p:nvSpPr>
-          <p:cNvPr id="3" name="Content Placeholder 2">
-            <a:extLst>
-              <a:ext uri="{FF2B5EF4-FFF2-40B4-BE49-F238E27FC236}">
-                <a16:creationId xmlns:a16="http://schemas.microsoft.com/office/drawing/2014/main" id="{F2103841-528E-CF1A-F652-72C68E5515AE}"/>
-              </a:ext>
-            </a:extLst>
-          </p:cNvPr>
-          <p:cNvSpPr>
-            <a:spLocks noGrp="1"/>
-          </p:cNvSpPr>
-          <p:nvPr>
-            <p:ph idx="1"/>
-          </p:nvPr>
-        </p:nvSpPr>
-        <p:spPr>
-          <a:xfrm>
-            <a:off x="581192" y="2066796"/>
-            <a:ext cx="11029615" cy="4709786"/>
-          </a:xfrm>
-        </p:spPr>
-        <p:txBody>
-          <a:bodyPr>
-            <a:normAutofit fontScale="77500" lnSpcReduction="20000"/>
-          </a:bodyPr>
-          <a:lstStyle/>
-          <a:p>
-            <a:r>
-              <a:rPr lang="en-US" dirty="0"/>
-              <a:t>next()</a:t>
-            </a:r>
-          </a:p>
-          <a:p>
-            <a:pPr lvl="1"/>
-            <a:r>
-              <a:rPr lang="en-US" dirty="0"/>
-              <a:t>Moves the cursor to the next row in the result set and returns true if a valid row exists. This method is typically used in a loop to iterate through all rows.</a:t>
-            </a:r>
-          </a:p>
-          <a:p>
-            <a:r>
-              <a:rPr lang="en-US" dirty="0"/>
-              <a:t>previous()</a:t>
-            </a:r>
-          </a:p>
-          <a:p>
-            <a:pPr lvl="1"/>
-            <a:r>
-              <a:rPr lang="en-US" dirty="0"/>
-              <a:t>Moves the cursor to the previous row in the result set and returns true if a valid row exists.</a:t>
-            </a:r>
-          </a:p>
-          <a:p>
-            <a:r>
-              <a:rPr lang="en-US" dirty="0"/>
-              <a:t>first()</a:t>
-            </a:r>
-          </a:p>
-          <a:p>
-            <a:pPr lvl="1"/>
-            <a:r>
-              <a:rPr lang="en-US" dirty="0"/>
-              <a:t>Moves the cursor to the first row in the result set and returns true if a valid row exists.</a:t>
-            </a:r>
-          </a:p>
-          <a:p>
-            <a:r>
-              <a:rPr lang="en-US" dirty="0"/>
-              <a:t>last()</a:t>
-            </a:r>
-          </a:p>
-          <a:p>
-            <a:pPr lvl="1"/>
-            <a:r>
-              <a:rPr lang="en-US" dirty="0"/>
-              <a:t>Moves the cursor to the last row in the result set and returns true if a valid row exists.</a:t>
-            </a:r>
-          </a:p>
-          <a:p>
-            <a:r>
-              <a:rPr lang="en-US" dirty="0"/>
-              <a:t>absolute(int row)</a:t>
-            </a:r>
-          </a:p>
-          <a:p>
-            <a:pPr lvl="1"/>
-            <a:r>
-              <a:rPr lang="en-US" dirty="0"/>
-              <a:t>Moves the cursor to the specified row number, where the first row is 1. Returns true if the specified row is valid.</a:t>
-            </a:r>
-          </a:p>
-          <a:p>
-            <a:r>
-              <a:rPr lang="en-US" dirty="0"/>
-              <a:t>relative(int rows)</a:t>
-            </a:r>
-          </a:p>
-          <a:p>
-            <a:pPr lvl="1"/>
-            <a:r>
-              <a:rPr lang="en-US" dirty="0"/>
-              <a:t>Moves the cursor forward or backward by the specified number of rows. The argument can be positive or negative, indicating the direction and magnitude of movement.</a:t>
-            </a:r>
-          </a:p>
-          <a:p>
-            <a:r>
-              <a:rPr lang="en-US" dirty="0" err="1"/>
-              <a:t>isFirst</a:t>
-            </a:r>
-            <a:r>
-              <a:rPr lang="en-US" dirty="0"/>
-              <a:t>()</a:t>
-            </a:r>
-          </a:p>
-          <a:p>
-            <a:pPr lvl="1"/>
-            <a:r>
-              <a:rPr lang="en-US" dirty="0"/>
-              <a:t>Returns true if the cursor is currently positioned at the first row in the result set.</a:t>
-            </a:r>
-          </a:p>
-          <a:p>
-            <a:r>
-              <a:rPr lang="en-US" dirty="0" err="1"/>
-              <a:t>isLast</a:t>
-            </a:r>
-            <a:r>
-              <a:rPr lang="en-US" dirty="0"/>
-              <a:t>()</a:t>
-            </a:r>
-          </a:p>
-          <a:p>
-            <a:pPr lvl="1"/>
-            <a:r>
-              <a:rPr lang="en-US" dirty="0"/>
-              <a:t>Returns true if the cursor is currently positioned at the last row in the result set.</a:t>
-            </a:r>
-          </a:p>
-          <a:p>
-            <a:endParaRPr lang="en-US" dirty="0"/>
-          </a:p>
-        </p:txBody>
-      </p:sp>
-    </p:spTree>
-    <p:extLst>
-      <p:ext uri="{BB962C8B-B14F-4D97-AF65-F5344CB8AC3E}">
-        <p14:creationId xmlns:p14="http://schemas.microsoft.com/office/powerpoint/2010/main" val="3453384709"/>
-      </p:ext>
-    </p:extLst>
-  </p:cSld>
-  <p:clrMapOvr>
-    <a:masterClrMapping/>
-  </p:clrMapOvr>
-</p:sld>
-</file>
-
-<file path=ppt/slides/slide38.xml><?xml version="1.0" encoding="utf-8"?>
-<p:sld xmlns:a="http://schemas.openxmlformats.org/drawingml/2006/main" xmlns:r="http://schemas.openxmlformats.org/officeDocument/2006/relationships" xmlns:p="http://schemas.openxmlformats.org/presentationml/2006/main">
-  <p:cSld>
-    <p:spTree>
-      <p:nvGrpSpPr>
-        <p:cNvPr id="1" name=""/>
-        <p:cNvGrpSpPr/>
-        <p:nvPr/>
-      </p:nvGrpSpPr>
-      <p:grpSpPr>
-        <a:xfrm>
-          <a:off x="0" y="0"/>
-          <a:ext cx="0" cy="0"/>
-          <a:chOff x="0" y="0"/>
-          <a:chExt cx="0" cy="0"/>
-        </a:xfrm>
-      </p:grpSpPr>
-      <p:sp>
-        <p:nvSpPr>
-          <p:cNvPr id="2" name="Title 1">
-            <a:extLst>
-              <a:ext uri="{FF2B5EF4-FFF2-40B4-BE49-F238E27FC236}">
-                <a16:creationId xmlns:a16="http://schemas.microsoft.com/office/drawing/2014/main" id="{394154ED-13F7-7C62-E9BF-F4BAA098B4D5}"/>
-              </a:ext>
-            </a:extLst>
-          </p:cNvPr>
-          <p:cNvSpPr>
-            <a:spLocks noGrp="1"/>
-          </p:cNvSpPr>
-          <p:nvPr>
-            <p:ph type="title"/>
-          </p:nvPr>
-        </p:nvSpPr>
-        <p:spPr/>
-        <p:txBody>
-          <a:bodyPr/>
-          <a:lstStyle/>
-          <a:p>
-            <a:r>
-              <a:rPr lang="en-US" dirty="0"/>
-              <a:t>Callable statement example – in &amp; out param</a:t>
-            </a:r>
-          </a:p>
-        </p:txBody>
-      </p:sp>
-      <p:sp>
-        <p:nvSpPr>
-          <p:cNvPr id="5" name="TextBox 4">
-            <a:extLst>
-              <a:ext uri="{FF2B5EF4-FFF2-40B4-BE49-F238E27FC236}">
-                <a16:creationId xmlns:a16="http://schemas.microsoft.com/office/drawing/2014/main" id="{7A6532B1-11CA-E156-CF29-10285234C8D6}"/>
-              </a:ext>
-            </a:extLst>
-          </p:cNvPr>
-          <p:cNvSpPr txBox="1"/>
-          <p:nvPr/>
-        </p:nvSpPr>
-        <p:spPr>
-          <a:xfrm>
-            <a:off x="3047478" y="2556722"/>
-            <a:ext cx="5983788" cy="2585323"/>
-          </a:xfrm>
-          <a:prstGeom prst="rect">
-            <a:avLst/>
-          </a:prstGeom>
-          <a:noFill/>
-        </p:spPr>
-        <p:txBody>
-          <a:bodyPr wrap="square">
-            <a:spAutoFit/>
-          </a:bodyPr>
-          <a:lstStyle/>
-          <a:p>
-            <a:r>
-              <a:rPr lang="en-US" dirty="0" err="1"/>
-              <a:t>CallableStatement</a:t>
-            </a:r>
-            <a:r>
-              <a:rPr lang="en-US" dirty="0"/>
-              <a:t> statement =</a:t>
-            </a:r>
-          </a:p>
-          <a:p>
-            <a:r>
-              <a:rPr lang="en-US" dirty="0"/>
-              <a:t>    </a:t>
-            </a:r>
-            <a:r>
-              <a:rPr lang="en-US" dirty="0" err="1"/>
-              <a:t>connection.prepareCall</a:t>
-            </a:r>
-            <a:r>
-              <a:rPr lang="en-US" dirty="0"/>
-              <a:t>("{call </a:t>
-            </a:r>
-            <a:r>
-              <a:rPr lang="en-US" dirty="0" err="1"/>
-              <a:t>calculate_gpa</a:t>
-            </a:r>
-            <a:r>
-              <a:rPr lang="en-US" dirty="0"/>
-              <a:t>(?, ?)}");</a:t>
-            </a:r>
-          </a:p>
-          <a:p>
-            <a:endParaRPr lang="en-US" dirty="0"/>
-          </a:p>
-          <a:p>
-            <a:r>
-              <a:rPr lang="en-US" dirty="0" err="1"/>
-              <a:t>statement.setInt</a:t>
-            </a:r>
-            <a:r>
-              <a:rPr lang="en-US" dirty="0"/>
-              <a:t>(1, 42);</a:t>
-            </a:r>
-          </a:p>
-          <a:p>
-            <a:r>
-              <a:rPr lang="en-US" dirty="0" err="1"/>
-              <a:t>statement.registerOutParameter</a:t>
-            </a:r>
-            <a:r>
-              <a:rPr lang="en-US" dirty="0"/>
-              <a:t>(2, </a:t>
-            </a:r>
-            <a:r>
-              <a:rPr lang="en-US" dirty="0" err="1"/>
-              <a:t>Types.DOUBLE</a:t>
-            </a:r>
-            <a:r>
-              <a:rPr lang="en-US" dirty="0"/>
-              <a:t>);</a:t>
-            </a:r>
-          </a:p>
-          <a:p>
-            <a:endParaRPr lang="en-US" dirty="0"/>
-          </a:p>
-          <a:p>
-            <a:r>
-              <a:rPr lang="en-US" dirty="0" err="1"/>
-              <a:t>statement.execute</a:t>
-            </a:r>
-            <a:r>
-              <a:rPr lang="en-US" dirty="0"/>
-              <a:t>();</a:t>
-            </a:r>
-          </a:p>
-          <a:p>
-            <a:endParaRPr lang="en-US" dirty="0"/>
-          </a:p>
-          <a:p>
-            <a:r>
-              <a:rPr lang="en-US" dirty="0"/>
-              <a:t>double </a:t>
-            </a:r>
-            <a:r>
-              <a:rPr lang="en-US" dirty="0" err="1"/>
-              <a:t>gpa</a:t>
-            </a:r>
-            <a:r>
-              <a:rPr lang="en-US" dirty="0"/>
-              <a:t> = </a:t>
-            </a:r>
-            <a:r>
-              <a:rPr lang="en-US" dirty="0" err="1"/>
-              <a:t>statement.getDouble</a:t>
-            </a:r>
-            <a:r>
-              <a:rPr lang="en-US" dirty="0"/>
-              <a:t>(2);</a:t>
-            </a:r>
-          </a:p>
-        </p:txBody>
-      </p:sp>
-    </p:spTree>
-    <p:extLst>
-      <p:ext uri="{BB962C8B-B14F-4D97-AF65-F5344CB8AC3E}">
-        <p14:creationId xmlns:p14="http://schemas.microsoft.com/office/powerpoint/2010/main" val="4094025243"/>
-      </p:ext>
-    </p:extLst>
-  </p:cSld>
-  <p:clrMapOvr>
-    <a:masterClrMapping/>
-  </p:clrMapOvr>
-</p:sld>
-</file>
-
-<file path=ppt/slides/slide39.xml><?xml version="1.0" encoding="utf-8"?>
-<p:sld xmlns:a="http://schemas.openxmlformats.org/drawingml/2006/main" xmlns:r="http://schemas.openxmlformats.org/officeDocument/2006/relationships" xmlns:p="http://schemas.openxmlformats.org/presentationml/2006/main">
-  <p:cSld>
-    <p:spTree>
-      <p:nvGrpSpPr>
-        <p:cNvPr id="1" name=""/>
-        <p:cNvGrpSpPr/>
-        <p:nvPr/>
-      </p:nvGrpSpPr>
-      <p:grpSpPr>
-        <a:xfrm>
-          <a:off x="0" y="0"/>
-          <a:ext cx="0" cy="0"/>
-          <a:chOff x="0" y="0"/>
-          <a:chExt cx="0" cy="0"/>
-        </a:xfrm>
-      </p:grpSpPr>
-      <p:sp>
-        <p:nvSpPr>
-          <p:cNvPr id="2" name="Title 1">
-            <a:extLst>
-              <a:ext uri="{FF2B5EF4-FFF2-40B4-BE49-F238E27FC236}">
-                <a16:creationId xmlns:a16="http://schemas.microsoft.com/office/drawing/2014/main" id="{7EB0C4E4-3750-2EAB-3F03-BD99418777D3}"/>
-              </a:ext>
-            </a:extLst>
-          </p:cNvPr>
-          <p:cNvSpPr>
-            <a:spLocks noGrp="1"/>
-          </p:cNvSpPr>
-          <p:nvPr>
-            <p:ph type="title"/>
-          </p:nvPr>
-        </p:nvSpPr>
-        <p:spPr/>
-        <p:txBody>
-          <a:bodyPr/>
-          <a:lstStyle/>
-          <a:p>
-            <a:r>
-              <a:rPr lang="en-US" dirty="0"/>
-              <a:t>Creating a </a:t>
-            </a:r>
-            <a:r>
-              <a:rPr lang="en-US" dirty="0" err="1"/>
-              <a:t>connectionfactory</a:t>
-            </a:r>
-            <a:r>
-              <a:rPr lang="en-US" dirty="0"/>
-              <a:t> utility class</a:t>
-            </a:r>
-          </a:p>
-        </p:txBody>
-      </p:sp>
-      <p:pic>
-        <p:nvPicPr>
-          <p:cNvPr id="5" name="Content Placeholder 4">
-            <a:extLst>
-              <a:ext uri="{FF2B5EF4-FFF2-40B4-BE49-F238E27FC236}">
-                <a16:creationId xmlns:a16="http://schemas.microsoft.com/office/drawing/2014/main" id="{B727215C-EA41-AC98-0477-5226A68BA128}"/>
-              </a:ext>
-            </a:extLst>
-          </p:cNvPr>
-          <p:cNvPicPr>
-            <a:picLocks noGrp="1" noChangeAspect="1"/>
-          </p:cNvPicPr>
-          <p:nvPr>
-            <p:ph idx="1"/>
-          </p:nvPr>
-        </p:nvPicPr>
-        <p:blipFill>
-          <a:blip r:embed="rId2"/>
-          <a:stretch>
-            <a:fillRect/>
-          </a:stretch>
-        </p:blipFill>
-        <p:spPr>
-          <a:xfrm>
-            <a:off x="6422744" y="1860480"/>
-            <a:ext cx="4366673" cy="4295364"/>
-          </a:xfrm>
-          <a:prstGeom prst="rect">
-            <a:avLst/>
-          </a:prstGeom>
-        </p:spPr>
-      </p:pic>
-      <p:sp>
-        <p:nvSpPr>
-          <p:cNvPr id="6" name="TextBox 5">
-            <a:extLst>
-              <a:ext uri="{FF2B5EF4-FFF2-40B4-BE49-F238E27FC236}">
-                <a16:creationId xmlns:a16="http://schemas.microsoft.com/office/drawing/2014/main" id="{4F586557-E5F7-111B-0588-D51ACE800C94}"/>
-              </a:ext>
-            </a:extLst>
-          </p:cNvPr>
-          <p:cNvSpPr txBox="1"/>
-          <p:nvPr/>
-        </p:nvSpPr>
-        <p:spPr>
-          <a:xfrm>
-            <a:off x="792447" y="2851099"/>
-            <a:ext cx="4628367" cy="2585323"/>
-          </a:xfrm>
-          <a:prstGeom prst="rect">
-            <a:avLst/>
-          </a:prstGeom>
-          <a:noFill/>
-        </p:spPr>
-        <p:txBody>
-          <a:bodyPr wrap="square" rtlCol="0">
-            <a:spAutoFit/>
-          </a:bodyPr>
-          <a:lstStyle/>
-          <a:p>
-            <a:pPr marL="285750" indent="-285750">
-              <a:buClr>
-                <a:schemeClr val="accent2"/>
-              </a:buClr>
-              <a:buFont typeface="Wingdings" panose="05000000000000000000" pitchFamily="2" charset="2"/>
-              <a:buChar char="§"/>
-            </a:pPr>
-            <a:r>
-              <a:rPr lang="en-US" dirty="0" err="1"/>
-              <a:t>java.util.Properties</a:t>
-            </a:r>
-            <a:r>
-              <a:rPr lang="en-US" dirty="0"/>
-              <a:t> – allows us to keep secrets safe in a </a:t>
-            </a:r>
-            <a:r>
-              <a:rPr lang="en-US" dirty="0" err="1"/>
-              <a:t>db.properties</a:t>
-            </a:r>
-            <a:r>
-              <a:rPr lang="en-US" dirty="0"/>
-              <a:t> file</a:t>
-            </a:r>
-          </a:p>
-          <a:p>
-            <a:pPr marL="285750" indent="-285750">
-              <a:buClr>
-                <a:schemeClr val="accent2"/>
-              </a:buClr>
-              <a:buFont typeface="Wingdings" panose="05000000000000000000" pitchFamily="2" charset="2"/>
-              <a:buChar char="§"/>
-            </a:pPr>
-            <a:r>
-              <a:rPr lang="en-US" dirty="0"/>
-              <a:t>We can use this utility class to generate a connection whenever we need to execute commands against our database</a:t>
-            </a:r>
-          </a:p>
-          <a:p>
-            <a:pPr marL="285750" indent="-285750">
-              <a:buClr>
-                <a:schemeClr val="accent2"/>
-              </a:buClr>
-              <a:buFont typeface="Wingdings" panose="05000000000000000000" pitchFamily="2" charset="2"/>
-              <a:buChar char="§"/>
-            </a:pPr>
-            <a:r>
-              <a:rPr lang="en-US" dirty="0"/>
-              <a:t>If using AWS RDS:</a:t>
-            </a:r>
-          </a:p>
-          <a:p>
-            <a:pPr marL="742950" lvl="1" indent="-285750">
-              <a:buClr>
-                <a:schemeClr val="accent2"/>
-              </a:buClr>
-              <a:buFont typeface="Wingdings" panose="05000000000000000000" pitchFamily="2" charset="2"/>
-              <a:buChar char="§"/>
-            </a:pPr>
-            <a:r>
-              <a:rPr lang="en-US" dirty="0"/>
-              <a:t>The user/password is your RDS master user + master password</a:t>
-            </a:r>
-          </a:p>
-          <a:p>
-            <a:pPr marL="742950" lvl="1" indent="-285750">
-              <a:buClr>
-                <a:schemeClr val="accent2"/>
-              </a:buClr>
-              <a:buFont typeface="Wingdings" panose="05000000000000000000" pitchFamily="2" charset="2"/>
-              <a:buChar char="§"/>
-            </a:pPr>
-            <a:r>
-              <a:rPr lang="en-US" dirty="0"/>
-              <a:t>We will see how to find the URL later</a:t>
-            </a:r>
-          </a:p>
-        </p:txBody>
-      </p:sp>
-      <p:pic>
-        <p:nvPicPr>
-          <p:cNvPr id="8" name="Picture 7">
-            <a:extLst>
-              <a:ext uri="{FF2B5EF4-FFF2-40B4-BE49-F238E27FC236}">
-                <a16:creationId xmlns:a16="http://schemas.microsoft.com/office/drawing/2014/main" id="{17BE40EA-C454-05B7-4CDC-697F71D05136}"/>
-              </a:ext>
-            </a:extLst>
-          </p:cNvPr>
-          <p:cNvPicPr>
-            <a:picLocks noChangeAspect="1"/>
-          </p:cNvPicPr>
-          <p:nvPr/>
-        </p:nvPicPr>
-        <p:blipFill>
-          <a:blip r:embed="rId3"/>
-          <a:stretch>
-            <a:fillRect/>
-          </a:stretch>
-        </p:blipFill>
-        <p:spPr>
-          <a:xfrm>
-            <a:off x="2547624" y="6214365"/>
-            <a:ext cx="8241793" cy="568912"/>
-          </a:xfrm>
-          <a:prstGeom prst="rect">
-            <a:avLst/>
-          </a:prstGeom>
-        </p:spPr>
-      </p:pic>
-    </p:spTree>
-    <p:extLst>
-      <p:ext uri="{BB962C8B-B14F-4D97-AF65-F5344CB8AC3E}">
-        <p14:creationId xmlns:p14="http://schemas.microsoft.com/office/powerpoint/2010/main" val="3893804983"/>
-      </p:ext>
-    </p:extLst>
-  </p:cSld>
-  <p:clrMapOvr>
-    <a:masterClrMapping/>
-  </p:clrMapOvr>
-</p:sld>
-</file>
-
 <file path=ppt/slides/slide4.xml><?xml version="1.0" encoding="utf-8"?>
 <p:sld xmlns:a="http://schemas.openxmlformats.org/drawingml/2006/main" xmlns:r="http://schemas.openxmlformats.org/officeDocument/2006/relationships" xmlns:p="http://schemas.openxmlformats.org/presentationml/2006/main">
   <p:cSld>
@@ -13350,6 +14966,634 @@
           <p:cNvPr id="2" name="Title 1">
             <a:extLst>
               <a:ext uri="{FF2B5EF4-FFF2-40B4-BE49-F238E27FC236}">
+                <a16:creationId xmlns:a16="http://schemas.microsoft.com/office/drawing/2014/main" id="{F6C69135-6FF1-FC10-8C8D-959FE14D8CDC}"/>
+              </a:ext>
+            </a:extLst>
+          </p:cNvPr>
+          <p:cNvSpPr>
+            <a:spLocks noGrp="1"/>
+          </p:cNvSpPr>
+          <p:nvPr>
+            <p:ph type="title"/>
+          </p:nvPr>
+        </p:nvSpPr>
+        <p:spPr/>
+        <p:txBody>
+          <a:bodyPr/>
+          <a:lstStyle/>
+          <a:p>
+            <a:r>
+              <a:rPr lang="en-US" dirty="0" err="1"/>
+              <a:t>Resultlset</a:t>
+            </a:r>
+            <a:r>
+              <a:rPr lang="en-US" dirty="0"/>
+              <a:t> methods</a:t>
+            </a:r>
+          </a:p>
+        </p:txBody>
+      </p:sp>
+      <p:sp>
+        <p:nvSpPr>
+          <p:cNvPr id="3" name="Content Placeholder 2">
+            <a:extLst>
+              <a:ext uri="{FF2B5EF4-FFF2-40B4-BE49-F238E27FC236}">
+                <a16:creationId xmlns:a16="http://schemas.microsoft.com/office/drawing/2014/main" id="{F2103841-528E-CF1A-F652-72C68E5515AE}"/>
+              </a:ext>
+            </a:extLst>
+          </p:cNvPr>
+          <p:cNvSpPr>
+            <a:spLocks noGrp="1"/>
+          </p:cNvSpPr>
+          <p:nvPr>
+            <p:ph idx="1"/>
+          </p:nvPr>
+        </p:nvSpPr>
+        <p:spPr>
+          <a:xfrm>
+            <a:off x="581192" y="2066796"/>
+            <a:ext cx="11029615" cy="4709786"/>
+          </a:xfrm>
+        </p:spPr>
+        <p:txBody>
+          <a:bodyPr>
+            <a:normAutofit fontScale="77500" lnSpcReduction="20000"/>
+          </a:bodyPr>
+          <a:lstStyle/>
+          <a:p>
+            <a:r>
+              <a:rPr lang="en-US" dirty="0"/>
+              <a:t>next()</a:t>
+            </a:r>
+          </a:p>
+          <a:p>
+            <a:pPr lvl="1"/>
+            <a:r>
+              <a:rPr lang="en-US" dirty="0"/>
+              <a:t>Moves the cursor to the next row in the result set and returns true if a valid row exists. This method is typically used in a loop to iterate through all rows.</a:t>
+            </a:r>
+          </a:p>
+          <a:p>
+            <a:r>
+              <a:rPr lang="en-US" dirty="0"/>
+              <a:t>previous()</a:t>
+            </a:r>
+          </a:p>
+          <a:p>
+            <a:pPr lvl="1"/>
+            <a:r>
+              <a:rPr lang="en-US" dirty="0"/>
+              <a:t>Moves the cursor to the previous row in the result set and returns true if a valid row exists.</a:t>
+            </a:r>
+          </a:p>
+          <a:p>
+            <a:r>
+              <a:rPr lang="en-US" dirty="0"/>
+              <a:t>first()</a:t>
+            </a:r>
+          </a:p>
+          <a:p>
+            <a:pPr lvl="1"/>
+            <a:r>
+              <a:rPr lang="en-US" dirty="0"/>
+              <a:t>Moves the cursor to the first row in the result set and returns true if a valid row exists.</a:t>
+            </a:r>
+          </a:p>
+          <a:p>
+            <a:r>
+              <a:rPr lang="en-US" dirty="0"/>
+              <a:t>last()</a:t>
+            </a:r>
+          </a:p>
+          <a:p>
+            <a:pPr lvl="1"/>
+            <a:r>
+              <a:rPr lang="en-US" dirty="0"/>
+              <a:t>Moves the cursor to the last row in the result set and returns true if a valid row exists.</a:t>
+            </a:r>
+          </a:p>
+          <a:p>
+            <a:r>
+              <a:rPr lang="en-US" dirty="0"/>
+              <a:t>absolute(int row)</a:t>
+            </a:r>
+          </a:p>
+          <a:p>
+            <a:pPr lvl="1"/>
+            <a:r>
+              <a:rPr lang="en-US" dirty="0"/>
+              <a:t>Moves the cursor to the specified row number, where the first row is 1. Returns true if the specified row is valid.</a:t>
+            </a:r>
+          </a:p>
+          <a:p>
+            <a:r>
+              <a:rPr lang="en-US" dirty="0"/>
+              <a:t>relative(int rows)</a:t>
+            </a:r>
+          </a:p>
+          <a:p>
+            <a:pPr lvl="1"/>
+            <a:r>
+              <a:rPr lang="en-US" dirty="0"/>
+              <a:t>Moves the cursor forward or backward by the specified number of rows. The argument can be positive or negative, indicating the direction and magnitude of movement.</a:t>
+            </a:r>
+          </a:p>
+          <a:p>
+            <a:r>
+              <a:rPr lang="en-US" dirty="0" err="1"/>
+              <a:t>isFirst</a:t>
+            </a:r>
+            <a:r>
+              <a:rPr lang="en-US" dirty="0"/>
+              <a:t>()</a:t>
+            </a:r>
+          </a:p>
+          <a:p>
+            <a:pPr lvl="1"/>
+            <a:r>
+              <a:rPr lang="en-US" dirty="0"/>
+              <a:t>Returns true if the cursor is currently positioned at the first row in the result set.</a:t>
+            </a:r>
+          </a:p>
+          <a:p>
+            <a:r>
+              <a:rPr lang="en-US" dirty="0" err="1"/>
+              <a:t>isLast</a:t>
+            </a:r>
+            <a:r>
+              <a:rPr lang="en-US" dirty="0"/>
+              <a:t>()</a:t>
+            </a:r>
+          </a:p>
+          <a:p>
+            <a:pPr lvl="1"/>
+            <a:r>
+              <a:rPr lang="en-US" dirty="0"/>
+              <a:t>Returns true if the cursor is currently positioned at the last row in the result set.</a:t>
+            </a:r>
+          </a:p>
+          <a:p>
+            <a:endParaRPr lang="en-US" dirty="0"/>
+          </a:p>
+        </p:txBody>
+      </p:sp>
+    </p:spTree>
+    <p:extLst>
+      <p:ext uri="{BB962C8B-B14F-4D97-AF65-F5344CB8AC3E}">
+        <p14:creationId xmlns:p14="http://schemas.microsoft.com/office/powerpoint/2010/main" val="3453384709"/>
+      </p:ext>
+    </p:extLst>
+  </p:cSld>
+  <p:clrMapOvr>
+    <a:masterClrMapping/>
+  </p:clrMapOvr>
+</p:sld>
+</file>
+
+<file path=ppt/slides/slide41.xml><?xml version="1.0" encoding="utf-8"?>
+<p:sld xmlns:a="http://schemas.openxmlformats.org/drawingml/2006/main" xmlns:r="http://schemas.openxmlformats.org/officeDocument/2006/relationships" xmlns:p="http://schemas.openxmlformats.org/presentationml/2006/main">
+  <p:cSld>
+    <p:spTree>
+      <p:nvGrpSpPr>
+        <p:cNvPr id="1" name=""/>
+        <p:cNvGrpSpPr/>
+        <p:nvPr/>
+      </p:nvGrpSpPr>
+      <p:grpSpPr>
+        <a:xfrm>
+          <a:off x="0" y="0"/>
+          <a:ext cx="0" cy="0"/>
+          <a:chOff x="0" y="0"/>
+          <a:chExt cx="0" cy="0"/>
+        </a:xfrm>
+      </p:grpSpPr>
+      <p:sp>
+        <p:nvSpPr>
+          <p:cNvPr id="2" name="Title 1">
+            <a:extLst>
+              <a:ext uri="{FF2B5EF4-FFF2-40B4-BE49-F238E27FC236}">
+                <a16:creationId xmlns:a16="http://schemas.microsoft.com/office/drawing/2014/main" id="{394154ED-13F7-7C62-E9BF-F4BAA098B4D5}"/>
+              </a:ext>
+            </a:extLst>
+          </p:cNvPr>
+          <p:cNvSpPr>
+            <a:spLocks noGrp="1"/>
+          </p:cNvSpPr>
+          <p:nvPr>
+            <p:ph type="title"/>
+          </p:nvPr>
+        </p:nvSpPr>
+        <p:spPr/>
+        <p:txBody>
+          <a:bodyPr/>
+          <a:lstStyle/>
+          <a:p>
+            <a:r>
+              <a:rPr lang="en-US" dirty="0"/>
+              <a:t>Callable statement example – in &amp; out param</a:t>
+            </a:r>
+          </a:p>
+        </p:txBody>
+      </p:sp>
+      <p:sp>
+        <p:nvSpPr>
+          <p:cNvPr id="5" name="TextBox 4">
+            <a:extLst>
+              <a:ext uri="{FF2B5EF4-FFF2-40B4-BE49-F238E27FC236}">
+                <a16:creationId xmlns:a16="http://schemas.microsoft.com/office/drawing/2014/main" id="{7A6532B1-11CA-E156-CF29-10285234C8D6}"/>
+              </a:ext>
+            </a:extLst>
+          </p:cNvPr>
+          <p:cNvSpPr txBox="1"/>
+          <p:nvPr/>
+        </p:nvSpPr>
+        <p:spPr>
+          <a:xfrm>
+            <a:off x="3047478" y="2556722"/>
+            <a:ext cx="5983788" cy="2585323"/>
+          </a:xfrm>
+          <a:prstGeom prst="rect">
+            <a:avLst/>
+          </a:prstGeom>
+          <a:noFill/>
+        </p:spPr>
+        <p:txBody>
+          <a:bodyPr wrap="square">
+            <a:spAutoFit/>
+          </a:bodyPr>
+          <a:lstStyle/>
+          <a:p>
+            <a:r>
+              <a:rPr lang="en-US" dirty="0" err="1"/>
+              <a:t>CallableStatement</a:t>
+            </a:r>
+            <a:r>
+              <a:rPr lang="en-US" dirty="0"/>
+              <a:t> statement =</a:t>
+            </a:r>
+          </a:p>
+          <a:p>
+            <a:r>
+              <a:rPr lang="en-US" dirty="0"/>
+              <a:t>    </a:t>
+            </a:r>
+            <a:r>
+              <a:rPr lang="en-US" dirty="0" err="1"/>
+              <a:t>connection.prepareCall</a:t>
+            </a:r>
+            <a:r>
+              <a:rPr lang="en-US" dirty="0"/>
+              <a:t>("{call </a:t>
+            </a:r>
+            <a:r>
+              <a:rPr lang="en-US" dirty="0" err="1"/>
+              <a:t>calculate_gpa</a:t>
+            </a:r>
+            <a:r>
+              <a:rPr lang="en-US" dirty="0"/>
+              <a:t>(?, ?)}");</a:t>
+            </a:r>
+          </a:p>
+          <a:p>
+            <a:endParaRPr lang="en-US" dirty="0"/>
+          </a:p>
+          <a:p>
+            <a:r>
+              <a:rPr lang="en-US" dirty="0" err="1"/>
+              <a:t>statement.setInt</a:t>
+            </a:r>
+            <a:r>
+              <a:rPr lang="en-US" dirty="0"/>
+              <a:t>(1, 42);</a:t>
+            </a:r>
+          </a:p>
+          <a:p>
+            <a:r>
+              <a:rPr lang="en-US" dirty="0" err="1"/>
+              <a:t>statement.registerOutParameter</a:t>
+            </a:r>
+            <a:r>
+              <a:rPr lang="en-US" dirty="0"/>
+              <a:t>(2, </a:t>
+            </a:r>
+            <a:r>
+              <a:rPr lang="en-US" dirty="0" err="1"/>
+              <a:t>Types.DOUBLE</a:t>
+            </a:r>
+            <a:r>
+              <a:rPr lang="en-US" dirty="0"/>
+              <a:t>);</a:t>
+            </a:r>
+          </a:p>
+          <a:p>
+            <a:endParaRPr lang="en-US" dirty="0"/>
+          </a:p>
+          <a:p>
+            <a:r>
+              <a:rPr lang="en-US" dirty="0" err="1"/>
+              <a:t>statement.execute</a:t>
+            </a:r>
+            <a:r>
+              <a:rPr lang="en-US" dirty="0"/>
+              <a:t>();</a:t>
+            </a:r>
+          </a:p>
+          <a:p>
+            <a:endParaRPr lang="en-US" dirty="0"/>
+          </a:p>
+          <a:p>
+            <a:r>
+              <a:rPr lang="en-US" dirty="0"/>
+              <a:t>double </a:t>
+            </a:r>
+            <a:r>
+              <a:rPr lang="en-US" dirty="0" err="1"/>
+              <a:t>gpa</a:t>
+            </a:r>
+            <a:r>
+              <a:rPr lang="en-US" dirty="0"/>
+              <a:t> = </a:t>
+            </a:r>
+            <a:r>
+              <a:rPr lang="en-US" dirty="0" err="1"/>
+              <a:t>statement.getDouble</a:t>
+            </a:r>
+            <a:r>
+              <a:rPr lang="en-US" dirty="0"/>
+              <a:t>(2);</a:t>
+            </a:r>
+          </a:p>
+        </p:txBody>
+      </p:sp>
+    </p:spTree>
+    <p:extLst>
+      <p:ext uri="{BB962C8B-B14F-4D97-AF65-F5344CB8AC3E}">
+        <p14:creationId xmlns:p14="http://schemas.microsoft.com/office/powerpoint/2010/main" val="4094025243"/>
+      </p:ext>
+    </p:extLst>
+  </p:cSld>
+  <p:clrMapOvr>
+    <a:masterClrMapping/>
+  </p:clrMapOvr>
+</p:sld>
+</file>
+
+<file path=ppt/slides/slide42.xml><?xml version="1.0" encoding="utf-8"?>
+<p:sld xmlns:a="http://schemas.openxmlformats.org/drawingml/2006/main" xmlns:r="http://schemas.openxmlformats.org/officeDocument/2006/relationships" xmlns:p="http://schemas.openxmlformats.org/presentationml/2006/main">
+  <p:cSld>
+    <p:spTree>
+      <p:nvGrpSpPr>
+        <p:cNvPr id="1" name=""/>
+        <p:cNvGrpSpPr/>
+        <p:nvPr/>
+      </p:nvGrpSpPr>
+      <p:grpSpPr>
+        <a:xfrm>
+          <a:off x="0" y="0"/>
+          <a:ext cx="0" cy="0"/>
+          <a:chOff x="0" y="0"/>
+          <a:chExt cx="0" cy="0"/>
+        </a:xfrm>
+      </p:grpSpPr>
+      <p:sp>
+        <p:nvSpPr>
+          <p:cNvPr id="2" name="Title 1">
+            <a:extLst>
+              <a:ext uri="{FF2B5EF4-FFF2-40B4-BE49-F238E27FC236}">
+                <a16:creationId xmlns:a16="http://schemas.microsoft.com/office/drawing/2014/main" id="{7EB0C4E4-3750-2EAB-3F03-BD99418777D3}"/>
+              </a:ext>
+            </a:extLst>
+          </p:cNvPr>
+          <p:cNvSpPr>
+            <a:spLocks noGrp="1"/>
+          </p:cNvSpPr>
+          <p:nvPr>
+            <p:ph type="title"/>
+          </p:nvPr>
+        </p:nvSpPr>
+        <p:spPr/>
+        <p:txBody>
+          <a:bodyPr/>
+          <a:lstStyle/>
+          <a:p>
+            <a:r>
+              <a:rPr lang="en-US" dirty="0"/>
+              <a:t>Creating a </a:t>
+            </a:r>
+            <a:r>
+              <a:rPr lang="en-US" dirty="0" err="1"/>
+              <a:t>connectionfactory</a:t>
+            </a:r>
+            <a:r>
+              <a:rPr lang="en-US" dirty="0"/>
+              <a:t> utility class</a:t>
+            </a:r>
+          </a:p>
+        </p:txBody>
+      </p:sp>
+      <p:pic>
+        <p:nvPicPr>
+          <p:cNvPr id="5" name="Content Placeholder 4">
+            <a:extLst>
+              <a:ext uri="{FF2B5EF4-FFF2-40B4-BE49-F238E27FC236}">
+                <a16:creationId xmlns:a16="http://schemas.microsoft.com/office/drawing/2014/main" id="{B727215C-EA41-AC98-0477-5226A68BA128}"/>
+              </a:ext>
+            </a:extLst>
+          </p:cNvPr>
+          <p:cNvPicPr>
+            <a:picLocks noGrp="1" noChangeAspect="1"/>
+          </p:cNvPicPr>
+          <p:nvPr>
+            <p:ph idx="1"/>
+          </p:nvPr>
+        </p:nvPicPr>
+        <p:blipFill>
+          <a:blip r:embed="rId2"/>
+          <a:stretch>
+            <a:fillRect/>
+          </a:stretch>
+        </p:blipFill>
+        <p:spPr>
+          <a:xfrm>
+            <a:off x="6422744" y="1860480"/>
+            <a:ext cx="4366673" cy="4295364"/>
+          </a:xfrm>
+          <a:prstGeom prst="rect">
+            <a:avLst/>
+          </a:prstGeom>
+        </p:spPr>
+      </p:pic>
+      <p:sp>
+        <p:nvSpPr>
+          <p:cNvPr id="6" name="TextBox 5">
+            <a:extLst>
+              <a:ext uri="{FF2B5EF4-FFF2-40B4-BE49-F238E27FC236}">
+                <a16:creationId xmlns:a16="http://schemas.microsoft.com/office/drawing/2014/main" id="{4F586557-E5F7-111B-0588-D51ACE800C94}"/>
+              </a:ext>
+            </a:extLst>
+          </p:cNvPr>
+          <p:cNvSpPr txBox="1"/>
+          <p:nvPr/>
+        </p:nvSpPr>
+        <p:spPr>
+          <a:xfrm>
+            <a:off x="792447" y="2851099"/>
+            <a:ext cx="4628367" cy="2585323"/>
+          </a:xfrm>
+          <a:prstGeom prst="rect">
+            <a:avLst/>
+          </a:prstGeom>
+          <a:noFill/>
+        </p:spPr>
+        <p:txBody>
+          <a:bodyPr wrap="square" rtlCol="0">
+            <a:spAutoFit/>
+          </a:bodyPr>
+          <a:lstStyle/>
+          <a:p>
+            <a:pPr marL="285750" indent="-285750">
+              <a:buClr>
+                <a:schemeClr val="accent2"/>
+              </a:buClr>
+              <a:buFont typeface="Wingdings" panose="05000000000000000000" pitchFamily="2" charset="2"/>
+              <a:buChar char="§"/>
+            </a:pPr>
+            <a:r>
+              <a:rPr lang="en-US" dirty="0" err="1"/>
+              <a:t>java.util.Properties</a:t>
+            </a:r>
+            <a:r>
+              <a:rPr lang="en-US" dirty="0"/>
+              <a:t> – allows us to keep secrets safe in a </a:t>
+            </a:r>
+            <a:r>
+              <a:rPr lang="en-US" dirty="0" err="1"/>
+              <a:t>db.properties</a:t>
+            </a:r>
+            <a:r>
+              <a:rPr lang="en-US" dirty="0"/>
+              <a:t> file</a:t>
+            </a:r>
+          </a:p>
+          <a:p>
+            <a:pPr marL="285750" indent="-285750">
+              <a:buClr>
+                <a:schemeClr val="accent2"/>
+              </a:buClr>
+              <a:buFont typeface="Wingdings" panose="05000000000000000000" pitchFamily="2" charset="2"/>
+              <a:buChar char="§"/>
+            </a:pPr>
+            <a:r>
+              <a:rPr lang="en-US" dirty="0"/>
+              <a:t>We can use this utility class to generate a connection whenever we need to execute commands against our database</a:t>
+            </a:r>
+          </a:p>
+          <a:p>
+            <a:pPr marL="285750" indent="-285750">
+              <a:buClr>
+                <a:schemeClr val="accent2"/>
+              </a:buClr>
+              <a:buFont typeface="Wingdings" panose="05000000000000000000" pitchFamily="2" charset="2"/>
+              <a:buChar char="§"/>
+            </a:pPr>
+            <a:r>
+              <a:rPr lang="en-US" dirty="0"/>
+              <a:t>If using AWS RDS:</a:t>
+            </a:r>
+          </a:p>
+          <a:p>
+            <a:pPr marL="742950" lvl="1" indent="-285750">
+              <a:buClr>
+                <a:schemeClr val="accent2"/>
+              </a:buClr>
+              <a:buFont typeface="Wingdings" panose="05000000000000000000" pitchFamily="2" charset="2"/>
+              <a:buChar char="§"/>
+            </a:pPr>
+            <a:r>
+              <a:rPr lang="en-US" dirty="0"/>
+              <a:t>The user/password is your RDS master user + master password</a:t>
+            </a:r>
+          </a:p>
+          <a:p>
+            <a:pPr marL="742950" lvl="1" indent="-285750">
+              <a:buClr>
+                <a:schemeClr val="accent2"/>
+              </a:buClr>
+              <a:buFont typeface="Wingdings" panose="05000000000000000000" pitchFamily="2" charset="2"/>
+              <a:buChar char="§"/>
+            </a:pPr>
+            <a:r>
+              <a:rPr lang="en-US" dirty="0"/>
+              <a:t>We will see how to find the URL later</a:t>
+            </a:r>
+          </a:p>
+        </p:txBody>
+      </p:sp>
+      <p:pic>
+        <p:nvPicPr>
+          <p:cNvPr id="8" name="Picture 7">
+            <a:extLst>
+              <a:ext uri="{FF2B5EF4-FFF2-40B4-BE49-F238E27FC236}">
+                <a16:creationId xmlns:a16="http://schemas.microsoft.com/office/drawing/2014/main" id="{17BE40EA-C454-05B7-4CDC-697F71D05136}"/>
+              </a:ext>
+            </a:extLst>
+          </p:cNvPr>
+          <p:cNvPicPr>
+            <a:picLocks noChangeAspect="1"/>
+          </p:cNvPicPr>
+          <p:nvPr/>
+        </p:nvPicPr>
+        <p:blipFill>
+          <a:blip r:embed="rId3"/>
+          <a:stretch>
+            <a:fillRect/>
+          </a:stretch>
+        </p:blipFill>
+        <p:spPr>
+          <a:xfrm>
+            <a:off x="2547624" y="6214365"/>
+            <a:ext cx="8241793" cy="568912"/>
+          </a:xfrm>
+          <a:prstGeom prst="rect">
+            <a:avLst/>
+          </a:prstGeom>
+        </p:spPr>
+      </p:pic>
+    </p:spTree>
+    <p:extLst>
+      <p:ext uri="{BB962C8B-B14F-4D97-AF65-F5344CB8AC3E}">
+        <p14:creationId xmlns:p14="http://schemas.microsoft.com/office/powerpoint/2010/main" val="3893804983"/>
+      </p:ext>
+    </p:extLst>
+  </p:cSld>
+  <p:clrMapOvr>
+    <a:masterClrMapping/>
+  </p:clrMapOvr>
+</p:sld>
+</file>
+
+<file path=ppt/slides/slide43.xml><?xml version="1.0" encoding="utf-8"?>
+<p:sld xmlns:a="http://schemas.openxmlformats.org/drawingml/2006/main" xmlns:r="http://schemas.openxmlformats.org/officeDocument/2006/relationships" xmlns:p="http://schemas.openxmlformats.org/presentationml/2006/main">
+  <p:cSld>
+    <p:spTree>
+      <p:nvGrpSpPr>
+        <p:cNvPr id="1" name=""/>
+        <p:cNvGrpSpPr/>
+        <p:nvPr/>
+      </p:nvGrpSpPr>
+      <p:grpSpPr>
+        <a:xfrm>
+          <a:off x="0" y="0"/>
+          <a:ext cx="0" cy="0"/>
+          <a:chOff x="0" y="0"/>
+          <a:chExt cx="0" cy="0"/>
+        </a:xfrm>
+      </p:grpSpPr>
+      <p:sp>
+        <p:nvSpPr>
+          <p:cNvPr id="2" name="Title 1">
+            <a:extLst>
+              <a:ext uri="{FF2B5EF4-FFF2-40B4-BE49-F238E27FC236}">
                 <a16:creationId xmlns:a16="http://schemas.microsoft.com/office/drawing/2014/main" id="{60DEE475-84B6-3B5B-F38E-FC2EA34D123B}"/>
               </a:ext>
             </a:extLst>
@@ -13522,7 +15766,7 @@
 </p:sld>
 </file>
 
-<file path=ppt/slides/slide41.xml><?xml version="1.0" encoding="utf-8"?>
+<file path=ppt/slides/slide44.xml><?xml version="1.0" encoding="utf-8"?>
 <p:sld xmlns:a="http://schemas.openxmlformats.org/drawingml/2006/main" xmlns:r="http://schemas.openxmlformats.org/officeDocument/2006/relationships" xmlns:p="http://schemas.openxmlformats.org/presentationml/2006/main">
   <p:cSld>
     <p:spTree>
@@ -13687,7 +15931,7 @@
 </p:sld>
 </file>
 
-<file path=ppt/slides/slide42.xml><?xml version="1.0" encoding="utf-8"?>
+<file path=ppt/slides/slide45.xml><?xml version="1.0" encoding="utf-8"?>
 <p:sld xmlns:a="http://schemas.openxmlformats.org/drawingml/2006/main" xmlns:r="http://schemas.openxmlformats.org/officeDocument/2006/relationships" xmlns:p="http://schemas.openxmlformats.org/presentationml/2006/main">
   <p:cSld>
     <p:spTree>
@@ -13836,7 +16080,7 @@
 </p:sld>
 </file>
 
-<file path=ppt/slides/slide43.xml><?xml version="1.0" encoding="utf-8"?>
+<file path=ppt/slides/slide46.xml><?xml version="1.0" encoding="utf-8"?>
 <p:sld xmlns:a="http://schemas.openxmlformats.org/drawingml/2006/main" xmlns:r="http://schemas.openxmlformats.org/officeDocument/2006/relationships" xmlns:p="http://schemas.openxmlformats.org/presentationml/2006/main" show="0">
   <p:cSld>
     <p:spTree>
